--- a/03-课件PPT/讲次版/第6章-4-讲次 6-4 · 版本灰度回滚与平台封装.pptx
+++ b/03-课件PPT/讲次版/第6章-4-讲次 6-4 · 版本灰度回滚与平台封装.pptx
@@ -5140,14 +5140,2069 @@
       </p:sp>
       <p:sp>
         <p:nvSpPr>
-          <p:cNvPr id="5" name="TextBox 4"/>
+          <p:cNvPr id="5" name="Rounded Rectangle 4"/>
+          <p:cNvSpPr/>
+          <p:nvPr/>
+        </p:nvSpPr>
+        <p:spPr>
+          <a:xfrm>
+            <a:off x="857250" y="2667000"/>
+            <a:ext cx="1476375" cy="1143000"/>
+          </a:xfrm>
+          <a:prstGeom prst="roundRect">
+            <a:avLst>
+              <a:gd name="adj" fmla="val 8000"/>
+            </a:avLst>
+          </a:prstGeom>
+          <a:solidFill>
+            <a:srgbClr val="FFFFFF"/>
+          </a:solidFill>
+          <a:ln w="12700">
+            <a:solidFill>
+              <a:srgbClr val="2563EB"/>
+            </a:solidFill>
+          </a:ln>
+          <a:effectLst/>
+        </p:spPr>
+        <p:style>
+          <a:lnRef idx="1">
+            <a:schemeClr val="accent1"/>
+          </a:lnRef>
+          <a:fillRef idx="3">
+            <a:schemeClr val="accent1"/>
+          </a:fillRef>
+          <a:effectRef idx="2">
+            <a:schemeClr val="accent1"/>
+          </a:effectRef>
+          <a:fontRef idx="minor">
+            <a:schemeClr val="lt1"/>
+          </a:fontRef>
+        </p:style>
+        <p:txBody>
+          <a:bodyPr rtlCol="0" anchor="ctr"/>
+          <a:lstStyle/>
+          <a:p>
+            <a:pPr algn="ctr"/>
+          </a:p>
+        </p:txBody>
+      </p:sp>
+      <p:sp>
+        <p:nvSpPr>
+          <p:cNvPr id="6" name="Rectangle 5"/>
+          <p:cNvSpPr/>
+          <p:nvPr/>
+        </p:nvSpPr>
+        <p:spPr>
+          <a:xfrm>
+            <a:off x="857250" y="2667000"/>
+            <a:ext cx="1476375" cy="57150"/>
+          </a:xfrm>
+          <a:prstGeom prst="rect">
+            <a:avLst/>
+          </a:prstGeom>
+          <a:solidFill>
+            <a:srgbClr val="2563EB"/>
+          </a:solidFill>
+          <a:ln>
+            <a:noFill/>
+          </a:ln>
+          <a:effectLst/>
+        </p:spPr>
+        <p:style>
+          <a:lnRef idx="1">
+            <a:schemeClr val="accent1"/>
+          </a:lnRef>
+          <a:fillRef idx="3">
+            <a:schemeClr val="accent1"/>
+          </a:fillRef>
+          <a:effectRef idx="2">
+            <a:schemeClr val="accent1"/>
+          </a:effectRef>
+          <a:fontRef idx="minor">
+            <a:schemeClr val="lt1"/>
+          </a:fontRef>
+        </p:style>
+        <p:txBody>
+          <a:bodyPr rtlCol="0" anchor="ctr"/>
+          <a:lstStyle/>
+          <a:p>
+            <a:pPr algn="ctr"/>
+          </a:p>
+        </p:txBody>
+      </p:sp>
+      <p:sp>
+        <p:nvSpPr>
+          <p:cNvPr id="7" name="Rounded Rectangle 6"/>
+          <p:cNvSpPr/>
+          <p:nvPr/>
+        </p:nvSpPr>
+        <p:spPr>
+          <a:xfrm>
+            <a:off x="1452562" y="2524125"/>
+            <a:ext cx="285750" cy="285750"/>
+          </a:xfrm>
+          <a:prstGeom prst="roundRect">
+            <a:avLst>
+              <a:gd name="adj" fmla="val 8000"/>
+            </a:avLst>
+          </a:prstGeom>
+          <a:solidFill>
+            <a:srgbClr val="2563EB"/>
+          </a:solidFill>
+          <a:ln>
+            <a:noFill/>
+          </a:ln>
+          <a:effectLst/>
+        </p:spPr>
+        <p:style>
+          <a:lnRef idx="1">
+            <a:schemeClr val="accent1"/>
+          </a:lnRef>
+          <a:fillRef idx="3">
+            <a:schemeClr val="accent1"/>
+          </a:fillRef>
+          <a:effectRef idx="2">
+            <a:schemeClr val="accent1"/>
+          </a:effectRef>
+          <a:fontRef idx="minor">
+            <a:schemeClr val="lt1"/>
+          </a:fontRef>
+        </p:style>
+        <p:txBody>
+          <a:bodyPr rtlCol="0" anchor="ctr"/>
+          <a:lstStyle/>
+          <a:p>
+            <a:pPr algn="ctr"/>
+          </a:p>
+        </p:txBody>
+      </p:sp>
+      <p:sp>
+        <p:nvSpPr>
+          <p:cNvPr id="8" name="TextBox 7"/>
           <p:cNvSpPr txBox="1"/>
           <p:nvPr/>
         </p:nvSpPr>
         <p:spPr>
           <a:xfrm>
-            <a:off x="9334500" y="0"/>
-            <a:ext cx="2667000" cy="704850"/>
+            <a:off x="1452562" y="2514600"/>
+            <a:ext cx="285750" cy="285750"/>
+          </a:xfrm>
+          <a:prstGeom prst="rect">
+            <a:avLst/>
+          </a:prstGeom>
+          <a:noFill/>
+        </p:spPr>
+        <p:txBody>
+          <a:bodyPr wrap="square" anchor="ctr">
+            <a:spAutoFit/>
+          </a:bodyPr>
+          <a:lstStyle/>
+          <a:p>
+            <a:pPr algn="ctr">
+              <a:lnSpc>
+                <a:spcPct val="100000"/>
+              </a:lnSpc>
+            </a:pPr>
+            <a:r>
+              <a:rPr sz="1300" b="1">
+                <a:solidFill>
+                  <a:srgbClr val="FFFFFF"/>
+                </a:solidFill>
+                <a:latin typeface="PingFang SC"/>
+              </a:rPr>
+              <a:t>1</a:t>
+            </a:r>
+          </a:p>
+        </p:txBody>
+      </p:sp>
+      <p:sp>
+        <p:nvSpPr>
+          <p:cNvPr id="9" name="TextBox 8"/>
+          <p:cNvSpPr txBox="1"/>
+          <p:nvPr/>
+        </p:nvSpPr>
+        <p:spPr>
+          <a:xfrm>
+            <a:off x="933450" y="2800350"/>
+            <a:ext cx="1323975" cy="952500"/>
+          </a:xfrm>
+          <a:prstGeom prst="rect">
+            <a:avLst/>
+          </a:prstGeom>
+          <a:noFill/>
+        </p:spPr>
+        <p:txBody>
+          <a:bodyPr wrap="square" anchor="ctr">
+            <a:spAutoFit/>
+          </a:bodyPr>
+          <a:lstStyle/>
+          <a:p>
+            <a:pPr algn="ctr">
+              <a:lnSpc>
+                <a:spcPct val="100000"/>
+              </a:lnSpc>
+            </a:pPr>
+            <a:r>
+              <a:rPr sz="1200" b="1">
+                <a:solidFill>
+                  <a:srgbClr val="475569"/>
+                </a:solidFill>
+                <a:latin typeface="PingFang SC"/>
+              </a:rPr>
+              <a:t>变更+评测通过</a:t>
+            </a:r>
+          </a:p>
+        </p:txBody>
+      </p:sp>
+      <p:sp>
+        <p:nvSpPr>
+          <p:cNvPr id="10" name="Rounded Rectangle 9"/>
+          <p:cNvSpPr/>
+          <p:nvPr/>
+        </p:nvSpPr>
+        <p:spPr>
+          <a:xfrm>
+            <a:off x="2657475" y="2667000"/>
+            <a:ext cx="1476375" cy="1143000"/>
+          </a:xfrm>
+          <a:prstGeom prst="roundRect">
+            <a:avLst>
+              <a:gd name="adj" fmla="val 8000"/>
+            </a:avLst>
+          </a:prstGeom>
+          <a:solidFill>
+            <a:srgbClr val="FFFFFF"/>
+          </a:solidFill>
+          <a:ln w="12700">
+            <a:solidFill>
+              <a:srgbClr val="14B8A6"/>
+            </a:solidFill>
+          </a:ln>
+          <a:effectLst/>
+        </p:spPr>
+        <p:style>
+          <a:lnRef idx="1">
+            <a:schemeClr val="accent1"/>
+          </a:lnRef>
+          <a:fillRef idx="3">
+            <a:schemeClr val="accent1"/>
+          </a:fillRef>
+          <a:effectRef idx="2">
+            <a:schemeClr val="accent1"/>
+          </a:effectRef>
+          <a:fontRef idx="minor">
+            <a:schemeClr val="lt1"/>
+          </a:fontRef>
+        </p:style>
+        <p:txBody>
+          <a:bodyPr rtlCol="0" anchor="ctr"/>
+          <a:lstStyle/>
+          <a:p>
+            <a:pPr algn="ctr"/>
+          </a:p>
+        </p:txBody>
+      </p:sp>
+      <p:sp>
+        <p:nvSpPr>
+          <p:cNvPr id="11" name="Rectangle 10"/>
+          <p:cNvSpPr/>
+          <p:nvPr/>
+        </p:nvSpPr>
+        <p:spPr>
+          <a:xfrm>
+            <a:off x="2657475" y="2667000"/>
+            <a:ext cx="1476375" cy="57150"/>
+          </a:xfrm>
+          <a:prstGeom prst="rect">
+            <a:avLst/>
+          </a:prstGeom>
+          <a:solidFill>
+            <a:srgbClr val="14B8A6"/>
+          </a:solidFill>
+          <a:ln>
+            <a:noFill/>
+          </a:ln>
+          <a:effectLst/>
+        </p:spPr>
+        <p:style>
+          <a:lnRef idx="1">
+            <a:schemeClr val="accent1"/>
+          </a:lnRef>
+          <a:fillRef idx="3">
+            <a:schemeClr val="accent1"/>
+          </a:fillRef>
+          <a:effectRef idx="2">
+            <a:schemeClr val="accent1"/>
+          </a:effectRef>
+          <a:fontRef idx="minor">
+            <a:schemeClr val="lt1"/>
+          </a:fontRef>
+        </p:style>
+        <p:txBody>
+          <a:bodyPr rtlCol="0" anchor="ctr"/>
+          <a:lstStyle/>
+          <a:p>
+            <a:pPr algn="ctr"/>
+          </a:p>
+        </p:txBody>
+      </p:sp>
+      <p:sp>
+        <p:nvSpPr>
+          <p:cNvPr id="12" name="Rounded Rectangle 11"/>
+          <p:cNvSpPr/>
+          <p:nvPr/>
+        </p:nvSpPr>
+        <p:spPr>
+          <a:xfrm>
+            <a:off x="3252787" y="2524125"/>
+            <a:ext cx="285750" cy="285750"/>
+          </a:xfrm>
+          <a:prstGeom prst="roundRect">
+            <a:avLst>
+              <a:gd name="adj" fmla="val 8000"/>
+            </a:avLst>
+          </a:prstGeom>
+          <a:solidFill>
+            <a:srgbClr val="14B8A6"/>
+          </a:solidFill>
+          <a:ln>
+            <a:noFill/>
+          </a:ln>
+          <a:effectLst/>
+        </p:spPr>
+        <p:style>
+          <a:lnRef idx="1">
+            <a:schemeClr val="accent1"/>
+          </a:lnRef>
+          <a:fillRef idx="3">
+            <a:schemeClr val="accent1"/>
+          </a:fillRef>
+          <a:effectRef idx="2">
+            <a:schemeClr val="accent1"/>
+          </a:effectRef>
+          <a:fontRef idx="minor">
+            <a:schemeClr val="lt1"/>
+          </a:fontRef>
+        </p:style>
+        <p:txBody>
+          <a:bodyPr rtlCol="0" anchor="ctr"/>
+          <a:lstStyle/>
+          <a:p>
+            <a:pPr algn="ctr"/>
+          </a:p>
+        </p:txBody>
+      </p:sp>
+      <p:sp>
+        <p:nvSpPr>
+          <p:cNvPr id="13" name="TextBox 12"/>
+          <p:cNvSpPr txBox="1"/>
+          <p:nvPr/>
+        </p:nvSpPr>
+        <p:spPr>
+          <a:xfrm>
+            <a:off x="3252787" y="2514600"/>
+            <a:ext cx="285750" cy="285750"/>
+          </a:xfrm>
+          <a:prstGeom prst="rect">
+            <a:avLst/>
+          </a:prstGeom>
+          <a:noFill/>
+        </p:spPr>
+        <p:txBody>
+          <a:bodyPr wrap="square" anchor="ctr">
+            <a:spAutoFit/>
+          </a:bodyPr>
+          <a:lstStyle/>
+          <a:p>
+            <a:pPr algn="ctr">
+              <a:lnSpc>
+                <a:spcPct val="100000"/>
+              </a:lnSpc>
+            </a:pPr>
+            <a:r>
+              <a:rPr sz="1300" b="1">
+                <a:solidFill>
+                  <a:srgbClr val="FFFFFF"/>
+                </a:solidFill>
+                <a:latin typeface="PingFang SC"/>
+              </a:rPr>
+              <a:t>2</a:t>
+            </a:r>
+          </a:p>
+        </p:txBody>
+      </p:sp>
+      <p:sp>
+        <p:nvSpPr>
+          <p:cNvPr id="14" name="TextBox 13"/>
+          <p:cNvSpPr txBox="1"/>
+          <p:nvPr/>
+        </p:nvSpPr>
+        <p:spPr>
+          <a:xfrm>
+            <a:off x="2733675" y="2800350"/>
+            <a:ext cx="1323975" cy="952500"/>
+          </a:xfrm>
+          <a:prstGeom prst="rect">
+            <a:avLst/>
+          </a:prstGeom>
+          <a:noFill/>
+        </p:spPr>
+        <p:txBody>
+          <a:bodyPr wrap="square" anchor="ctr">
+            <a:spAutoFit/>
+          </a:bodyPr>
+          <a:lstStyle/>
+          <a:p>
+            <a:pPr algn="ctr">
+              <a:lnSpc>
+                <a:spcPct val="100000"/>
+              </a:lnSpc>
+            </a:pPr>
+            <a:r>
+              <a:rPr sz="1200" b="1">
+                <a:solidFill>
+                  <a:srgbClr val="475569"/>
+                </a:solidFill>
+                <a:latin typeface="PingFang SC"/>
+              </a:rPr>
+              <a:t>审批</a:t>
+            </a:r>
+          </a:p>
+        </p:txBody>
+      </p:sp>
+      <p:cxnSp>
+        <p:nvCxnSpPr>
+          <p:cNvPr id="15" name="Connector 14"/>
+          <p:cNvCxnSpPr/>
+          <p:nvPr/>
+        </p:nvCxnSpPr>
+        <p:spPr>
+          <a:xfrm>
+            <a:off x="2390775" y="3238500"/>
+            <a:ext cx="190500" cy="0"/>
+          </a:xfrm>
+          <a:prstGeom prst="line">
+            <a:avLst/>
+          </a:prstGeom>
+          <a:ln w="20320">
+            <a:solidFill>
+              <a:srgbClr val="475569"/>
+            </a:solidFill>
+          </a:ln>
+        </p:spPr>
+        <p:style>
+          <a:lnRef idx="2">
+            <a:schemeClr val="accent1"/>
+          </a:lnRef>
+          <a:fillRef idx="0">
+            <a:schemeClr val="accent1"/>
+          </a:fillRef>
+          <a:effectRef idx="1">
+            <a:schemeClr val="accent1"/>
+          </a:effectRef>
+          <a:fontRef idx="minor">
+            <a:schemeClr val="tx1"/>
+          </a:fontRef>
+        </p:style>
+      </p:cxnSp>
+      <p:sp>
+        <p:nvSpPr>
+          <p:cNvPr id="16" name="Isosceles Triangle 15"/>
+          <p:cNvSpPr/>
+          <p:nvPr/>
+        </p:nvSpPr>
+        <p:spPr>
+          <a:xfrm rot="5400000">
+            <a:off x="2495551" y="3195638"/>
+            <a:ext cx="85725" cy="85725"/>
+          </a:xfrm>
+          <a:prstGeom prst="triangle">
+            <a:avLst/>
+          </a:prstGeom>
+          <a:solidFill>
+            <a:srgbClr val="475569"/>
+          </a:solidFill>
+          <a:ln>
+            <a:noFill/>
+          </a:ln>
+          <a:effectLst/>
+        </p:spPr>
+        <p:style>
+          <a:lnRef idx="1">
+            <a:schemeClr val="accent1"/>
+          </a:lnRef>
+          <a:fillRef idx="3">
+            <a:schemeClr val="accent1"/>
+          </a:fillRef>
+          <a:effectRef idx="2">
+            <a:schemeClr val="accent1"/>
+          </a:effectRef>
+          <a:fontRef idx="minor">
+            <a:schemeClr val="lt1"/>
+          </a:fontRef>
+        </p:style>
+        <p:txBody>
+          <a:bodyPr rtlCol="0" anchor="ctr"/>
+          <a:lstStyle/>
+          <a:p>
+            <a:pPr algn="ctr"/>
+          </a:p>
+        </p:txBody>
+      </p:sp>
+      <p:sp>
+        <p:nvSpPr>
+          <p:cNvPr id="17" name="Rounded Rectangle 16"/>
+          <p:cNvSpPr/>
+          <p:nvPr/>
+        </p:nvSpPr>
+        <p:spPr>
+          <a:xfrm>
+            <a:off x="4457700" y="2667000"/>
+            <a:ext cx="1476375" cy="1143000"/>
+          </a:xfrm>
+          <a:prstGeom prst="roundRect">
+            <a:avLst>
+              <a:gd name="adj" fmla="val 8000"/>
+            </a:avLst>
+          </a:prstGeom>
+          <a:solidFill>
+            <a:srgbClr val="FFFFFF"/>
+          </a:solidFill>
+          <a:ln w="12700">
+            <a:solidFill>
+              <a:srgbClr val="8B5CF6"/>
+            </a:solidFill>
+          </a:ln>
+          <a:effectLst/>
+        </p:spPr>
+        <p:style>
+          <a:lnRef idx="1">
+            <a:schemeClr val="accent1"/>
+          </a:lnRef>
+          <a:fillRef idx="3">
+            <a:schemeClr val="accent1"/>
+          </a:fillRef>
+          <a:effectRef idx="2">
+            <a:schemeClr val="accent1"/>
+          </a:effectRef>
+          <a:fontRef idx="minor">
+            <a:schemeClr val="lt1"/>
+          </a:fontRef>
+        </p:style>
+        <p:txBody>
+          <a:bodyPr rtlCol="0" anchor="ctr"/>
+          <a:lstStyle/>
+          <a:p>
+            <a:pPr algn="ctr"/>
+          </a:p>
+        </p:txBody>
+      </p:sp>
+      <p:sp>
+        <p:nvSpPr>
+          <p:cNvPr id="18" name="Rectangle 17"/>
+          <p:cNvSpPr/>
+          <p:nvPr/>
+        </p:nvSpPr>
+        <p:spPr>
+          <a:xfrm>
+            <a:off x="4457700" y="2667000"/>
+            <a:ext cx="1476375" cy="57150"/>
+          </a:xfrm>
+          <a:prstGeom prst="rect">
+            <a:avLst/>
+          </a:prstGeom>
+          <a:solidFill>
+            <a:srgbClr val="8B5CF6"/>
+          </a:solidFill>
+          <a:ln>
+            <a:noFill/>
+          </a:ln>
+          <a:effectLst/>
+        </p:spPr>
+        <p:style>
+          <a:lnRef idx="1">
+            <a:schemeClr val="accent1"/>
+          </a:lnRef>
+          <a:fillRef idx="3">
+            <a:schemeClr val="accent1"/>
+          </a:fillRef>
+          <a:effectRef idx="2">
+            <a:schemeClr val="accent1"/>
+          </a:effectRef>
+          <a:fontRef idx="minor">
+            <a:schemeClr val="lt1"/>
+          </a:fontRef>
+        </p:style>
+        <p:txBody>
+          <a:bodyPr rtlCol="0" anchor="ctr"/>
+          <a:lstStyle/>
+          <a:p>
+            <a:pPr algn="ctr"/>
+          </a:p>
+        </p:txBody>
+      </p:sp>
+      <p:sp>
+        <p:nvSpPr>
+          <p:cNvPr id="19" name="Rounded Rectangle 18"/>
+          <p:cNvSpPr/>
+          <p:nvPr/>
+        </p:nvSpPr>
+        <p:spPr>
+          <a:xfrm>
+            <a:off x="5053012" y="2524125"/>
+            <a:ext cx="285750" cy="285750"/>
+          </a:xfrm>
+          <a:prstGeom prst="roundRect">
+            <a:avLst>
+              <a:gd name="adj" fmla="val 8000"/>
+            </a:avLst>
+          </a:prstGeom>
+          <a:solidFill>
+            <a:srgbClr val="8B5CF6"/>
+          </a:solidFill>
+          <a:ln>
+            <a:noFill/>
+          </a:ln>
+          <a:effectLst/>
+        </p:spPr>
+        <p:style>
+          <a:lnRef idx="1">
+            <a:schemeClr val="accent1"/>
+          </a:lnRef>
+          <a:fillRef idx="3">
+            <a:schemeClr val="accent1"/>
+          </a:fillRef>
+          <a:effectRef idx="2">
+            <a:schemeClr val="accent1"/>
+          </a:effectRef>
+          <a:fontRef idx="minor">
+            <a:schemeClr val="lt1"/>
+          </a:fontRef>
+        </p:style>
+        <p:txBody>
+          <a:bodyPr rtlCol="0" anchor="ctr"/>
+          <a:lstStyle/>
+          <a:p>
+            <a:pPr algn="ctr"/>
+          </a:p>
+        </p:txBody>
+      </p:sp>
+      <p:sp>
+        <p:nvSpPr>
+          <p:cNvPr id="20" name="TextBox 19"/>
+          <p:cNvSpPr txBox="1"/>
+          <p:nvPr/>
+        </p:nvSpPr>
+        <p:spPr>
+          <a:xfrm>
+            <a:off x="5053012" y="2514600"/>
+            <a:ext cx="285750" cy="285750"/>
+          </a:xfrm>
+          <a:prstGeom prst="rect">
+            <a:avLst/>
+          </a:prstGeom>
+          <a:noFill/>
+        </p:spPr>
+        <p:txBody>
+          <a:bodyPr wrap="square" anchor="ctr">
+            <a:spAutoFit/>
+          </a:bodyPr>
+          <a:lstStyle/>
+          <a:p>
+            <a:pPr algn="ctr">
+              <a:lnSpc>
+                <a:spcPct val="100000"/>
+              </a:lnSpc>
+            </a:pPr>
+            <a:r>
+              <a:rPr sz="1300" b="1">
+                <a:solidFill>
+                  <a:srgbClr val="FFFFFF"/>
+                </a:solidFill>
+                <a:latin typeface="PingFang SC"/>
+              </a:rPr>
+              <a:t>3</a:t>
+            </a:r>
+          </a:p>
+        </p:txBody>
+      </p:sp>
+      <p:sp>
+        <p:nvSpPr>
+          <p:cNvPr id="21" name="TextBox 20"/>
+          <p:cNvSpPr txBox="1"/>
+          <p:nvPr/>
+        </p:nvSpPr>
+        <p:spPr>
+          <a:xfrm>
+            <a:off x="4533900" y="2800350"/>
+            <a:ext cx="1323975" cy="952500"/>
+          </a:xfrm>
+          <a:prstGeom prst="rect">
+            <a:avLst/>
+          </a:prstGeom>
+          <a:noFill/>
+        </p:spPr>
+        <p:txBody>
+          <a:bodyPr wrap="square" anchor="ctr">
+            <a:spAutoFit/>
+          </a:bodyPr>
+          <a:lstStyle/>
+          <a:p>
+            <a:pPr algn="ctr">
+              <a:lnSpc>
+                <a:spcPct val="100000"/>
+              </a:lnSpc>
+            </a:pPr>
+            <a:r>
+              <a:rPr sz="1200" b="1">
+                <a:solidFill>
+                  <a:srgbClr val="475569"/>
+                </a:solidFill>
+                <a:latin typeface="PingFang SC"/>
+              </a:rPr>
+              <a:t>10% 流量</a:t>
+            </a:r>
+          </a:p>
+        </p:txBody>
+      </p:sp>
+      <p:cxnSp>
+        <p:nvCxnSpPr>
+          <p:cNvPr id="22" name="Connector 21"/>
+          <p:cNvCxnSpPr/>
+          <p:nvPr/>
+        </p:nvCxnSpPr>
+        <p:spPr>
+          <a:xfrm>
+            <a:off x="4191000" y="3238500"/>
+            <a:ext cx="190500" cy="0"/>
+          </a:xfrm>
+          <a:prstGeom prst="line">
+            <a:avLst/>
+          </a:prstGeom>
+          <a:ln w="20320">
+            <a:solidFill>
+              <a:srgbClr val="475569"/>
+            </a:solidFill>
+          </a:ln>
+        </p:spPr>
+        <p:style>
+          <a:lnRef idx="2">
+            <a:schemeClr val="accent1"/>
+          </a:lnRef>
+          <a:fillRef idx="0">
+            <a:schemeClr val="accent1"/>
+          </a:fillRef>
+          <a:effectRef idx="1">
+            <a:schemeClr val="accent1"/>
+          </a:effectRef>
+          <a:fontRef idx="minor">
+            <a:schemeClr val="tx1"/>
+          </a:fontRef>
+        </p:style>
+      </p:cxnSp>
+      <p:sp>
+        <p:nvSpPr>
+          <p:cNvPr id="23" name="Isosceles Triangle 22"/>
+          <p:cNvSpPr/>
+          <p:nvPr/>
+        </p:nvSpPr>
+        <p:spPr>
+          <a:xfrm rot="5400000">
+            <a:off x="4295776" y="3195638"/>
+            <a:ext cx="85725" cy="85725"/>
+          </a:xfrm>
+          <a:prstGeom prst="triangle">
+            <a:avLst/>
+          </a:prstGeom>
+          <a:solidFill>
+            <a:srgbClr val="475569"/>
+          </a:solidFill>
+          <a:ln>
+            <a:noFill/>
+          </a:ln>
+          <a:effectLst/>
+        </p:spPr>
+        <p:style>
+          <a:lnRef idx="1">
+            <a:schemeClr val="accent1"/>
+          </a:lnRef>
+          <a:fillRef idx="3">
+            <a:schemeClr val="accent1"/>
+          </a:fillRef>
+          <a:effectRef idx="2">
+            <a:schemeClr val="accent1"/>
+          </a:effectRef>
+          <a:fontRef idx="minor">
+            <a:schemeClr val="lt1"/>
+          </a:fontRef>
+        </p:style>
+        <p:txBody>
+          <a:bodyPr rtlCol="0" anchor="ctr"/>
+          <a:lstStyle/>
+          <a:p>
+            <a:pPr algn="ctr"/>
+          </a:p>
+        </p:txBody>
+      </p:sp>
+      <p:sp>
+        <p:nvSpPr>
+          <p:cNvPr id="24" name="Rounded Rectangle 23"/>
+          <p:cNvSpPr/>
+          <p:nvPr/>
+        </p:nvSpPr>
+        <p:spPr>
+          <a:xfrm>
+            <a:off x="6257925" y="2667000"/>
+            <a:ext cx="1476375" cy="1143000"/>
+          </a:xfrm>
+          <a:prstGeom prst="roundRect">
+            <a:avLst>
+              <a:gd name="adj" fmla="val 8000"/>
+            </a:avLst>
+          </a:prstGeom>
+          <a:solidFill>
+            <a:srgbClr val="FFFFFF"/>
+          </a:solidFill>
+          <a:ln w="12700">
+            <a:solidFill>
+              <a:srgbClr val="F59E0B"/>
+            </a:solidFill>
+          </a:ln>
+          <a:effectLst/>
+        </p:spPr>
+        <p:style>
+          <a:lnRef idx="1">
+            <a:schemeClr val="accent1"/>
+          </a:lnRef>
+          <a:fillRef idx="3">
+            <a:schemeClr val="accent1"/>
+          </a:fillRef>
+          <a:effectRef idx="2">
+            <a:schemeClr val="accent1"/>
+          </a:effectRef>
+          <a:fontRef idx="minor">
+            <a:schemeClr val="lt1"/>
+          </a:fontRef>
+        </p:style>
+        <p:txBody>
+          <a:bodyPr rtlCol="0" anchor="ctr"/>
+          <a:lstStyle/>
+          <a:p>
+            <a:pPr algn="ctr"/>
+          </a:p>
+        </p:txBody>
+      </p:sp>
+      <p:sp>
+        <p:nvSpPr>
+          <p:cNvPr id="25" name="Rectangle 24"/>
+          <p:cNvSpPr/>
+          <p:nvPr/>
+        </p:nvSpPr>
+        <p:spPr>
+          <a:xfrm>
+            <a:off x="6257925" y="2667000"/>
+            <a:ext cx="1476375" cy="57150"/>
+          </a:xfrm>
+          <a:prstGeom prst="rect">
+            <a:avLst/>
+          </a:prstGeom>
+          <a:solidFill>
+            <a:srgbClr val="F59E0B"/>
+          </a:solidFill>
+          <a:ln>
+            <a:noFill/>
+          </a:ln>
+          <a:effectLst/>
+        </p:spPr>
+        <p:style>
+          <a:lnRef idx="1">
+            <a:schemeClr val="accent1"/>
+          </a:lnRef>
+          <a:fillRef idx="3">
+            <a:schemeClr val="accent1"/>
+          </a:fillRef>
+          <a:effectRef idx="2">
+            <a:schemeClr val="accent1"/>
+          </a:effectRef>
+          <a:fontRef idx="minor">
+            <a:schemeClr val="lt1"/>
+          </a:fontRef>
+        </p:style>
+        <p:txBody>
+          <a:bodyPr rtlCol="0" anchor="ctr"/>
+          <a:lstStyle/>
+          <a:p>
+            <a:pPr algn="ctr"/>
+          </a:p>
+        </p:txBody>
+      </p:sp>
+      <p:sp>
+        <p:nvSpPr>
+          <p:cNvPr id="26" name="Rounded Rectangle 25"/>
+          <p:cNvSpPr/>
+          <p:nvPr/>
+        </p:nvSpPr>
+        <p:spPr>
+          <a:xfrm>
+            <a:off x="6853237" y="2524125"/>
+            <a:ext cx="285750" cy="285750"/>
+          </a:xfrm>
+          <a:prstGeom prst="roundRect">
+            <a:avLst>
+              <a:gd name="adj" fmla="val 8000"/>
+            </a:avLst>
+          </a:prstGeom>
+          <a:solidFill>
+            <a:srgbClr val="F59E0B"/>
+          </a:solidFill>
+          <a:ln>
+            <a:noFill/>
+          </a:ln>
+          <a:effectLst/>
+        </p:spPr>
+        <p:style>
+          <a:lnRef idx="1">
+            <a:schemeClr val="accent1"/>
+          </a:lnRef>
+          <a:fillRef idx="3">
+            <a:schemeClr val="accent1"/>
+          </a:fillRef>
+          <a:effectRef idx="2">
+            <a:schemeClr val="accent1"/>
+          </a:effectRef>
+          <a:fontRef idx="minor">
+            <a:schemeClr val="lt1"/>
+          </a:fontRef>
+        </p:style>
+        <p:txBody>
+          <a:bodyPr rtlCol="0" anchor="ctr"/>
+          <a:lstStyle/>
+          <a:p>
+            <a:pPr algn="ctr"/>
+          </a:p>
+        </p:txBody>
+      </p:sp>
+      <p:sp>
+        <p:nvSpPr>
+          <p:cNvPr id="27" name="TextBox 26"/>
+          <p:cNvSpPr txBox="1"/>
+          <p:nvPr/>
+        </p:nvSpPr>
+        <p:spPr>
+          <a:xfrm>
+            <a:off x="6853237" y="2514600"/>
+            <a:ext cx="285750" cy="285750"/>
+          </a:xfrm>
+          <a:prstGeom prst="rect">
+            <a:avLst/>
+          </a:prstGeom>
+          <a:noFill/>
+        </p:spPr>
+        <p:txBody>
+          <a:bodyPr wrap="square" anchor="ctr">
+            <a:spAutoFit/>
+          </a:bodyPr>
+          <a:lstStyle/>
+          <a:p>
+            <a:pPr algn="ctr">
+              <a:lnSpc>
+                <a:spcPct val="100000"/>
+              </a:lnSpc>
+            </a:pPr>
+            <a:r>
+              <a:rPr sz="1300" b="1">
+                <a:solidFill>
+                  <a:srgbClr val="FFFFFF"/>
+                </a:solidFill>
+                <a:latin typeface="PingFang SC"/>
+              </a:rPr>
+              <a:t>4</a:t>
+            </a:r>
+          </a:p>
+        </p:txBody>
+      </p:sp>
+      <p:sp>
+        <p:nvSpPr>
+          <p:cNvPr id="28" name="TextBox 27"/>
+          <p:cNvSpPr txBox="1"/>
+          <p:nvPr/>
+        </p:nvSpPr>
+        <p:spPr>
+          <a:xfrm>
+            <a:off x="6334125" y="2800350"/>
+            <a:ext cx="1323975" cy="952500"/>
+          </a:xfrm>
+          <a:prstGeom prst="rect">
+            <a:avLst/>
+          </a:prstGeom>
+          <a:noFill/>
+        </p:spPr>
+        <p:txBody>
+          <a:bodyPr wrap="square" anchor="ctr">
+            <a:spAutoFit/>
+          </a:bodyPr>
+          <a:lstStyle/>
+          <a:p>
+            <a:pPr algn="ctr">
+              <a:lnSpc>
+                <a:spcPct val="100000"/>
+              </a:lnSpc>
+            </a:pPr>
+            <a:r>
+              <a:rPr sz="1200" b="1">
+                <a:solidFill>
+                  <a:srgbClr val="475569"/>
+                </a:solidFill>
+                <a:latin typeface="PingFang SC"/>
+              </a:rPr>
+              <a:t>指标观察 24h</a:t>
+            </a:r>
+          </a:p>
+        </p:txBody>
+      </p:sp>
+      <p:cxnSp>
+        <p:nvCxnSpPr>
+          <p:cNvPr id="29" name="Connector 28"/>
+          <p:cNvCxnSpPr/>
+          <p:nvPr/>
+        </p:nvCxnSpPr>
+        <p:spPr>
+          <a:xfrm>
+            <a:off x="5991225" y="3238500"/>
+            <a:ext cx="190500" cy="0"/>
+          </a:xfrm>
+          <a:prstGeom prst="line">
+            <a:avLst/>
+          </a:prstGeom>
+          <a:ln w="20320">
+            <a:solidFill>
+              <a:srgbClr val="475569"/>
+            </a:solidFill>
+          </a:ln>
+        </p:spPr>
+        <p:style>
+          <a:lnRef idx="2">
+            <a:schemeClr val="accent1"/>
+          </a:lnRef>
+          <a:fillRef idx="0">
+            <a:schemeClr val="accent1"/>
+          </a:fillRef>
+          <a:effectRef idx="1">
+            <a:schemeClr val="accent1"/>
+          </a:effectRef>
+          <a:fontRef idx="minor">
+            <a:schemeClr val="tx1"/>
+          </a:fontRef>
+        </p:style>
+      </p:cxnSp>
+      <p:sp>
+        <p:nvSpPr>
+          <p:cNvPr id="30" name="Isosceles Triangle 29"/>
+          <p:cNvSpPr/>
+          <p:nvPr/>
+        </p:nvSpPr>
+        <p:spPr>
+          <a:xfrm rot="5400000">
+            <a:off x="6096001" y="3195638"/>
+            <a:ext cx="85725" cy="85725"/>
+          </a:xfrm>
+          <a:prstGeom prst="triangle">
+            <a:avLst/>
+          </a:prstGeom>
+          <a:solidFill>
+            <a:srgbClr val="475569"/>
+          </a:solidFill>
+          <a:ln>
+            <a:noFill/>
+          </a:ln>
+          <a:effectLst/>
+        </p:spPr>
+        <p:style>
+          <a:lnRef idx="1">
+            <a:schemeClr val="accent1"/>
+          </a:lnRef>
+          <a:fillRef idx="3">
+            <a:schemeClr val="accent1"/>
+          </a:fillRef>
+          <a:effectRef idx="2">
+            <a:schemeClr val="accent1"/>
+          </a:effectRef>
+          <a:fontRef idx="minor">
+            <a:schemeClr val="lt1"/>
+          </a:fontRef>
+        </p:style>
+        <p:txBody>
+          <a:bodyPr rtlCol="0" anchor="ctr"/>
+          <a:lstStyle/>
+          <a:p>
+            <a:pPr algn="ctr"/>
+          </a:p>
+        </p:txBody>
+      </p:sp>
+      <p:sp>
+        <p:nvSpPr>
+          <p:cNvPr id="31" name="Rounded Rectangle 30"/>
+          <p:cNvSpPr/>
+          <p:nvPr/>
+        </p:nvSpPr>
+        <p:spPr>
+          <a:xfrm>
+            <a:off x="8058150" y="2667000"/>
+            <a:ext cx="1476375" cy="1143000"/>
+          </a:xfrm>
+          <a:prstGeom prst="roundRect">
+            <a:avLst>
+              <a:gd name="adj" fmla="val 8000"/>
+            </a:avLst>
+          </a:prstGeom>
+          <a:solidFill>
+            <a:srgbClr val="FFFFFF"/>
+          </a:solidFill>
+          <a:ln w="12700">
+            <a:solidFill>
+              <a:srgbClr val="34D399"/>
+            </a:solidFill>
+          </a:ln>
+          <a:effectLst/>
+        </p:spPr>
+        <p:style>
+          <a:lnRef idx="1">
+            <a:schemeClr val="accent1"/>
+          </a:lnRef>
+          <a:fillRef idx="3">
+            <a:schemeClr val="accent1"/>
+          </a:fillRef>
+          <a:effectRef idx="2">
+            <a:schemeClr val="accent1"/>
+          </a:effectRef>
+          <a:fontRef idx="minor">
+            <a:schemeClr val="lt1"/>
+          </a:fontRef>
+        </p:style>
+        <p:txBody>
+          <a:bodyPr rtlCol="0" anchor="ctr"/>
+          <a:lstStyle/>
+          <a:p>
+            <a:pPr algn="ctr"/>
+          </a:p>
+        </p:txBody>
+      </p:sp>
+      <p:sp>
+        <p:nvSpPr>
+          <p:cNvPr id="32" name="Rectangle 31"/>
+          <p:cNvSpPr/>
+          <p:nvPr/>
+        </p:nvSpPr>
+        <p:spPr>
+          <a:xfrm>
+            <a:off x="8058150" y="2667000"/>
+            <a:ext cx="1476375" cy="57150"/>
+          </a:xfrm>
+          <a:prstGeom prst="rect">
+            <a:avLst/>
+          </a:prstGeom>
+          <a:solidFill>
+            <a:srgbClr val="34D399"/>
+          </a:solidFill>
+          <a:ln>
+            <a:noFill/>
+          </a:ln>
+          <a:effectLst/>
+        </p:spPr>
+        <p:style>
+          <a:lnRef idx="1">
+            <a:schemeClr val="accent1"/>
+          </a:lnRef>
+          <a:fillRef idx="3">
+            <a:schemeClr val="accent1"/>
+          </a:fillRef>
+          <a:effectRef idx="2">
+            <a:schemeClr val="accent1"/>
+          </a:effectRef>
+          <a:fontRef idx="minor">
+            <a:schemeClr val="lt1"/>
+          </a:fontRef>
+        </p:style>
+        <p:txBody>
+          <a:bodyPr rtlCol="0" anchor="ctr"/>
+          <a:lstStyle/>
+          <a:p>
+            <a:pPr algn="ctr"/>
+          </a:p>
+        </p:txBody>
+      </p:sp>
+      <p:sp>
+        <p:nvSpPr>
+          <p:cNvPr id="33" name="Rounded Rectangle 32"/>
+          <p:cNvSpPr/>
+          <p:nvPr/>
+        </p:nvSpPr>
+        <p:spPr>
+          <a:xfrm>
+            <a:off x="8653462" y="2524125"/>
+            <a:ext cx="285750" cy="285750"/>
+          </a:xfrm>
+          <a:prstGeom prst="roundRect">
+            <a:avLst>
+              <a:gd name="adj" fmla="val 8000"/>
+            </a:avLst>
+          </a:prstGeom>
+          <a:solidFill>
+            <a:srgbClr val="34D399"/>
+          </a:solidFill>
+          <a:ln>
+            <a:noFill/>
+          </a:ln>
+          <a:effectLst/>
+        </p:spPr>
+        <p:style>
+          <a:lnRef idx="1">
+            <a:schemeClr val="accent1"/>
+          </a:lnRef>
+          <a:fillRef idx="3">
+            <a:schemeClr val="accent1"/>
+          </a:fillRef>
+          <a:effectRef idx="2">
+            <a:schemeClr val="accent1"/>
+          </a:effectRef>
+          <a:fontRef idx="minor">
+            <a:schemeClr val="lt1"/>
+          </a:fontRef>
+        </p:style>
+        <p:txBody>
+          <a:bodyPr rtlCol="0" anchor="ctr"/>
+          <a:lstStyle/>
+          <a:p>
+            <a:pPr algn="ctr"/>
+          </a:p>
+        </p:txBody>
+      </p:sp>
+      <p:sp>
+        <p:nvSpPr>
+          <p:cNvPr id="34" name="TextBox 33"/>
+          <p:cNvSpPr txBox="1"/>
+          <p:nvPr/>
+        </p:nvSpPr>
+        <p:spPr>
+          <a:xfrm>
+            <a:off x="8653462" y="2514600"/>
+            <a:ext cx="285750" cy="285750"/>
+          </a:xfrm>
+          <a:prstGeom prst="rect">
+            <a:avLst/>
+          </a:prstGeom>
+          <a:noFill/>
+        </p:spPr>
+        <p:txBody>
+          <a:bodyPr wrap="square" anchor="ctr">
+            <a:spAutoFit/>
+          </a:bodyPr>
+          <a:lstStyle/>
+          <a:p>
+            <a:pPr algn="ctr">
+              <a:lnSpc>
+                <a:spcPct val="100000"/>
+              </a:lnSpc>
+            </a:pPr>
+            <a:r>
+              <a:rPr sz="1300" b="1">
+                <a:solidFill>
+                  <a:srgbClr val="FFFFFF"/>
+                </a:solidFill>
+                <a:latin typeface="PingFang SC"/>
+              </a:rPr>
+              <a:t>5</a:t>
+            </a:r>
+          </a:p>
+        </p:txBody>
+      </p:sp>
+      <p:sp>
+        <p:nvSpPr>
+          <p:cNvPr id="35" name="TextBox 34"/>
+          <p:cNvSpPr txBox="1"/>
+          <p:nvPr/>
+        </p:nvSpPr>
+        <p:spPr>
+          <a:xfrm>
+            <a:off x="8134350" y="2800350"/>
+            <a:ext cx="1323975" cy="952500"/>
+          </a:xfrm>
+          <a:prstGeom prst="rect">
+            <a:avLst/>
+          </a:prstGeom>
+          <a:noFill/>
+        </p:spPr>
+        <p:txBody>
+          <a:bodyPr wrap="square" anchor="ctr">
+            <a:spAutoFit/>
+          </a:bodyPr>
+          <a:lstStyle/>
+          <a:p>
+            <a:pPr algn="ctr">
+              <a:lnSpc>
+                <a:spcPct val="100000"/>
+              </a:lnSpc>
+            </a:pPr>
+            <a:r>
+              <a:rPr sz="1200" b="1">
+                <a:solidFill>
+                  <a:srgbClr val="475569"/>
+                </a:solidFill>
+                <a:latin typeface="PingFang SC"/>
+              </a:rPr>
+              <a:t>50%</a:t>
+            </a:r>
+          </a:p>
+        </p:txBody>
+      </p:sp>
+      <p:cxnSp>
+        <p:nvCxnSpPr>
+          <p:cNvPr id="36" name="Connector 35"/>
+          <p:cNvCxnSpPr/>
+          <p:nvPr/>
+        </p:nvCxnSpPr>
+        <p:spPr>
+          <a:xfrm>
+            <a:off x="7791450" y="3238500"/>
+            <a:ext cx="190500" cy="0"/>
+          </a:xfrm>
+          <a:prstGeom prst="line">
+            <a:avLst/>
+          </a:prstGeom>
+          <a:ln w="20320">
+            <a:solidFill>
+              <a:srgbClr val="475569"/>
+            </a:solidFill>
+          </a:ln>
+        </p:spPr>
+        <p:style>
+          <a:lnRef idx="2">
+            <a:schemeClr val="accent1"/>
+          </a:lnRef>
+          <a:fillRef idx="0">
+            <a:schemeClr val="accent1"/>
+          </a:fillRef>
+          <a:effectRef idx="1">
+            <a:schemeClr val="accent1"/>
+          </a:effectRef>
+          <a:fontRef idx="minor">
+            <a:schemeClr val="tx1"/>
+          </a:fontRef>
+        </p:style>
+      </p:cxnSp>
+      <p:sp>
+        <p:nvSpPr>
+          <p:cNvPr id="37" name="Isosceles Triangle 36"/>
+          <p:cNvSpPr/>
+          <p:nvPr/>
+        </p:nvSpPr>
+        <p:spPr>
+          <a:xfrm rot="5400000">
+            <a:off x="7896226" y="3195638"/>
+            <a:ext cx="85725" cy="85725"/>
+          </a:xfrm>
+          <a:prstGeom prst="triangle">
+            <a:avLst/>
+          </a:prstGeom>
+          <a:solidFill>
+            <a:srgbClr val="475569"/>
+          </a:solidFill>
+          <a:ln>
+            <a:noFill/>
+          </a:ln>
+          <a:effectLst/>
+        </p:spPr>
+        <p:style>
+          <a:lnRef idx="1">
+            <a:schemeClr val="accent1"/>
+          </a:lnRef>
+          <a:fillRef idx="3">
+            <a:schemeClr val="accent1"/>
+          </a:fillRef>
+          <a:effectRef idx="2">
+            <a:schemeClr val="accent1"/>
+          </a:effectRef>
+          <a:fontRef idx="minor">
+            <a:schemeClr val="lt1"/>
+          </a:fontRef>
+        </p:style>
+        <p:txBody>
+          <a:bodyPr rtlCol="0" anchor="ctr"/>
+          <a:lstStyle/>
+          <a:p>
+            <a:pPr algn="ctr"/>
+          </a:p>
+        </p:txBody>
+      </p:sp>
+      <p:sp>
+        <p:nvSpPr>
+          <p:cNvPr id="38" name="Rounded Rectangle 37"/>
+          <p:cNvSpPr/>
+          <p:nvPr/>
+        </p:nvSpPr>
+        <p:spPr>
+          <a:xfrm>
+            <a:off x="9858375" y="2667000"/>
+            <a:ext cx="1476375" cy="1143000"/>
+          </a:xfrm>
+          <a:prstGeom prst="roundRect">
+            <a:avLst>
+              <a:gd name="adj" fmla="val 8000"/>
+            </a:avLst>
+          </a:prstGeom>
+          <a:solidFill>
+            <a:srgbClr val="FFFFFF"/>
+          </a:solidFill>
+          <a:ln w="12700">
+            <a:solidFill>
+              <a:srgbClr val="F87171"/>
+            </a:solidFill>
+          </a:ln>
+          <a:effectLst/>
+        </p:spPr>
+        <p:style>
+          <a:lnRef idx="1">
+            <a:schemeClr val="accent1"/>
+          </a:lnRef>
+          <a:fillRef idx="3">
+            <a:schemeClr val="accent1"/>
+          </a:fillRef>
+          <a:effectRef idx="2">
+            <a:schemeClr val="accent1"/>
+          </a:effectRef>
+          <a:fontRef idx="minor">
+            <a:schemeClr val="lt1"/>
+          </a:fontRef>
+        </p:style>
+        <p:txBody>
+          <a:bodyPr rtlCol="0" anchor="ctr"/>
+          <a:lstStyle/>
+          <a:p>
+            <a:pPr algn="ctr"/>
+          </a:p>
+        </p:txBody>
+      </p:sp>
+      <p:sp>
+        <p:nvSpPr>
+          <p:cNvPr id="39" name="Rectangle 38"/>
+          <p:cNvSpPr/>
+          <p:nvPr/>
+        </p:nvSpPr>
+        <p:spPr>
+          <a:xfrm>
+            <a:off x="9858375" y="2667000"/>
+            <a:ext cx="1476375" cy="57150"/>
+          </a:xfrm>
+          <a:prstGeom prst="rect">
+            <a:avLst/>
+          </a:prstGeom>
+          <a:solidFill>
+            <a:srgbClr val="F87171"/>
+          </a:solidFill>
+          <a:ln>
+            <a:noFill/>
+          </a:ln>
+          <a:effectLst/>
+        </p:spPr>
+        <p:style>
+          <a:lnRef idx="1">
+            <a:schemeClr val="accent1"/>
+          </a:lnRef>
+          <a:fillRef idx="3">
+            <a:schemeClr val="accent1"/>
+          </a:fillRef>
+          <a:effectRef idx="2">
+            <a:schemeClr val="accent1"/>
+          </a:effectRef>
+          <a:fontRef idx="minor">
+            <a:schemeClr val="lt1"/>
+          </a:fontRef>
+        </p:style>
+        <p:txBody>
+          <a:bodyPr rtlCol="0" anchor="ctr"/>
+          <a:lstStyle/>
+          <a:p>
+            <a:pPr algn="ctr"/>
+          </a:p>
+        </p:txBody>
+      </p:sp>
+      <p:sp>
+        <p:nvSpPr>
+          <p:cNvPr id="40" name="Rounded Rectangle 39"/>
+          <p:cNvSpPr/>
+          <p:nvPr/>
+        </p:nvSpPr>
+        <p:spPr>
+          <a:xfrm>
+            <a:off x="10453687" y="2524125"/>
+            <a:ext cx="285750" cy="285750"/>
+          </a:xfrm>
+          <a:prstGeom prst="roundRect">
+            <a:avLst>
+              <a:gd name="adj" fmla="val 8000"/>
+            </a:avLst>
+          </a:prstGeom>
+          <a:solidFill>
+            <a:srgbClr val="F87171"/>
+          </a:solidFill>
+          <a:ln>
+            <a:noFill/>
+          </a:ln>
+          <a:effectLst/>
+        </p:spPr>
+        <p:style>
+          <a:lnRef idx="1">
+            <a:schemeClr val="accent1"/>
+          </a:lnRef>
+          <a:fillRef idx="3">
+            <a:schemeClr val="accent1"/>
+          </a:fillRef>
+          <a:effectRef idx="2">
+            <a:schemeClr val="accent1"/>
+          </a:effectRef>
+          <a:fontRef idx="minor">
+            <a:schemeClr val="lt1"/>
+          </a:fontRef>
+        </p:style>
+        <p:txBody>
+          <a:bodyPr rtlCol="0" anchor="ctr"/>
+          <a:lstStyle/>
+          <a:p>
+            <a:pPr algn="ctr"/>
+          </a:p>
+        </p:txBody>
+      </p:sp>
+      <p:sp>
+        <p:nvSpPr>
+          <p:cNvPr id="41" name="TextBox 40"/>
+          <p:cNvSpPr txBox="1"/>
+          <p:nvPr/>
+        </p:nvSpPr>
+        <p:spPr>
+          <a:xfrm>
+            <a:off x="10453687" y="2514600"/>
+            <a:ext cx="285750" cy="285750"/>
+          </a:xfrm>
+          <a:prstGeom prst="rect">
+            <a:avLst/>
+          </a:prstGeom>
+          <a:noFill/>
+        </p:spPr>
+        <p:txBody>
+          <a:bodyPr wrap="square" anchor="ctr">
+            <a:spAutoFit/>
+          </a:bodyPr>
+          <a:lstStyle/>
+          <a:p>
+            <a:pPr algn="ctr">
+              <a:lnSpc>
+                <a:spcPct val="100000"/>
+              </a:lnSpc>
+            </a:pPr>
+            <a:r>
+              <a:rPr sz="1300" b="1">
+                <a:solidFill>
+                  <a:srgbClr val="FFFFFF"/>
+                </a:solidFill>
+                <a:latin typeface="PingFang SC"/>
+              </a:rPr>
+              <a:t>6</a:t>
+            </a:r>
+          </a:p>
+        </p:txBody>
+      </p:sp>
+      <p:sp>
+        <p:nvSpPr>
+          <p:cNvPr id="42" name="TextBox 41"/>
+          <p:cNvSpPr txBox="1"/>
+          <p:nvPr/>
+        </p:nvSpPr>
+        <p:spPr>
+          <a:xfrm>
+            <a:off x="9934575" y="2800350"/>
+            <a:ext cx="1323975" cy="952500"/>
+          </a:xfrm>
+          <a:prstGeom prst="rect">
+            <a:avLst/>
+          </a:prstGeom>
+          <a:noFill/>
+        </p:spPr>
+        <p:txBody>
+          <a:bodyPr wrap="square" anchor="ctr">
+            <a:spAutoFit/>
+          </a:bodyPr>
+          <a:lstStyle/>
+          <a:p>
+            <a:pPr algn="ctr">
+              <a:lnSpc>
+                <a:spcPct val="100000"/>
+              </a:lnSpc>
+            </a:pPr>
+            <a:r>
+              <a:rPr sz="1200" b="1">
+                <a:solidFill>
+                  <a:srgbClr val="475569"/>
+                </a:solidFill>
+                <a:latin typeface="PingFang SC"/>
+              </a:rPr>
+              <a:t>100%</a:t>
+            </a:r>
+          </a:p>
+        </p:txBody>
+      </p:sp>
+      <p:cxnSp>
+        <p:nvCxnSpPr>
+          <p:cNvPr id="43" name="Connector 42"/>
+          <p:cNvCxnSpPr/>
+          <p:nvPr/>
+        </p:nvCxnSpPr>
+        <p:spPr>
+          <a:xfrm>
+            <a:off x="9591675" y="3238500"/>
+            <a:ext cx="190500" cy="0"/>
+          </a:xfrm>
+          <a:prstGeom prst="line">
+            <a:avLst/>
+          </a:prstGeom>
+          <a:ln w="20320">
+            <a:solidFill>
+              <a:srgbClr val="475569"/>
+            </a:solidFill>
+          </a:ln>
+        </p:spPr>
+        <p:style>
+          <a:lnRef idx="2">
+            <a:schemeClr val="accent1"/>
+          </a:lnRef>
+          <a:fillRef idx="0">
+            <a:schemeClr val="accent1"/>
+          </a:fillRef>
+          <a:effectRef idx="1">
+            <a:schemeClr val="accent1"/>
+          </a:effectRef>
+          <a:fontRef idx="minor">
+            <a:schemeClr val="tx1"/>
+          </a:fontRef>
+        </p:style>
+      </p:cxnSp>
+      <p:sp>
+        <p:nvSpPr>
+          <p:cNvPr id="44" name="Isosceles Triangle 43"/>
+          <p:cNvSpPr/>
+          <p:nvPr/>
+        </p:nvSpPr>
+        <p:spPr>
+          <a:xfrm rot="5400000">
+            <a:off x="9696451" y="3195638"/>
+            <a:ext cx="85725" cy="85725"/>
+          </a:xfrm>
+          <a:prstGeom prst="triangle">
+            <a:avLst/>
+          </a:prstGeom>
+          <a:solidFill>
+            <a:srgbClr val="475569"/>
+          </a:solidFill>
+          <a:ln>
+            <a:noFill/>
+          </a:ln>
+          <a:effectLst/>
+        </p:spPr>
+        <p:style>
+          <a:lnRef idx="1">
+            <a:schemeClr val="accent1"/>
+          </a:lnRef>
+          <a:fillRef idx="3">
+            <a:schemeClr val="accent1"/>
+          </a:fillRef>
+          <a:effectRef idx="2">
+            <a:schemeClr val="accent1"/>
+          </a:effectRef>
+          <a:fontRef idx="minor">
+            <a:schemeClr val="lt1"/>
+          </a:fontRef>
+        </p:style>
+        <p:txBody>
+          <a:bodyPr rtlCol="0" anchor="ctr"/>
+          <a:lstStyle/>
+          <a:p>
+            <a:pPr algn="ctr"/>
+          </a:p>
+        </p:txBody>
+      </p:sp>
+      <p:cxnSp>
+        <p:nvCxnSpPr>
+          <p:cNvPr id="45" name="Connector 44"/>
+          <p:cNvCxnSpPr/>
+          <p:nvPr/>
+        </p:nvCxnSpPr>
+        <p:spPr>
+          <a:xfrm>
+            <a:off x="10596562" y="3867150"/>
+            <a:ext cx="0" cy="228600"/>
+          </a:xfrm>
+          <a:prstGeom prst="line">
+            <a:avLst/>
+          </a:prstGeom>
+          <a:ln w="20320">
+            <a:solidFill>
+              <a:srgbClr val="F59E0B"/>
+            </a:solidFill>
+            <a:prstDash val="dash"/>
+          </a:ln>
+        </p:spPr>
+        <p:style>
+          <a:lnRef idx="2">
+            <a:schemeClr val="accent1"/>
+          </a:lnRef>
+          <a:fillRef idx="0">
+            <a:schemeClr val="accent1"/>
+          </a:fillRef>
+          <a:effectRef idx="1">
+            <a:schemeClr val="accent1"/>
+          </a:effectRef>
+          <a:fontRef idx="minor">
+            <a:schemeClr val="tx1"/>
+          </a:fontRef>
+        </p:style>
+      </p:cxnSp>
+      <p:sp>
+        <p:nvSpPr>
+          <p:cNvPr id="46" name="Isosceles Triangle 45"/>
+          <p:cNvSpPr/>
+          <p:nvPr/>
+        </p:nvSpPr>
+        <p:spPr>
+          <a:xfrm rot="10800000">
+            <a:off x="10553700" y="4010026"/>
+            <a:ext cx="85725" cy="85725"/>
+          </a:xfrm>
+          <a:prstGeom prst="triangle">
+            <a:avLst/>
+          </a:prstGeom>
+          <a:solidFill>
+            <a:srgbClr val="F59E0B"/>
+          </a:solidFill>
+          <a:ln>
+            <a:noFill/>
+          </a:ln>
+          <a:effectLst/>
+        </p:spPr>
+        <p:style>
+          <a:lnRef idx="1">
+            <a:schemeClr val="accent1"/>
+          </a:lnRef>
+          <a:fillRef idx="3">
+            <a:schemeClr val="accent1"/>
+          </a:fillRef>
+          <a:effectRef idx="2">
+            <a:schemeClr val="accent1"/>
+          </a:effectRef>
+          <a:fontRef idx="minor">
+            <a:schemeClr val="lt1"/>
+          </a:fontRef>
+        </p:style>
+        <p:txBody>
+          <a:bodyPr rtlCol="0" anchor="ctr"/>
+          <a:lstStyle/>
+          <a:p>
+            <a:pPr algn="ctr"/>
+          </a:p>
+        </p:txBody>
+      </p:sp>
+      <p:cxnSp>
+        <p:nvCxnSpPr>
+          <p:cNvPr id="47" name="Connector 46"/>
+          <p:cNvCxnSpPr/>
+          <p:nvPr/>
+        </p:nvCxnSpPr>
+        <p:spPr>
+          <a:xfrm flipH="1">
+            <a:off x="6996112" y="4095750"/>
+            <a:ext cx="3600450" cy="0"/>
+          </a:xfrm>
+          <a:prstGeom prst="line">
+            <a:avLst/>
+          </a:prstGeom>
+          <a:ln w="20320">
+            <a:solidFill>
+              <a:srgbClr val="F59E0B"/>
+            </a:solidFill>
+            <a:prstDash val="dash"/>
+          </a:ln>
+        </p:spPr>
+        <p:style>
+          <a:lnRef idx="2">
+            <a:schemeClr val="accent1"/>
+          </a:lnRef>
+          <a:fillRef idx="0">
+            <a:schemeClr val="accent1"/>
+          </a:fillRef>
+          <a:effectRef idx="1">
+            <a:schemeClr val="accent1"/>
+          </a:effectRef>
+          <a:fontRef idx="minor">
+            <a:schemeClr val="tx1"/>
+          </a:fontRef>
+        </p:style>
+      </p:cxnSp>
+      <p:sp>
+        <p:nvSpPr>
+          <p:cNvPr id="48" name="Isosceles Triangle 47"/>
+          <p:cNvSpPr/>
+          <p:nvPr/>
+        </p:nvSpPr>
+        <p:spPr>
+          <a:xfrm rot="16200000">
+            <a:off x="6996112" y="4052888"/>
+            <a:ext cx="85725" cy="85725"/>
+          </a:xfrm>
+          <a:prstGeom prst="triangle">
+            <a:avLst/>
+          </a:prstGeom>
+          <a:solidFill>
+            <a:srgbClr val="F59E0B"/>
+          </a:solidFill>
+          <a:ln>
+            <a:noFill/>
+          </a:ln>
+          <a:effectLst/>
+        </p:spPr>
+        <p:style>
+          <a:lnRef idx="1">
+            <a:schemeClr val="accent1"/>
+          </a:lnRef>
+          <a:fillRef idx="3">
+            <a:schemeClr val="accent1"/>
+          </a:fillRef>
+          <a:effectRef idx="2">
+            <a:schemeClr val="accent1"/>
+          </a:effectRef>
+          <a:fontRef idx="minor">
+            <a:schemeClr val="lt1"/>
+          </a:fontRef>
+        </p:style>
+        <p:txBody>
+          <a:bodyPr rtlCol="0" anchor="ctr"/>
+          <a:lstStyle/>
+          <a:p>
+            <a:pPr algn="ctr"/>
+          </a:p>
+        </p:txBody>
+      </p:sp>
+      <p:cxnSp>
+        <p:nvCxnSpPr>
+          <p:cNvPr id="49" name="Connector 48"/>
+          <p:cNvCxnSpPr/>
+          <p:nvPr/>
+        </p:nvCxnSpPr>
+        <p:spPr>
+          <a:xfrm flipV="1">
+            <a:off x="6996112" y="3867150"/>
+            <a:ext cx="0" cy="228600"/>
+          </a:xfrm>
+          <a:prstGeom prst="line">
+            <a:avLst/>
+          </a:prstGeom>
+          <a:ln w="20320">
+            <a:solidFill>
+              <a:srgbClr val="F59E0B"/>
+            </a:solidFill>
+            <a:prstDash val="dash"/>
+          </a:ln>
+        </p:spPr>
+        <p:style>
+          <a:lnRef idx="2">
+            <a:schemeClr val="accent1"/>
+          </a:lnRef>
+          <a:fillRef idx="0">
+            <a:schemeClr val="accent1"/>
+          </a:fillRef>
+          <a:effectRef idx="1">
+            <a:schemeClr val="accent1"/>
+          </a:effectRef>
+          <a:fontRef idx="minor">
+            <a:schemeClr val="tx1"/>
+          </a:fontRef>
+        </p:style>
+      </p:cxnSp>
+      <p:sp>
+        <p:nvSpPr>
+          <p:cNvPr id="50" name="Isosceles Triangle 49"/>
+          <p:cNvSpPr/>
+          <p:nvPr/>
+        </p:nvSpPr>
+        <p:spPr>
+          <a:xfrm>
+            <a:off x="6953250" y="3867150"/>
+            <a:ext cx="85725" cy="85725"/>
+          </a:xfrm>
+          <a:prstGeom prst="triangle">
+            <a:avLst/>
+          </a:prstGeom>
+          <a:solidFill>
+            <a:srgbClr val="F59E0B"/>
+          </a:solidFill>
+          <a:ln>
+            <a:noFill/>
+          </a:ln>
+          <a:effectLst/>
+        </p:spPr>
+        <p:style>
+          <a:lnRef idx="1">
+            <a:schemeClr val="accent1"/>
+          </a:lnRef>
+          <a:fillRef idx="3">
+            <a:schemeClr val="accent1"/>
+          </a:fillRef>
+          <a:effectRef idx="2">
+            <a:schemeClr val="accent1"/>
+          </a:effectRef>
+          <a:fontRef idx="minor">
+            <a:schemeClr val="lt1"/>
+          </a:fontRef>
+        </p:style>
+        <p:txBody>
+          <a:bodyPr rtlCol="0" anchor="ctr"/>
+          <a:lstStyle/>
+          <a:p>
+            <a:pPr algn="ctr"/>
+          </a:p>
+        </p:txBody>
+      </p:sp>
+      <p:sp>
+        <p:nvSpPr>
+          <p:cNvPr id="51" name="TextBox 50"/>
+          <p:cNvSpPr txBox="1"/>
+          <p:nvPr/>
+        </p:nvSpPr>
+        <p:spPr>
+          <a:xfrm>
+            <a:off x="6996112" y="3848100"/>
+            <a:ext cx="5076825" cy="209550"/>
+          </a:xfrm>
+          <a:prstGeom prst="rect">
+            <a:avLst/>
+          </a:prstGeom>
+          <a:noFill/>
+        </p:spPr>
+        <p:txBody>
+          <a:bodyPr wrap="square" anchor="ctr">
+            <a:spAutoFit/>
+          </a:bodyPr>
+          <a:lstStyle/>
+          <a:p>
+            <a:pPr algn="ctr">
+              <a:lnSpc>
+                <a:spcPct val="100000"/>
+              </a:lnSpc>
+            </a:pPr>
+            <a:r>
+              <a:rPr sz="1000" b="1">
+                <a:solidFill>
+                  <a:srgbClr val="F59E0B"/>
+                </a:solidFill>
+                <a:latin typeface="PingFang SC"/>
+              </a:rPr>
+              <a:t>循环(loop)</a:t>
+            </a:r>
+          </a:p>
+        </p:txBody>
+      </p:sp>
+      <p:sp>
+        <p:nvSpPr>
+          <p:cNvPr id="52" name="Rounded Rectangle 51"/>
+          <p:cNvSpPr/>
+          <p:nvPr/>
+        </p:nvSpPr>
+        <p:spPr>
+          <a:xfrm>
+            <a:off x="857250" y="5715000"/>
+            <a:ext cx="10477500" cy="419100"/>
+          </a:xfrm>
+          <a:prstGeom prst="roundRect">
+            <a:avLst>
+              <a:gd name="adj" fmla="val 8000"/>
+            </a:avLst>
+          </a:prstGeom>
+          <a:solidFill>
+            <a:srgbClr val="F1F5F9"/>
+          </a:solidFill>
+          <a:ln>
+            <a:noFill/>
+          </a:ln>
+          <a:effectLst/>
+        </p:spPr>
+        <p:style>
+          <a:lnRef idx="1">
+            <a:schemeClr val="accent1"/>
+          </a:lnRef>
+          <a:fillRef idx="3">
+            <a:schemeClr val="accent1"/>
+          </a:fillRef>
+          <a:effectRef idx="2">
+            <a:schemeClr val="accent1"/>
+          </a:effectRef>
+          <a:fontRef idx="minor">
+            <a:schemeClr val="lt1"/>
+          </a:fontRef>
+        </p:style>
+        <p:txBody>
+          <a:bodyPr rtlCol="0" anchor="ctr"/>
+          <a:lstStyle/>
+          <a:p>
+            <a:pPr algn="ctr"/>
+          </a:p>
+        </p:txBody>
+      </p:sp>
+      <p:sp>
+        <p:nvSpPr>
+          <p:cNvPr id="53" name="TextBox 52"/>
+          <p:cNvSpPr txBox="1"/>
+          <p:nvPr/>
+        </p:nvSpPr>
+        <p:spPr>
+          <a:xfrm>
+            <a:off x="1009650" y="5715000"/>
+            <a:ext cx="10172700" cy="419100"/>
+          </a:xfrm>
+          <a:prstGeom prst="rect">
+            <a:avLst/>
+          </a:prstGeom>
+          <a:noFill/>
+        </p:spPr>
+        <p:txBody>
+          <a:bodyPr wrap="square" anchor="ctr">
+            <a:spAutoFit/>
+          </a:bodyPr>
+          <a:lstStyle/>
+          <a:p>
+            <a:pPr algn="l">
+              <a:lnSpc>
+                <a:spcPct val="100000"/>
+              </a:lnSpc>
+            </a:pPr>
+            <a:r>
+              <a:rPr sz="1200" b="0">
+                <a:solidFill>
+                  <a:srgbClr val="2563EB"/>
+                </a:solidFill>
+                <a:latin typeface="PingFang SC"/>
+              </a:rPr>
+              <a:t>▶ 任一指标异常→FeatureFlag 一键回滚(秒级)</a:t>
+            </a:r>
+          </a:p>
+        </p:txBody>
+      </p:sp>
+      <p:sp>
+        <p:nvSpPr>
+          <p:cNvPr id="54" name="TextBox 53"/>
+          <p:cNvSpPr txBox="1"/>
+          <p:nvPr/>
+        </p:nvSpPr>
+        <p:spPr>
+          <a:xfrm>
+            <a:off x="10287000" y="6534150"/>
+            <a:ext cx="1619250" cy="266700"/>
           </a:xfrm>
           <a:prstGeom prst="rect">
             <a:avLst/>
@@ -5166,2100 +7221,6 @@
               </a:lnSpc>
             </a:pPr>
             <a:r>
-              <a:rPr sz="1100" b="0">
-                <a:solidFill>
-                  <a:srgbClr val="94A3B8"/>
-                </a:solidFill>
-                <a:latin typeface="PingFang SC"/>
-              </a:rPr>
-              <a:t>一致性哈希:同用户判定恒定</a:t>
-            </a:r>
-          </a:p>
-        </p:txBody>
-      </p:sp>
-      <p:sp>
-        <p:nvSpPr>
-          <p:cNvPr id="6" name="Rounded Rectangle 5"/>
-          <p:cNvSpPr/>
-          <p:nvPr/>
-        </p:nvSpPr>
-        <p:spPr>
-          <a:xfrm>
-            <a:off x="857250" y="2667000"/>
-            <a:ext cx="1476375" cy="1143000"/>
-          </a:xfrm>
-          <a:prstGeom prst="roundRect">
-            <a:avLst>
-              <a:gd name="adj" fmla="val 8000"/>
-            </a:avLst>
-          </a:prstGeom>
-          <a:solidFill>
-            <a:srgbClr val="FFFFFF"/>
-          </a:solidFill>
-          <a:ln w="12700">
-            <a:solidFill>
-              <a:srgbClr val="2563EB"/>
-            </a:solidFill>
-          </a:ln>
-          <a:effectLst/>
-        </p:spPr>
-        <p:style>
-          <a:lnRef idx="1">
-            <a:schemeClr val="accent1"/>
-          </a:lnRef>
-          <a:fillRef idx="3">
-            <a:schemeClr val="accent1"/>
-          </a:fillRef>
-          <a:effectRef idx="2">
-            <a:schemeClr val="accent1"/>
-          </a:effectRef>
-          <a:fontRef idx="minor">
-            <a:schemeClr val="lt1"/>
-          </a:fontRef>
-        </p:style>
-        <p:txBody>
-          <a:bodyPr rtlCol="0" anchor="ctr"/>
-          <a:lstStyle/>
-          <a:p>
-            <a:pPr algn="ctr"/>
-          </a:p>
-        </p:txBody>
-      </p:sp>
-      <p:sp>
-        <p:nvSpPr>
-          <p:cNvPr id="7" name="Rectangle 6"/>
-          <p:cNvSpPr/>
-          <p:nvPr/>
-        </p:nvSpPr>
-        <p:spPr>
-          <a:xfrm>
-            <a:off x="857250" y="2667000"/>
-            <a:ext cx="1476375" cy="57150"/>
-          </a:xfrm>
-          <a:prstGeom prst="rect">
-            <a:avLst/>
-          </a:prstGeom>
-          <a:solidFill>
-            <a:srgbClr val="2563EB"/>
-          </a:solidFill>
-          <a:ln>
-            <a:noFill/>
-          </a:ln>
-          <a:effectLst/>
-        </p:spPr>
-        <p:style>
-          <a:lnRef idx="1">
-            <a:schemeClr val="accent1"/>
-          </a:lnRef>
-          <a:fillRef idx="3">
-            <a:schemeClr val="accent1"/>
-          </a:fillRef>
-          <a:effectRef idx="2">
-            <a:schemeClr val="accent1"/>
-          </a:effectRef>
-          <a:fontRef idx="minor">
-            <a:schemeClr val="lt1"/>
-          </a:fontRef>
-        </p:style>
-        <p:txBody>
-          <a:bodyPr rtlCol="0" anchor="ctr"/>
-          <a:lstStyle/>
-          <a:p>
-            <a:pPr algn="ctr"/>
-          </a:p>
-        </p:txBody>
-      </p:sp>
-      <p:sp>
-        <p:nvSpPr>
-          <p:cNvPr id="8" name="Rounded Rectangle 7"/>
-          <p:cNvSpPr/>
-          <p:nvPr/>
-        </p:nvSpPr>
-        <p:spPr>
-          <a:xfrm>
-            <a:off x="1452562" y="2524125"/>
-            <a:ext cx="285750" cy="285750"/>
-          </a:xfrm>
-          <a:prstGeom prst="roundRect">
-            <a:avLst>
-              <a:gd name="adj" fmla="val 8000"/>
-            </a:avLst>
-          </a:prstGeom>
-          <a:solidFill>
-            <a:srgbClr val="2563EB"/>
-          </a:solidFill>
-          <a:ln>
-            <a:noFill/>
-          </a:ln>
-          <a:effectLst/>
-        </p:spPr>
-        <p:style>
-          <a:lnRef idx="1">
-            <a:schemeClr val="accent1"/>
-          </a:lnRef>
-          <a:fillRef idx="3">
-            <a:schemeClr val="accent1"/>
-          </a:fillRef>
-          <a:effectRef idx="2">
-            <a:schemeClr val="accent1"/>
-          </a:effectRef>
-          <a:fontRef idx="minor">
-            <a:schemeClr val="lt1"/>
-          </a:fontRef>
-        </p:style>
-        <p:txBody>
-          <a:bodyPr rtlCol="0" anchor="ctr"/>
-          <a:lstStyle/>
-          <a:p>
-            <a:pPr algn="ctr"/>
-          </a:p>
-        </p:txBody>
-      </p:sp>
-      <p:sp>
-        <p:nvSpPr>
-          <p:cNvPr id="9" name="TextBox 8"/>
-          <p:cNvSpPr txBox="1"/>
-          <p:nvPr/>
-        </p:nvSpPr>
-        <p:spPr>
-          <a:xfrm>
-            <a:off x="1452562" y="2514600"/>
-            <a:ext cx="285750" cy="285750"/>
-          </a:xfrm>
-          <a:prstGeom prst="rect">
-            <a:avLst/>
-          </a:prstGeom>
-          <a:noFill/>
-        </p:spPr>
-        <p:txBody>
-          <a:bodyPr wrap="square" anchor="ctr">
-            <a:spAutoFit/>
-          </a:bodyPr>
-          <a:lstStyle/>
-          <a:p>
-            <a:pPr algn="ctr">
-              <a:lnSpc>
-                <a:spcPct val="100000"/>
-              </a:lnSpc>
-            </a:pPr>
-            <a:r>
-              <a:rPr sz="1300" b="1">
-                <a:solidFill>
-                  <a:srgbClr val="FFFFFF"/>
-                </a:solidFill>
-                <a:latin typeface="PingFang SC"/>
-              </a:rPr>
-              <a:t>1</a:t>
-            </a:r>
-          </a:p>
-        </p:txBody>
-      </p:sp>
-      <p:sp>
-        <p:nvSpPr>
-          <p:cNvPr id="10" name="TextBox 9"/>
-          <p:cNvSpPr txBox="1"/>
-          <p:nvPr/>
-        </p:nvSpPr>
-        <p:spPr>
-          <a:xfrm>
-            <a:off x="933450" y="2800350"/>
-            <a:ext cx="1323975" cy="952500"/>
-          </a:xfrm>
-          <a:prstGeom prst="rect">
-            <a:avLst/>
-          </a:prstGeom>
-          <a:noFill/>
-        </p:spPr>
-        <p:txBody>
-          <a:bodyPr wrap="square" anchor="ctr">
-            <a:spAutoFit/>
-          </a:bodyPr>
-          <a:lstStyle/>
-          <a:p>
-            <a:pPr algn="ctr">
-              <a:lnSpc>
-                <a:spcPct val="100000"/>
-              </a:lnSpc>
-            </a:pPr>
-            <a:r>
-              <a:rPr sz="1200" b="1">
-                <a:solidFill>
-                  <a:srgbClr val="475569"/>
-                </a:solidFill>
-                <a:latin typeface="PingFang SC"/>
-              </a:rPr>
-              <a:t>变更+评测通过</a:t>
-            </a:r>
-          </a:p>
-        </p:txBody>
-      </p:sp>
-      <p:sp>
-        <p:nvSpPr>
-          <p:cNvPr id="11" name="Rounded Rectangle 10"/>
-          <p:cNvSpPr/>
-          <p:nvPr/>
-        </p:nvSpPr>
-        <p:spPr>
-          <a:xfrm>
-            <a:off x="2657475" y="2667000"/>
-            <a:ext cx="1476375" cy="1143000"/>
-          </a:xfrm>
-          <a:prstGeom prst="roundRect">
-            <a:avLst>
-              <a:gd name="adj" fmla="val 8000"/>
-            </a:avLst>
-          </a:prstGeom>
-          <a:solidFill>
-            <a:srgbClr val="FFFFFF"/>
-          </a:solidFill>
-          <a:ln w="12700">
-            <a:solidFill>
-              <a:srgbClr val="14B8A6"/>
-            </a:solidFill>
-          </a:ln>
-          <a:effectLst/>
-        </p:spPr>
-        <p:style>
-          <a:lnRef idx="1">
-            <a:schemeClr val="accent1"/>
-          </a:lnRef>
-          <a:fillRef idx="3">
-            <a:schemeClr val="accent1"/>
-          </a:fillRef>
-          <a:effectRef idx="2">
-            <a:schemeClr val="accent1"/>
-          </a:effectRef>
-          <a:fontRef idx="minor">
-            <a:schemeClr val="lt1"/>
-          </a:fontRef>
-        </p:style>
-        <p:txBody>
-          <a:bodyPr rtlCol="0" anchor="ctr"/>
-          <a:lstStyle/>
-          <a:p>
-            <a:pPr algn="ctr"/>
-          </a:p>
-        </p:txBody>
-      </p:sp>
-      <p:sp>
-        <p:nvSpPr>
-          <p:cNvPr id="12" name="Rectangle 11"/>
-          <p:cNvSpPr/>
-          <p:nvPr/>
-        </p:nvSpPr>
-        <p:spPr>
-          <a:xfrm>
-            <a:off x="2657475" y="2667000"/>
-            <a:ext cx="1476375" cy="57150"/>
-          </a:xfrm>
-          <a:prstGeom prst="rect">
-            <a:avLst/>
-          </a:prstGeom>
-          <a:solidFill>
-            <a:srgbClr val="14B8A6"/>
-          </a:solidFill>
-          <a:ln>
-            <a:noFill/>
-          </a:ln>
-          <a:effectLst/>
-        </p:spPr>
-        <p:style>
-          <a:lnRef idx="1">
-            <a:schemeClr val="accent1"/>
-          </a:lnRef>
-          <a:fillRef idx="3">
-            <a:schemeClr val="accent1"/>
-          </a:fillRef>
-          <a:effectRef idx="2">
-            <a:schemeClr val="accent1"/>
-          </a:effectRef>
-          <a:fontRef idx="minor">
-            <a:schemeClr val="lt1"/>
-          </a:fontRef>
-        </p:style>
-        <p:txBody>
-          <a:bodyPr rtlCol="0" anchor="ctr"/>
-          <a:lstStyle/>
-          <a:p>
-            <a:pPr algn="ctr"/>
-          </a:p>
-        </p:txBody>
-      </p:sp>
-      <p:sp>
-        <p:nvSpPr>
-          <p:cNvPr id="13" name="Rounded Rectangle 12"/>
-          <p:cNvSpPr/>
-          <p:nvPr/>
-        </p:nvSpPr>
-        <p:spPr>
-          <a:xfrm>
-            <a:off x="3252787" y="2524125"/>
-            <a:ext cx="285750" cy="285750"/>
-          </a:xfrm>
-          <a:prstGeom prst="roundRect">
-            <a:avLst>
-              <a:gd name="adj" fmla="val 8000"/>
-            </a:avLst>
-          </a:prstGeom>
-          <a:solidFill>
-            <a:srgbClr val="14B8A6"/>
-          </a:solidFill>
-          <a:ln>
-            <a:noFill/>
-          </a:ln>
-          <a:effectLst/>
-        </p:spPr>
-        <p:style>
-          <a:lnRef idx="1">
-            <a:schemeClr val="accent1"/>
-          </a:lnRef>
-          <a:fillRef idx="3">
-            <a:schemeClr val="accent1"/>
-          </a:fillRef>
-          <a:effectRef idx="2">
-            <a:schemeClr val="accent1"/>
-          </a:effectRef>
-          <a:fontRef idx="minor">
-            <a:schemeClr val="lt1"/>
-          </a:fontRef>
-        </p:style>
-        <p:txBody>
-          <a:bodyPr rtlCol="0" anchor="ctr"/>
-          <a:lstStyle/>
-          <a:p>
-            <a:pPr algn="ctr"/>
-          </a:p>
-        </p:txBody>
-      </p:sp>
-      <p:sp>
-        <p:nvSpPr>
-          <p:cNvPr id="14" name="TextBox 13"/>
-          <p:cNvSpPr txBox="1"/>
-          <p:nvPr/>
-        </p:nvSpPr>
-        <p:spPr>
-          <a:xfrm>
-            <a:off x="3252787" y="2514600"/>
-            <a:ext cx="285750" cy="285750"/>
-          </a:xfrm>
-          <a:prstGeom prst="rect">
-            <a:avLst/>
-          </a:prstGeom>
-          <a:noFill/>
-        </p:spPr>
-        <p:txBody>
-          <a:bodyPr wrap="square" anchor="ctr">
-            <a:spAutoFit/>
-          </a:bodyPr>
-          <a:lstStyle/>
-          <a:p>
-            <a:pPr algn="ctr">
-              <a:lnSpc>
-                <a:spcPct val="100000"/>
-              </a:lnSpc>
-            </a:pPr>
-            <a:r>
-              <a:rPr sz="1300" b="1">
-                <a:solidFill>
-                  <a:srgbClr val="FFFFFF"/>
-                </a:solidFill>
-                <a:latin typeface="PingFang SC"/>
-              </a:rPr>
-              <a:t>2</a:t>
-            </a:r>
-          </a:p>
-        </p:txBody>
-      </p:sp>
-      <p:sp>
-        <p:nvSpPr>
-          <p:cNvPr id="15" name="TextBox 14"/>
-          <p:cNvSpPr txBox="1"/>
-          <p:nvPr/>
-        </p:nvSpPr>
-        <p:spPr>
-          <a:xfrm>
-            <a:off x="2733675" y="2800350"/>
-            <a:ext cx="1323975" cy="952500"/>
-          </a:xfrm>
-          <a:prstGeom prst="rect">
-            <a:avLst/>
-          </a:prstGeom>
-          <a:noFill/>
-        </p:spPr>
-        <p:txBody>
-          <a:bodyPr wrap="square" anchor="ctr">
-            <a:spAutoFit/>
-          </a:bodyPr>
-          <a:lstStyle/>
-          <a:p>
-            <a:pPr algn="ctr">
-              <a:lnSpc>
-                <a:spcPct val="100000"/>
-              </a:lnSpc>
-            </a:pPr>
-            <a:r>
-              <a:rPr sz="1200" b="1">
-                <a:solidFill>
-                  <a:srgbClr val="475569"/>
-                </a:solidFill>
-                <a:latin typeface="PingFang SC"/>
-              </a:rPr>
-              <a:t>审批</a:t>
-            </a:r>
-          </a:p>
-        </p:txBody>
-      </p:sp>
-      <p:cxnSp>
-        <p:nvCxnSpPr>
-          <p:cNvPr id="16" name="Connector 15"/>
-          <p:cNvCxnSpPr/>
-          <p:nvPr/>
-        </p:nvCxnSpPr>
-        <p:spPr>
-          <a:xfrm>
-            <a:off x="2390775" y="3238500"/>
-            <a:ext cx="190500" cy="0"/>
-          </a:xfrm>
-          <a:prstGeom prst="line">
-            <a:avLst/>
-          </a:prstGeom>
-          <a:ln w="20320">
-            <a:solidFill>
-              <a:srgbClr val="475569"/>
-            </a:solidFill>
-          </a:ln>
-        </p:spPr>
-        <p:style>
-          <a:lnRef idx="2">
-            <a:schemeClr val="accent1"/>
-          </a:lnRef>
-          <a:fillRef idx="0">
-            <a:schemeClr val="accent1"/>
-          </a:fillRef>
-          <a:effectRef idx="1">
-            <a:schemeClr val="accent1"/>
-          </a:effectRef>
-          <a:fontRef idx="minor">
-            <a:schemeClr val="tx1"/>
-          </a:fontRef>
-        </p:style>
-      </p:cxnSp>
-      <p:sp>
-        <p:nvSpPr>
-          <p:cNvPr id="17" name="Isosceles Triangle 16"/>
-          <p:cNvSpPr/>
-          <p:nvPr/>
-        </p:nvSpPr>
-        <p:spPr>
-          <a:xfrm rot="5400000">
-            <a:off x="2495551" y="3195638"/>
-            <a:ext cx="85725" cy="85725"/>
-          </a:xfrm>
-          <a:prstGeom prst="triangle">
-            <a:avLst/>
-          </a:prstGeom>
-          <a:solidFill>
-            <a:srgbClr val="475569"/>
-          </a:solidFill>
-          <a:ln>
-            <a:noFill/>
-          </a:ln>
-          <a:effectLst/>
-        </p:spPr>
-        <p:style>
-          <a:lnRef idx="1">
-            <a:schemeClr val="accent1"/>
-          </a:lnRef>
-          <a:fillRef idx="3">
-            <a:schemeClr val="accent1"/>
-          </a:fillRef>
-          <a:effectRef idx="2">
-            <a:schemeClr val="accent1"/>
-          </a:effectRef>
-          <a:fontRef idx="minor">
-            <a:schemeClr val="lt1"/>
-          </a:fontRef>
-        </p:style>
-        <p:txBody>
-          <a:bodyPr rtlCol="0" anchor="ctr"/>
-          <a:lstStyle/>
-          <a:p>
-            <a:pPr algn="ctr"/>
-          </a:p>
-        </p:txBody>
-      </p:sp>
-      <p:sp>
-        <p:nvSpPr>
-          <p:cNvPr id="18" name="Rounded Rectangle 17"/>
-          <p:cNvSpPr/>
-          <p:nvPr/>
-        </p:nvSpPr>
-        <p:spPr>
-          <a:xfrm>
-            <a:off x="4457700" y="2667000"/>
-            <a:ext cx="1476375" cy="1143000"/>
-          </a:xfrm>
-          <a:prstGeom prst="roundRect">
-            <a:avLst>
-              <a:gd name="adj" fmla="val 8000"/>
-            </a:avLst>
-          </a:prstGeom>
-          <a:solidFill>
-            <a:srgbClr val="FFFFFF"/>
-          </a:solidFill>
-          <a:ln w="12700">
-            <a:solidFill>
-              <a:srgbClr val="8B5CF6"/>
-            </a:solidFill>
-          </a:ln>
-          <a:effectLst/>
-        </p:spPr>
-        <p:style>
-          <a:lnRef idx="1">
-            <a:schemeClr val="accent1"/>
-          </a:lnRef>
-          <a:fillRef idx="3">
-            <a:schemeClr val="accent1"/>
-          </a:fillRef>
-          <a:effectRef idx="2">
-            <a:schemeClr val="accent1"/>
-          </a:effectRef>
-          <a:fontRef idx="minor">
-            <a:schemeClr val="lt1"/>
-          </a:fontRef>
-        </p:style>
-        <p:txBody>
-          <a:bodyPr rtlCol="0" anchor="ctr"/>
-          <a:lstStyle/>
-          <a:p>
-            <a:pPr algn="ctr"/>
-          </a:p>
-        </p:txBody>
-      </p:sp>
-      <p:sp>
-        <p:nvSpPr>
-          <p:cNvPr id="19" name="Rectangle 18"/>
-          <p:cNvSpPr/>
-          <p:nvPr/>
-        </p:nvSpPr>
-        <p:spPr>
-          <a:xfrm>
-            <a:off x="4457700" y="2667000"/>
-            <a:ext cx="1476375" cy="57150"/>
-          </a:xfrm>
-          <a:prstGeom prst="rect">
-            <a:avLst/>
-          </a:prstGeom>
-          <a:solidFill>
-            <a:srgbClr val="8B5CF6"/>
-          </a:solidFill>
-          <a:ln>
-            <a:noFill/>
-          </a:ln>
-          <a:effectLst/>
-        </p:spPr>
-        <p:style>
-          <a:lnRef idx="1">
-            <a:schemeClr val="accent1"/>
-          </a:lnRef>
-          <a:fillRef idx="3">
-            <a:schemeClr val="accent1"/>
-          </a:fillRef>
-          <a:effectRef idx="2">
-            <a:schemeClr val="accent1"/>
-          </a:effectRef>
-          <a:fontRef idx="minor">
-            <a:schemeClr val="lt1"/>
-          </a:fontRef>
-        </p:style>
-        <p:txBody>
-          <a:bodyPr rtlCol="0" anchor="ctr"/>
-          <a:lstStyle/>
-          <a:p>
-            <a:pPr algn="ctr"/>
-          </a:p>
-        </p:txBody>
-      </p:sp>
-      <p:sp>
-        <p:nvSpPr>
-          <p:cNvPr id="20" name="Rounded Rectangle 19"/>
-          <p:cNvSpPr/>
-          <p:nvPr/>
-        </p:nvSpPr>
-        <p:spPr>
-          <a:xfrm>
-            <a:off x="5053012" y="2524125"/>
-            <a:ext cx="285750" cy="285750"/>
-          </a:xfrm>
-          <a:prstGeom prst="roundRect">
-            <a:avLst>
-              <a:gd name="adj" fmla="val 8000"/>
-            </a:avLst>
-          </a:prstGeom>
-          <a:solidFill>
-            <a:srgbClr val="8B5CF6"/>
-          </a:solidFill>
-          <a:ln>
-            <a:noFill/>
-          </a:ln>
-          <a:effectLst/>
-        </p:spPr>
-        <p:style>
-          <a:lnRef idx="1">
-            <a:schemeClr val="accent1"/>
-          </a:lnRef>
-          <a:fillRef idx="3">
-            <a:schemeClr val="accent1"/>
-          </a:fillRef>
-          <a:effectRef idx="2">
-            <a:schemeClr val="accent1"/>
-          </a:effectRef>
-          <a:fontRef idx="minor">
-            <a:schemeClr val="lt1"/>
-          </a:fontRef>
-        </p:style>
-        <p:txBody>
-          <a:bodyPr rtlCol="0" anchor="ctr"/>
-          <a:lstStyle/>
-          <a:p>
-            <a:pPr algn="ctr"/>
-          </a:p>
-        </p:txBody>
-      </p:sp>
-      <p:sp>
-        <p:nvSpPr>
-          <p:cNvPr id="21" name="TextBox 20"/>
-          <p:cNvSpPr txBox="1"/>
-          <p:nvPr/>
-        </p:nvSpPr>
-        <p:spPr>
-          <a:xfrm>
-            <a:off x="5053012" y="2514600"/>
-            <a:ext cx="285750" cy="285750"/>
-          </a:xfrm>
-          <a:prstGeom prst="rect">
-            <a:avLst/>
-          </a:prstGeom>
-          <a:noFill/>
-        </p:spPr>
-        <p:txBody>
-          <a:bodyPr wrap="square" anchor="ctr">
-            <a:spAutoFit/>
-          </a:bodyPr>
-          <a:lstStyle/>
-          <a:p>
-            <a:pPr algn="ctr">
-              <a:lnSpc>
-                <a:spcPct val="100000"/>
-              </a:lnSpc>
-            </a:pPr>
-            <a:r>
-              <a:rPr sz="1300" b="1">
-                <a:solidFill>
-                  <a:srgbClr val="FFFFFF"/>
-                </a:solidFill>
-                <a:latin typeface="PingFang SC"/>
-              </a:rPr>
-              <a:t>3</a:t>
-            </a:r>
-          </a:p>
-        </p:txBody>
-      </p:sp>
-      <p:sp>
-        <p:nvSpPr>
-          <p:cNvPr id="22" name="TextBox 21"/>
-          <p:cNvSpPr txBox="1"/>
-          <p:nvPr/>
-        </p:nvSpPr>
-        <p:spPr>
-          <a:xfrm>
-            <a:off x="4533900" y="2800350"/>
-            <a:ext cx="1323975" cy="952500"/>
-          </a:xfrm>
-          <a:prstGeom prst="rect">
-            <a:avLst/>
-          </a:prstGeom>
-          <a:noFill/>
-        </p:spPr>
-        <p:txBody>
-          <a:bodyPr wrap="square" anchor="ctr">
-            <a:spAutoFit/>
-          </a:bodyPr>
-          <a:lstStyle/>
-          <a:p>
-            <a:pPr algn="ctr">
-              <a:lnSpc>
-                <a:spcPct val="100000"/>
-              </a:lnSpc>
-            </a:pPr>
-            <a:r>
-              <a:rPr sz="1200" b="1">
-                <a:solidFill>
-                  <a:srgbClr val="475569"/>
-                </a:solidFill>
-                <a:latin typeface="PingFang SC"/>
-              </a:rPr>
-              <a:t>10% 流量</a:t>
-            </a:r>
-          </a:p>
-        </p:txBody>
-      </p:sp>
-      <p:cxnSp>
-        <p:nvCxnSpPr>
-          <p:cNvPr id="23" name="Connector 22"/>
-          <p:cNvCxnSpPr/>
-          <p:nvPr/>
-        </p:nvCxnSpPr>
-        <p:spPr>
-          <a:xfrm>
-            <a:off x="4191000" y="3238500"/>
-            <a:ext cx="190500" cy="0"/>
-          </a:xfrm>
-          <a:prstGeom prst="line">
-            <a:avLst/>
-          </a:prstGeom>
-          <a:ln w="20320">
-            <a:solidFill>
-              <a:srgbClr val="475569"/>
-            </a:solidFill>
-          </a:ln>
-        </p:spPr>
-        <p:style>
-          <a:lnRef idx="2">
-            <a:schemeClr val="accent1"/>
-          </a:lnRef>
-          <a:fillRef idx="0">
-            <a:schemeClr val="accent1"/>
-          </a:fillRef>
-          <a:effectRef idx="1">
-            <a:schemeClr val="accent1"/>
-          </a:effectRef>
-          <a:fontRef idx="minor">
-            <a:schemeClr val="tx1"/>
-          </a:fontRef>
-        </p:style>
-      </p:cxnSp>
-      <p:sp>
-        <p:nvSpPr>
-          <p:cNvPr id="24" name="Isosceles Triangle 23"/>
-          <p:cNvSpPr/>
-          <p:nvPr/>
-        </p:nvSpPr>
-        <p:spPr>
-          <a:xfrm rot="5400000">
-            <a:off x="4295776" y="3195638"/>
-            <a:ext cx="85725" cy="85725"/>
-          </a:xfrm>
-          <a:prstGeom prst="triangle">
-            <a:avLst/>
-          </a:prstGeom>
-          <a:solidFill>
-            <a:srgbClr val="475569"/>
-          </a:solidFill>
-          <a:ln>
-            <a:noFill/>
-          </a:ln>
-          <a:effectLst/>
-        </p:spPr>
-        <p:style>
-          <a:lnRef idx="1">
-            <a:schemeClr val="accent1"/>
-          </a:lnRef>
-          <a:fillRef idx="3">
-            <a:schemeClr val="accent1"/>
-          </a:fillRef>
-          <a:effectRef idx="2">
-            <a:schemeClr val="accent1"/>
-          </a:effectRef>
-          <a:fontRef idx="minor">
-            <a:schemeClr val="lt1"/>
-          </a:fontRef>
-        </p:style>
-        <p:txBody>
-          <a:bodyPr rtlCol="0" anchor="ctr"/>
-          <a:lstStyle/>
-          <a:p>
-            <a:pPr algn="ctr"/>
-          </a:p>
-        </p:txBody>
-      </p:sp>
-      <p:sp>
-        <p:nvSpPr>
-          <p:cNvPr id="25" name="Rounded Rectangle 24"/>
-          <p:cNvSpPr/>
-          <p:nvPr/>
-        </p:nvSpPr>
-        <p:spPr>
-          <a:xfrm>
-            <a:off x="6257925" y="2667000"/>
-            <a:ext cx="1476375" cy="1143000"/>
-          </a:xfrm>
-          <a:prstGeom prst="roundRect">
-            <a:avLst>
-              <a:gd name="adj" fmla="val 8000"/>
-            </a:avLst>
-          </a:prstGeom>
-          <a:solidFill>
-            <a:srgbClr val="FFFFFF"/>
-          </a:solidFill>
-          <a:ln w="12700">
-            <a:solidFill>
-              <a:srgbClr val="F59E0B"/>
-            </a:solidFill>
-          </a:ln>
-          <a:effectLst/>
-        </p:spPr>
-        <p:style>
-          <a:lnRef idx="1">
-            <a:schemeClr val="accent1"/>
-          </a:lnRef>
-          <a:fillRef idx="3">
-            <a:schemeClr val="accent1"/>
-          </a:fillRef>
-          <a:effectRef idx="2">
-            <a:schemeClr val="accent1"/>
-          </a:effectRef>
-          <a:fontRef idx="minor">
-            <a:schemeClr val="lt1"/>
-          </a:fontRef>
-        </p:style>
-        <p:txBody>
-          <a:bodyPr rtlCol="0" anchor="ctr"/>
-          <a:lstStyle/>
-          <a:p>
-            <a:pPr algn="ctr"/>
-          </a:p>
-        </p:txBody>
-      </p:sp>
-      <p:sp>
-        <p:nvSpPr>
-          <p:cNvPr id="26" name="Rectangle 25"/>
-          <p:cNvSpPr/>
-          <p:nvPr/>
-        </p:nvSpPr>
-        <p:spPr>
-          <a:xfrm>
-            <a:off x="6257925" y="2667000"/>
-            <a:ext cx="1476375" cy="57150"/>
-          </a:xfrm>
-          <a:prstGeom prst="rect">
-            <a:avLst/>
-          </a:prstGeom>
-          <a:solidFill>
-            <a:srgbClr val="F59E0B"/>
-          </a:solidFill>
-          <a:ln>
-            <a:noFill/>
-          </a:ln>
-          <a:effectLst/>
-        </p:spPr>
-        <p:style>
-          <a:lnRef idx="1">
-            <a:schemeClr val="accent1"/>
-          </a:lnRef>
-          <a:fillRef idx="3">
-            <a:schemeClr val="accent1"/>
-          </a:fillRef>
-          <a:effectRef idx="2">
-            <a:schemeClr val="accent1"/>
-          </a:effectRef>
-          <a:fontRef idx="minor">
-            <a:schemeClr val="lt1"/>
-          </a:fontRef>
-        </p:style>
-        <p:txBody>
-          <a:bodyPr rtlCol="0" anchor="ctr"/>
-          <a:lstStyle/>
-          <a:p>
-            <a:pPr algn="ctr"/>
-          </a:p>
-        </p:txBody>
-      </p:sp>
-      <p:sp>
-        <p:nvSpPr>
-          <p:cNvPr id="27" name="Rounded Rectangle 26"/>
-          <p:cNvSpPr/>
-          <p:nvPr/>
-        </p:nvSpPr>
-        <p:spPr>
-          <a:xfrm>
-            <a:off x="6853237" y="2524125"/>
-            <a:ext cx="285750" cy="285750"/>
-          </a:xfrm>
-          <a:prstGeom prst="roundRect">
-            <a:avLst>
-              <a:gd name="adj" fmla="val 8000"/>
-            </a:avLst>
-          </a:prstGeom>
-          <a:solidFill>
-            <a:srgbClr val="F59E0B"/>
-          </a:solidFill>
-          <a:ln>
-            <a:noFill/>
-          </a:ln>
-          <a:effectLst/>
-        </p:spPr>
-        <p:style>
-          <a:lnRef idx="1">
-            <a:schemeClr val="accent1"/>
-          </a:lnRef>
-          <a:fillRef idx="3">
-            <a:schemeClr val="accent1"/>
-          </a:fillRef>
-          <a:effectRef idx="2">
-            <a:schemeClr val="accent1"/>
-          </a:effectRef>
-          <a:fontRef idx="minor">
-            <a:schemeClr val="lt1"/>
-          </a:fontRef>
-        </p:style>
-        <p:txBody>
-          <a:bodyPr rtlCol="0" anchor="ctr"/>
-          <a:lstStyle/>
-          <a:p>
-            <a:pPr algn="ctr"/>
-          </a:p>
-        </p:txBody>
-      </p:sp>
-      <p:sp>
-        <p:nvSpPr>
-          <p:cNvPr id="28" name="TextBox 27"/>
-          <p:cNvSpPr txBox="1"/>
-          <p:nvPr/>
-        </p:nvSpPr>
-        <p:spPr>
-          <a:xfrm>
-            <a:off x="6853237" y="2514600"/>
-            <a:ext cx="285750" cy="285750"/>
-          </a:xfrm>
-          <a:prstGeom prst="rect">
-            <a:avLst/>
-          </a:prstGeom>
-          <a:noFill/>
-        </p:spPr>
-        <p:txBody>
-          <a:bodyPr wrap="square" anchor="ctr">
-            <a:spAutoFit/>
-          </a:bodyPr>
-          <a:lstStyle/>
-          <a:p>
-            <a:pPr algn="ctr">
-              <a:lnSpc>
-                <a:spcPct val="100000"/>
-              </a:lnSpc>
-            </a:pPr>
-            <a:r>
-              <a:rPr sz="1300" b="1">
-                <a:solidFill>
-                  <a:srgbClr val="FFFFFF"/>
-                </a:solidFill>
-                <a:latin typeface="PingFang SC"/>
-              </a:rPr>
-              <a:t>4</a:t>
-            </a:r>
-          </a:p>
-        </p:txBody>
-      </p:sp>
-      <p:sp>
-        <p:nvSpPr>
-          <p:cNvPr id="29" name="TextBox 28"/>
-          <p:cNvSpPr txBox="1"/>
-          <p:nvPr/>
-        </p:nvSpPr>
-        <p:spPr>
-          <a:xfrm>
-            <a:off x="6334125" y="2800350"/>
-            <a:ext cx="1323975" cy="952500"/>
-          </a:xfrm>
-          <a:prstGeom prst="rect">
-            <a:avLst/>
-          </a:prstGeom>
-          <a:noFill/>
-        </p:spPr>
-        <p:txBody>
-          <a:bodyPr wrap="square" anchor="ctr">
-            <a:spAutoFit/>
-          </a:bodyPr>
-          <a:lstStyle/>
-          <a:p>
-            <a:pPr algn="ctr">
-              <a:lnSpc>
-                <a:spcPct val="100000"/>
-              </a:lnSpc>
-            </a:pPr>
-            <a:r>
-              <a:rPr sz="1200" b="1">
-                <a:solidFill>
-                  <a:srgbClr val="475569"/>
-                </a:solidFill>
-                <a:latin typeface="PingFang SC"/>
-              </a:rPr>
-              <a:t>指标观察 24h</a:t>
-            </a:r>
-          </a:p>
-        </p:txBody>
-      </p:sp>
-      <p:cxnSp>
-        <p:nvCxnSpPr>
-          <p:cNvPr id="30" name="Connector 29"/>
-          <p:cNvCxnSpPr/>
-          <p:nvPr/>
-        </p:nvCxnSpPr>
-        <p:spPr>
-          <a:xfrm>
-            <a:off x="5991225" y="3238500"/>
-            <a:ext cx="190500" cy="0"/>
-          </a:xfrm>
-          <a:prstGeom prst="line">
-            <a:avLst/>
-          </a:prstGeom>
-          <a:ln w="20320">
-            <a:solidFill>
-              <a:srgbClr val="475569"/>
-            </a:solidFill>
-          </a:ln>
-        </p:spPr>
-        <p:style>
-          <a:lnRef idx="2">
-            <a:schemeClr val="accent1"/>
-          </a:lnRef>
-          <a:fillRef idx="0">
-            <a:schemeClr val="accent1"/>
-          </a:fillRef>
-          <a:effectRef idx="1">
-            <a:schemeClr val="accent1"/>
-          </a:effectRef>
-          <a:fontRef idx="minor">
-            <a:schemeClr val="tx1"/>
-          </a:fontRef>
-        </p:style>
-      </p:cxnSp>
-      <p:sp>
-        <p:nvSpPr>
-          <p:cNvPr id="31" name="Isosceles Triangle 30"/>
-          <p:cNvSpPr/>
-          <p:nvPr/>
-        </p:nvSpPr>
-        <p:spPr>
-          <a:xfrm rot="5400000">
-            <a:off x="6096001" y="3195638"/>
-            <a:ext cx="85725" cy="85725"/>
-          </a:xfrm>
-          <a:prstGeom prst="triangle">
-            <a:avLst/>
-          </a:prstGeom>
-          <a:solidFill>
-            <a:srgbClr val="475569"/>
-          </a:solidFill>
-          <a:ln>
-            <a:noFill/>
-          </a:ln>
-          <a:effectLst/>
-        </p:spPr>
-        <p:style>
-          <a:lnRef idx="1">
-            <a:schemeClr val="accent1"/>
-          </a:lnRef>
-          <a:fillRef idx="3">
-            <a:schemeClr val="accent1"/>
-          </a:fillRef>
-          <a:effectRef idx="2">
-            <a:schemeClr val="accent1"/>
-          </a:effectRef>
-          <a:fontRef idx="minor">
-            <a:schemeClr val="lt1"/>
-          </a:fontRef>
-        </p:style>
-        <p:txBody>
-          <a:bodyPr rtlCol="0" anchor="ctr"/>
-          <a:lstStyle/>
-          <a:p>
-            <a:pPr algn="ctr"/>
-          </a:p>
-        </p:txBody>
-      </p:sp>
-      <p:sp>
-        <p:nvSpPr>
-          <p:cNvPr id="32" name="Rounded Rectangle 31"/>
-          <p:cNvSpPr/>
-          <p:nvPr/>
-        </p:nvSpPr>
-        <p:spPr>
-          <a:xfrm>
-            <a:off x="8058150" y="2667000"/>
-            <a:ext cx="1476375" cy="1143000"/>
-          </a:xfrm>
-          <a:prstGeom prst="roundRect">
-            <a:avLst>
-              <a:gd name="adj" fmla="val 8000"/>
-            </a:avLst>
-          </a:prstGeom>
-          <a:solidFill>
-            <a:srgbClr val="FFFFFF"/>
-          </a:solidFill>
-          <a:ln w="12700">
-            <a:solidFill>
-              <a:srgbClr val="34D399"/>
-            </a:solidFill>
-          </a:ln>
-          <a:effectLst/>
-        </p:spPr>
-        <p:style>
-          <a:lnRef idx="1">
-            <a:schemeClr val="accent1"/>
-          </a:lnRef>
-          <a:fillRef idx="3">
-            <a:schemeClr val="accent1"/>
-          </a:fillRef>
-          <a:effectRef idx="2">
-            <a:schemeClr val="accent1"/>
-          </a:effectRef>
-          <a:fontRef idx="minor">
-            <a:schemeClr val="lt1"/>
-          </a:fontRef>
-        </p:style>
-        <p:txBody>
-          <a:bodyPr rtlCol="0" anchor="ctr"/>
-          <a:lstStyle/>
-          <a:p>
-            <a:pPr algn="ctr"/>
-          </a:p>
-        </p:txBody>
-      </p:sp>
-      <p:sp>
-        <p:nvSpPr>
-          <p:cNvPr id="33" name="Rectangle 32"/>
-          <p:cNvSpPr/>
-          <p:nvPr/>
-        </p:nvSpPr>
-        <p:spPr>
-          <a:xfrm>
-            <a:off x="8058150" y="2667000"/>
-            <a:ext cx="1476375" cy="57150"/>
-          </a:xfrm>
-          <a:prstGeom prst="rect">
-            <a:avLst/>
-          </a:prstGeom>
-          <a:solidFill>
-            <a:srgbClr val="34D399"/>
-          </a:solidFill>
-          <a:ln>
-            <a:noFill/>
-          </a:ln>
-          <a:effectLst/>
-        </p:spPr>
-        <p:style>
-          <a:lnRef idx="1">
-            <a:schemeClr val="accent1"/>
-          </a:lnRef>
-          <a:fillRef idx="3">
-            <a:schemeClr val="accent1"/>
-          </a:fillRef>
-          <a:effectRef idx="2">
-            <a:schemeClr val="accent1"/>
-          </a:effectRef>
-          <a:fontRef idx="minor">
-            <a:schemeClr val="lt1"/>
-          </a:fontRef>
-        </p:style>
-        <p:txBody>
-          <a:bodyPr rtlCol="0" anchor="ctr"/>
-          <a:lstStyle/>
-          <a:p>
-            <a:pPr algn="ctr"/>
-          </a:p>
-        </p:txBody>
-      </p:sp>
-      <p:sp>
-        <p:nvSpPr>
-          <p:cNvPr id="34" name="Rounded Rectangle 33"/>
-          <p:cNvSpPr/>
-          <p:nvPr/>
-        </p:nvSpPr>
-        <p:spPr>
-          <a:xfrm>
-            <a:off x="8653462" y="2524125"/>
-            <a:ext cx="285750" cy="285750"/>
-          </a:xfrm>
-          <a:prstGeom prst="roundRect">
-            <a:avLst>
-              <a:gd name="adj" fmla="val 8000"/>
-            </a:avLst>
-          </a:prstGeom>
-          <a:solidFill>
-            <a:srgbClr val="34D399"/>
-          </a:solidFill>
-          <a:ln>
-            <a:noFill/>
-          </a:ln>
-          <a:effectLst/>
-        </p:spPr>
-        <p:style>
-          <a:lnRef idx="1">
-            <a:schemeClr val="accent1"/>
-          </a:lnRef>
-          <a:fillRef idx="3">
-            <a:schemeClr val="accent1"/>
-          </a:fillRef>
-          <a:effectRef idx="2">
-            <a:schemeClr val="accent1"/>
-          </a:effectRef>
-          <a:fontRef idx="minor">
-            <a:schemeClr val="lt1"/>
-          </a:fontRef>
-        </p:style>
-        <p:txBody>
-          <a:bodyPr rtlCol="0" anchor="ctr"/>
-          <a:lstStyle/>
-          <a:p>
-            <a:pPr algn="ctr"/>
-          </a:p>
-        </p:txBody>
-      </p:sp>
-      <p:sp>
-        <p:nvSpPr>
-          <p:cNvPr id="35" name="TextBox 34"/>
-          <p:cNvSpPr txBox="1"/>
-          <p:nvPr/>
-        </p:nvSpPr>
-        <p:spPr>
-          <a:xfrm>
-            <a:off x="8653462" y="2514600"/>
-            <a:ext cx="285750" cy="285750"/>
-          </a:xfrm>
-          <a:prstGeom prst="rect">
-            <a:avLst/>
-          </a:prstGeom>
-          <a:noFill/>
-        </p:spPr>
-        <p:txBody>
-          <a:bodyPr wrap="square" anchor="ctr">
-            <a:spAutoFit/>
-          </a:bodyPr>
-          <a:lstStyle/>
-          <a:p>
-            <a:pPr algn="ctr">
-              <a:lnSpc>
-                <a:spcPct val="100000"/>
-              </a:lnSpc>
-            </a:pPr>
-            <a:r>
-              <a:rPr sz="1300" b="1">
-                <a:solidFill>
-                  <a:srgbClr val="FFFFFF"/>
-                </a:solidFill>
-                <a:latin typeface="PingFang SC"/>
-              </a:rPr>
-              <a:t>5</a:t>
-            </a:r>
-          </a:p>
-        </p:txBody>
-      </p:sp>
-      <p:sp>
-        <p:nvSpPr>
-          <p:cNvPr id="36" name="TextBox 35"/>
-          <p:cNvSpPr txBox="1"/>
-          <p:nvPr/>
-        </p:nvSpPr>
-        <p:spPr>
-          <a:xfrm>
-            <a:off x="8134350" y="2800350"/>
-            <a:ext cx="1323975" cy="952500"/>
-          </a:xfrm>
-          <a:prstGeom prst="rect">
-            <a:avLst/>
-          </a:prstGeom>
-          <a:noFill/>
-        </p:spPr>
-        <p:txBody>
-          <a:bodyPr wrap="square" anchor="ctr">
-            <a:spAutoFit/>
-          </a:bodyPr>
-          <a:lstStyle/>
-          <a:p>
-            <a:pPr algn="ctr">
-              <a:lnSpc>
-                <a:spcPct val="100000"/>
-              </a:lnSpc>
-            </a:pPr>
-            <a:r>
-              <a:rPr sz="1200" b="1">
-                <a:solidFill>
-                  <a:srgbClr val="475569"/>
-                </a:solidFill>
-                <a:latin typeface="PingFang SC"/>
-              </a:rPr>
-              <a:t>50%</a:t>
-            </a:r>
-          </a:p>
-        </p:txBody>
-      </p:sp>
-      <p:cxnSp>
-        <p:nvCxnSpPr>
-          <p:cNvPr id="37" name="Connector 36"/>
-          <p:cNvCxnSpPr/>
-          <p:nvPr/>
-        </p:nvCxnSpPr>
-        <p:spPr>
-          <a:xfrm>
-            <a:off x="7791450" y="3238500"/>
-            <a:ext cx="190500" cy="0"/>
-          </a:xfrm>
-          <a:prstGeom prst="line">
-            <a:avLst/>
-          </a:prstGeom>
-          <a:ln w="20320">
-            <a:solidFill>
-              <a:srgbClr val="475569"/>
-            </a:solidFill>
-          </a:ln>
-        </p:spPr>
-        <p:style>
-          <a:lnRef idx="2">
-            <a:schemeClr val="accent1"/>
-          </a:lnRef>
-          <a:fillRef idx="0">
-            <a:schemeClr val="accent1"/>
-          </a:fillRef>
-          <a:effectRef idx="1">
-            <a:schemeClr val="accent1"/>
-          </a:effectRef>
-          <a:fontRef idx="minor">
-            <a:schemeClr val="tx1"/>
-          </a:fontRef>
-        </p:style>
-      </p:cxnSp>
-      <p:sp>
-        <p:nvSpPr>
-          <p:cNvPr id="38" name="Isosceles Triangle 37"/>
-          <p:cNvSpPr/>
-          <p:nvPr/>
-        </p:nvSpPr>
-        <p:spPr>
-          <a:xfrm rot="5400000">
-            <a:off x="7896226" y="3195638"/>
-            <a:ext cx="85725" cy="85725"/>
-          </a:xfrm>
-          <a:prstGeom prst="triangle">
-            <a:avLst/>
-          </a:prstGeom>
-          <a:solidFill>
-            <a:srgbClr val="475569"/>
-          </a:solidFill>
-          <a:ln>
-            <a:noFill/>
-          </a:ln>
-          <a:effectLst/>
-        </p:spPr>
-        <p:style>
-          <a:lnRef idx="1">
-            <a:schemeClr val="accent1"/>
-          </a:lnRef>
-          <a:fillRef idx="3">
-            <a:schemeClr val="accent1"/>
-          </a:fillRef>
-          <a:effectRef idx="2">
-            <a:schemeClr val="accent1"/>
-          </a:effectRef>
-          <a:fontRef idx="minor">
-            <a:schemeClr val="lt1"/>
-          </a:fontRef>
-        </p:style>
-        <p:txBody>
-          <a:bodyPr rtlCol="0" anchor="ctr"/>
-          <a:lstStyle/>
-          <a:p>
-            <a:pPr algn="ctr"/>
-          </a:p>
-        </p:txBody>
-      </p:sp>
-      <p:sp>
-        <p:nvSpPr>
-          <p:cNvPr id="39" name="Rounded Rectangle 38"/>
-          <p:cNvSpPr/>
-          <p:nvPr/>
-        </p:nvSpPr>
-        <p:spPr>
-          <a:xfrm>
-            <a:off x="9858375" y="2667000"/>
-            <a:ext cx="1476375" cy="1143000"/>
-          </a:xfrm>
-          <a:prstGeom prst="roundRect">
-            <a:avLst>
-              <a:gd name="adj" fmla="val 8000"/>
-            </a:avLst>
-          </a:prstGeom>
-          <a:solidFill>
-            <a:srgbClr val="FFFFFF"/>
-          </a:solidFill>
-          <a:ln w="12700">
-            <a:solidFill>
-              <a:srgbClr val="F87171"/>
-            </a:solidFill>
-          </a:ln>
-          <a:effectLst/>
-        </p:spPr>
-        <p:style>
-          <a:lnRef idx="1">
-            <a:schemeClr val="accent1"/>
-          </a:lnRef>
-          <a:fillRef idx="3">
-            <a:schemeClr val="accent1"/>
-          </a:fillRef>
-          <a:effectRef idx="2">
-            <a:schemeClr val="accent1"/>
-          </a:effectRef>
-          <a:fontRef idx="minor">
-            <a:schemeClr val="lt1"/>
-          </a:fontRef>
-        </p:style>
-        <p:txBody>
-          <a:bodyPr rtlCol="0" anchor="ctr"/>
-          <a:lstStyle/>
-          <a:p>
-            <a:pPr algn="ctr"/>
-          </a:p>
-        </p:txBody>
-      </p:sp>
-      <p:sp>
-        <p:nvSpPr>
-          <p:cNvPr id="40" name="Rectangle 39"/>
-          <p:cNvSpPr/>
-          <p:nvPr/>
-        </p:nvSpPr>
-        <p:spPr>
-          <a:xfrm>
-            <a:off x="9858375" y="2667000"/>
-            <a:ext cx="1476375" cy="57150"/>
-          </a:xfrm>
-          <a:prstGeom prst="rect">
-            <a:avLst/>
-          </a:prstGeom>
-          <a:solidFill>
-            <a:srgbClr val="F87171"/>
-          </a:solidFill>
-          <a:ln>
-            <a:noFill/>
-          </a:ln>
-          <a:effectLst/>
-        </p:spPr>
-        <p:style>
-          <a:lnRef idx="1">
-            <a:schemeClr val="accent1"/>
-          </a:lnRef>
-          <a:fillRef idx="3">
-            <a:schemeClr val="accent1"/>
-          </a:fillRef>
-          <a:effectRef idx="2">
-            <a:schemeClr val="accent1"/>
-          </a:effectRef>
-          <a:fontRef idx="minor">
-            <a:schemeClr val="lt1"/>
-          </a:fontRef>
-        </p:style>
-        <p:txBody>
-          <a:bodyPr rtlCol="0" anchor="ctr"/>
-          <a:lstStyle/>
-          <a:p>
-            <a:pPr algn="ctr"/>
-          </a:p>
-        </p:txBody>
-      </p:sp>
-      <p:sp>
-        <p:nvSpPr>
-          <p:cNvPr id="41" name="Rounded Rectangle 40"/>
-          <p:cNvSpPr/>
-          <p:nvPr/>
-        </p:nvSpPr>
-        <p:spPr>
-          <a:xfrm>
-            <a:off x="10453687" y="2524125"/>
-            <a:ext cx="285750" cy="285750"/>
-          </a:xfrm>
-          <a:prstGeom prst="roundRect">
-            <a:avLst>
-              <a:gd name="adj" fmla="val 8000"/>
-            </a:avLst>
-          </a:prstGeom>
-          <a:solidFill>
-            <a:srgbClr val="F87171"/>
-          </a:solidFill>
-          <a:ln>
-            <a:noFill/>
-          </a:ln>
-          <a:effectLst/>
-        </p:spPr>
-        <p:style>
-          <a:lnRef idx="1">
-            <a:schemeClr val="accent1"/>
-          </a:lnRef>
-          <a:fillRef idx="3">
-            <a:schemeClr val="accent1"/>
-          </a:fillRef>
-          <a:effectRef idx="2">
-            <a:schemeClr val="accent1"/>
-          </a:effectRef>
-          <a:fontRef idx="minor">
-            <a:schemeClr val="lt1"/>
-          </a:fontRef>
-        </p:style>
-        <p:txBody>
-          <a:bodyPr rtlCol="0" anchor="ctr"/>
-          <a:lstStyle/>
-          <a:p>
-            <a:pPr algn="ctr"/>
-          </a:p>
-        </p:txBody>
-      </p:sp>
-      <p:sp>
-        <p:nvSpPr>
-          <p:cNvPr id="42" name="TextBox 41"/>
-          <p:cNvSpPr txBox="1"/>
-          <p:nvPr/>
-        </p:nvSpPr>
-        <p:spPr>
-          <a:xfrm>
-            <a:off x="10453687" y="2514600"/>
-            <a:ext cx="285750" cy="285750"/>
-          </a:xfrm>
-          <a:prstGeom prst="rect">
-            <a:avLst/>
-          </a:prstGeom>
-          <a:noFill/>
-        </p:spPr>
-        <p:txBody>
-          <a:bodyPr wrap="square" anchor="ctr">
-            <a:spAutoFit/>
-          </a:bodyPr>
-          <a:lstStyle/>
-          <a:p>
-            <a:pPr algn="ctr">
-              <a:lnSpc>
-                <a:spcPct val="100000"/>
-              </a:lnSpc>
-            </a:pPr>
-            <a:r>
-              <a:rPr sz="1300" b="1">
-                <a:solidFill>
-                  <a:srgbClr val="FFFFFF"/>
-                </a:solidFill>
-                <a:latin typeface="PingFang SC"/>
-              </a:rPr>
-              <a:t>6</a:t>
-            </a:r>
-          </a:p>
-        </p:txBody>
-      </p:sp>
-      <p:sp>
-        <p:nvSpPr>
-          <p:cNvPr id="43" name="TextBox 42"/>
-          <p:cNvSpPr txBox="1"/>
-          <p:nvPr/>
-        </p:nvSpPr>
-        <p:spPr>
-          <a:xfrm>
-            <a:off x="9934575" y="2800350"/>
-            <a:ext cx="1323975" cy="952500"/>
-          </a:xfrm>
-          <a:prstGeom prst="rect">
-            <a:avLst/>
-          </a:prstGeom>
-          <a:noFill/>
-        </p:spPr>
-        <p:txBody>
-          <a:bodyPr wrap="square" anchor="ctr">
-            <a:spAutoFit/>
-          </a:bodyPr>
-          <a:lstStyle/>
-          <a:p>
-            <a:pPr algn="ctr">
-              <a:lnSpc>
-                <a:spcPct val="100000"/>
-              </a:lnSpc>
-            </a:pPr>
-            <a:r>
-              <a:rPr sz="1200" b="1">
-                <a:solidFill>
-                  <a:srgbClr val="475569"/>
-                </a:solidFill>
-                <a:latin typeface="PingFang SC"/>
-              </a:rPr>
-              <a:t>100%|一致性哈希:同用户判定恒定</a:t>
-            </a:r>
-          </a:p>
-        </p:txBody>
-      </p:sp>
-      <p:cxnSp>
-        <p:nvCxnSpPr>
-          <p:cNvPr id="44" name="Connector 43"/>
-          <p:cNvCxnSpPr/>
-          <p:nvPr/>
-        </p:nvCxnSpPr>
-        <p:spPr>
-          <a:xfrm>
-            <a:off x="9591675" y="3238500"/>
-            <a:ext cx="190500" cy="0"/>
-          </a:xfrm>
-          <a:prstGeom prst="line">
-            <a:avLst/>
-          </a:prstGeom>
-          <a:ln w="20320">
-            <a:solidFill>
-              <a:srgbClr val="475569"/>
-            </a:solidFill>
-          </a:ln>
-        </p:spPr>
-        <p:style>
-          <a:lnRef idx="2">
-            <a:schemeClr val="accent1"/>
-          </a:lnRef>
-          <a:fillRef idx="0">
-            <a:schemeClr val="accent1"/>
-          </a:fillRef>
-          <a:effectRef idx="1">
-            <a:schemeClr val="accent1"/>
-          </a:effectRef>
-          <a:fontRef idx="minor">
-            <a:schemeClr val="tx1"/>
-          </a:fontRef>
-        </p:style>
-      </p:cxnSp>
-      <p:sp>
-        <p:nvSpPr>
-          <p:cNvPr id="45" name="Isosceles Triangle 44"/>
-          <p:cNvSpPr/>
-          <p:nvPr/>
-        </p:nvSpPr>
-        <p:spPr>
-          <a:xfrm rot="5400000">
-            <a:off x="9696451" y="3195638"/>
-            <a:ext cx="85725" cy="85725"/>
-          </a:xfrm>
-          <a:prstGeom prst="triangle">
-            <a:avLst/>
-          </a:prstGeom>
-          <a:solidFill>
-            <a:srgbClr val="475569"/>
-          </a:solidFill>
-          <a:ln>
-            <a:noFill/>
-          </a:ln>
-          <a:effectLst/>
-        </p:spPr>
-        <p:style>
-          <a:lnRef idx="1">
-            <a:schemeClr val="accent1"/>
-          </a:lnRef>
-          <a:fillRef idx="3">
-            <a:schemeClr val="accent1"/>
-          </a:fillRef>
-          <a:effectRef idx="2">
-            <a:schemeClr val="accent1"/>
-          </a:effectRef>
-          <a:fontRef idx="minor">
-            <a:schemeClr val="lt1"/>
-          </a:fontRef>
-        </p:style>
-        <p:txBody>
-          <a:bodyPr rtlCol="0" anchor="ctr"/>
-          <a:lstStyle/>
-          <a:p>
-            <a:pPr algn="ctr"/>
-          </a:p>
-        </p:txBody>
-      </p:sp>
-      <p:cxnSp>
-        <p:nvCxnSpPr>
-          <p:cNvPr id="46" name="Connector 45"/>
-          <p:cNvCxnSpPr/>
-          <p:nvPr/>
-        </p:nvCxnSpPr>
-        <p:spPr>
-          <a:xfrm>
-            <a:off x="10596562" y="3867150"/>
-            <a:ext cx="0" cy="228600"/>
-          </a:xfrm>
-          <a:prstGeom prst="line">
-            <a:avLst/>
-          </a:prstGeom>
-          <a:ln w="20320">
-            <a:solidFill>
-              <a:srgbClr val="F59E0B"/>
-            </a:solidFill>
-            <a:prstDash val="dash"/>
-          </a:ln>
-        </p:spPr>
-        <p:style>
-          <a:lnRef idx="2">
-            <a:schemeClr val="accent1"/>
-          </a:lnRef>
-          <a:fillRef idx="0">
-            <a:schemeClr val="accent1"/>
-          </a:fillRef>
-          <a:effectRef idx="1">
-            <a:schemeClr val="accent1"/>
-          </a:effectRef>
-          <a:fontRef idx="minor">
-            <a:schemeClr val="tx1"/>
-          </a:fontRef>
-        </p:style>
-      </p:cxnSp>
-      <p:sp>
-        <p:nvSpPr>
-          <p:cNvPr id="47" name="Isosceles Triangle 46"/>
-          <p:cNvSpPr/>
-          <p:nvPr/>
-        </p:nvSpPr>
-        <p:spPr>
-          <a:xfrm rot="10800000">
-            <a:off x="10553700" y="4010026"/>
-            <a:ext cx="85725" cy="85725"/>
-          </a:xfrm>
-          <a:prstGeom prst="triangle">
-            <a:avLst/>
-          </a:prstGeom>
-          <a:solidFill>
-            <a:srgbClr val="F59E0B"/>
-          </a:solidFill>
-          <a:ln>
-            <a:noFill/>
-          </a:ln>
-          <a:effectLst/>
-        </p:spPr>
-        <p:style>
-          <a:lnRef idx="1">
-            <a:schemeClr val="accent1"/>
-          </a:lnRef>
-          <a:fillRef idx="3">
-            <a:schemeClr val="accent1"/>
-          </a:fillRef>
-          <a:effectRef idx="2">
-            <a:schemeClr val="accent1"/>
-          </a:effectRef>
-          <a:fontRef idx="minor">
-            <a:schemeClr val="lt1"/>
-          </a:fontRef>
-        </p:style>
-        <p:txBody>
-          <a:bodyPr rtlCol="0" anchor="ctr"/>
-          <a:lstStyle/>
-          <a:p>
-            <a:pPr algn="ctr"/>
-          </a:p>
-        </p:txBody>
-      </p:sp>
-      <p:cxnSp>
-        <p:nvCxnSpPr>
-          <p:cNvPr id="48" name="Connector 47"/>
-          <p:cNvCxnSpPr/>
-          <p:nvPr/>
-        </p:nvCxnSpPr>
-        <p:spPr>
-          <a:xfrm flipH="1">
-            <a:off x="6996112" y="4095750"/>
-            <a:ext cx="3600450" cy="0"/>
-          </a:xfrm>
-          <a:prstGeom prst="line">
-            <a:avLst/>
-          </a:prstGeom>
-          <a:ln w="20320">
-            <a:solidFill>
-              <a:srgbClr val="F59E0B"/>
-            </a:solidFill>
-            <a:prstDash val="dash"/>
-          </a:ln>
-        </p:spPr>
-        <p:style>
-          <a:lnRef idx="2">
-            <a:schemeClr val="accent1"/>
-          </a:lnRef>
-          <a:fillRef idx="0">
-            <a:schemeClr val="accent1"/>
-          </a:fillRef>
-          <a:effectRef idx="1">
-            <a:schemeClr val="accent1"/>
-          </a:effectRef>
-          <a:fontRef idx="minor">
-            <a:schemeClr val="tx1"/>
-          </a:fontRef>
-        </p:style>
-      </p:cxnSp>
-      <p:sp>
-        <p:nvSpPr>
-          <p:cNvPr id="49" name="Isosceles Triangle 48"/>
-          <p:cNvSpPr/>
-          <p:nvPr/>
-        </p:nvSpPr>
-        <p:spPr>
-          <a:xfrm rot="16200000">
-            <a:off x="6996112" y="4052888"/>
-            <a:ext cx="85725" cy="85725"/>
-          </a:xfrm>
-          <a:prstGeom prst="triangle">
-            <a:avLst/>
-          </a:prstGeom>
-          <a:solidFill>
-            <a:srgbClr val="F59E0B"/>
-          </a:solidFill>
-          <a:ln>
-            <a:noFill/>
-          </a:ln>
-          <a:effectLst/>
-        </p:spPr>
-        <p:style>
-          <a:lnRef idx="1">
-            <a:schemeClr val="accent1"/>
-          </a:lnRef>
-          <a:fillRef idx="3">
-            <a:schemeClr val="accent1"/>
-          </a:fillRef>
-          <a:effectRef idx="2">
-            <a:schemeClr val="accent1"/>
-          </a:effectRef>
-          <a:fontRef idx="minor">
-            <a:schemeClr val="lt1"/>
-          </a:fontRef>
-        </p:style>
-        <p:txBody>
-          <a:bodyPr rtlCol="0" anchor="ctr"/>
-          <a:lstStyle/>
-          <a:p>
-            <a:pPr algn="ctr"/>
-          </a:p>
-        </p:txBody>
-      </p:sp>
-      <p:cxnSp>
-        <p:nvCxnSpPr>
-          <p:cNvPr id="50" name="Connector 49"/>
-          <p:cNvCxnSpPr/>
-          <p:nvPr/>
-        </p:nvCxnSpPr>
-        <p:spPr>
-          <a:xfrm flipV="1">
-            <a:off x="6996112" y="3867150"/>
-            <a:ext cx="0" cy="228600"/>
-          </a:xfrm>
-          <a:prstGeom prst="line">
-            <a:avLst/>
-          </a:prstGeom>
-          <a:ln w="20320">
-            <a:solidFill>
-              <a:srgbClr val="F59E0B"/>
-            </a:solidFill>
-            <a:prstDash val="dash"/>
-          </a:ln>
-        </p:spPr>
-        <p:style>
-          <a:lnRef idx="2">
-            <a:schemeClr val="accent1"/>
-          </a:lnRef>
-          <a:fillRef idx="0">
-            <a:schemeClr val="accent1"/>
-          </a:fillRef>
-          <a:effectRef idx="1">
-            <a:schemeClr val="accent1"/>
-          </a:effectRef>
-          <a:fontRef idx="minor">
-            <a:schemeClr val="tx1"/>
-          </a:fontRef>
-        </p:style>
-      </p:cxnSp>
-      <p:sp>
-        <p:nvSpPr>
-          <p:cNvPr id="51" name="Isosceles Triangle 50"/>
-          <p:cNvSpPr/>
-          <p:nvPr/>
-        </p:nvSpPr>
-        <p:spPr>
-          <a:xfrm>
-            <a:off x="6953250" y="3867150"/>
-            <a:ext cx="85725" cy="85725"/>
-          </a:xfrm>
-          <a:prstGeom prst="triangle">
-            <a:avLst/>
-          </a:prstGeom>
-          <a:solidFill>
-            <a:srgbClr val="F59E0B"/>
-          </a:solidFill>
-          <a:ln>
-            <a:noFill/>
-          </a:ln>
-          <a:effectLst/>
-        </p:spPr>
-        <p:style>
-          <a:lnRef idx="1">
-            <a:schemeClr val="accent1"/>
-          </a:lnRef>
-          <a:fillRef idx="3">
-            <a:schemeClr val="accent1"/>
-          </a:fillRef>
-          <a:effectRef idx="2">
-            <a:schemeClr val="accent1"/>
-          </a:effectRef>
-          <a:fontRef idx="minor">
-            <a:schemeClr val="lt1"/>
-          </a:fontRef>
-        </p:style>
-        <p:txBody>
-          <a:bodyPr rtlCol="0" anchor="ctr"/>
-          <a:lstStyle/>
-          <a:p>
-            <a:pPr algn="ctr"/>
-          </a:p>
-        </p:txBody>
-      </p:sp>
-      <p:sp>
-        <p:nvSpPr>
-          <p:cNvPr id="52" name="TextBox 51"/>
-          <p:cNvSpPr txBox="1"/>
-          <p:nvPr/>
-        </p:nvSpPr>
-        <p:spPr>
-          <a:xfrm>
-            <a:off x="6996112" y="3848100"/>
-            <a:ext cx="5076825" cy="209550"/>
-          </a:xfrm>
-          <a:prstGeom prst="rect">
-            <a:avLst/>
-          </a:prstGeom>
-          <a:noFill/>
-        </p:spPr>
-        <p:txBody>
-          <a:bodyPr wrap="square" anchor="ctr">
-            <a:spAutoFit/>
-          </a:bodyPr>
-          <a:lstStyle/>
-          <a:p>
-            <a:pPr algn="ctr">
-              <a:lnSpc>
-                <a:spcPct val="100000"/>
-              </a:lnSpc>
-            </a:pPr>
-            <a:r>
-              <a:rPr sz="1000" b="1">
-                <a:solidFill>
-                  <a:srgbClr val="F59E0B"/>
-                </a:solidFill>
-                <a:latin typeface="PingFang SC"/>
-              </a:rPr>
-              <a:t>循环(loop)</a:t>
-            </a:r>
-          </a:p>
-        </p:txBody>
-      </p:sp>
-      <p:sp>
-        <p:nvSpPr>
-          <p:cNvPr id="53" name="Rounded Rectangle 52"/>
-          <p:cNvSpPr/>
-          <p:nvPr/>
-        </p:nvSpPr>
-        <p:spPr>
-          <a:xfrm>
-            <a:off x="857250" y="5715000"/>
-            <a:ext cx="10477500" cy="419100"/>
-          </a:xfrm>
-          <a:prstGeom prst="roundRect">
-            <a:avLst>
-              <a:gd name="adj" fmla="val 8000"/>
-            </a:avLst>
-          </a:prstGeom>
-          <a:solidFill>
-            <a:srgbClr val="F1F5F9"/>
-          </a:solidFill>
-          <a:ln>
-            <a:noFill/>
-          </a:ln>
-          <a:effectLst/>
-        </p:spPr>
-        <p:style>
-          <a:lnRef idx="1">
-            <a:schemeClr val="accent1"/>
-          </a:lnRef>
-          <a:fillRef idx="3">
-            <a:schemeClr val="accent1"/>
-          </a:fillRef>
-          <a:effectRef idx="2">
-            <a:schemeClr val="accent1"/>
-          </a:effectRef>
-          <a:fontRef idx="minor">
-            <a:schemeClr val="lt1"/>
-          </a:fontRef>
-        </p:style>
-        <p:txBody>
-          <a:bodyPr rtlCol="0" anchor="ctr"/>
-          <a:lstStyle/>
-          <a:p>
-            <a:pPr algn="ctr"/>
-          </a:p>
-        </p:txBody>
-      </p:sp>
-      <p:sp>
-        <p:nvSpPr>
-          <p:cNvPr id="54" name="TextBox 53"/>
-          <p:cNvSpPr txBox="1"/>
-          <p:nvPr/>
-        </p:nvSpPr>
-        <p:spPr>
-          <a:xfrm>
-            <a:off x="1009650" y="5715000"/>
-            <a:ext cx="10172700" cy="419100"/>
-          </a:xfrm>
-          <a:prstGeom prst="rect">
-            <a:avLst/>
-          </a:prstGeom>
-          <a:noFill/>
-        </p:spPr>
-        <p:txBody>
-          <a:bodyPr wrap="square" anchor="ctr">
-            <a:spAutoFit/>
-          </a:bodyPr>
-          <a:lstStyle/>
-          <a:p>
-            <a:pPr algn="l">
-              <a:lnSpc>
-                <a:spcPct val="100000"/>
-              </a:lnSpc>
-            </a:pPr>
-            <a:r>
-              <a:rPr sz="1200" b="0">
-                <a:solidFill>
-                  <a:srgbClr val="2563EB"/>
-                </a:solidFill>
-                <a:latin typeface="PingFang SC"/>
-              </a:rPr>
-              <a:t>▶ 任一指标异常→FeatureFlag 一键回滚(秒级)</a:t>
-            </a:r>
-          </a:p>
-        </p:txBody>
-      </p:sp>
-      <p:sp>
-        <p:nvSpPr>
-          <p:cNvPr id="55" name="TextBox 54"/>
-          <p:cNvSpPr txBox="1"/>
-          <p:nvPr/>
-        </p:nvSpPr>
-        <p:spPr>
-          <a:xfrm>
-            <a:off x="10287000" y="6534150"/>
-            <a:ext cx="1619250" cy="266700"/>
-          </a:xfrm>
-          <a:prstGeom prst="rect">
-            <a:avLst/>
-          </a:prstGeom>
-          <a:noFill/>
-        </p:spPr>
-        <p:txBody>
-          <a:bodyPr wrap="square" anchor="ctr">
-            <a:spAutoFit/>
-          </a:bodyPr>
-          <a:lstStyle/>
-          <a:p>
-            <a:pPr algn="r">
-              <a:lnSpc>
-                <a:spcPct val="100000"/>
-              </a:lnSpc>
-            </a:pPr>
-            <a:r>
               <a:rPr sz="900" b="0">
                 <a:solidFill>
                   <a:srgbClr val="94A3B8"/>
@@ -7273,7 +7234,7 @@
       </p:sp>
       <p:sp>
         <p:nvSpPr>
-          <p:cNvPr id="56" name="TextBox 55"/>
+          <p:cNvPr id="55" name="TextBox 54"/>
           <p:cNvSpPr txBox="1"/>
           <p:nvPr/>
         </p:nvSpPr>
@@ -12524,7 +12485,7 @@
                 </a:solidFill>
                 <a:latin typeface="PingFang SC"/>
               </a:rPr>
-              <a:t>WAF 模板+哈希链+JWT/M2M 可扩展|企业案例:金融 Agent 合规落地</a:t>
+              <a:t>WAF 模板+哈希链+JWT/M2M 可扩展</a:t>
             </a:r>
           </a:p>
         </p:txBody>
@@ -19709,14 +19670,914 @@
       </p:sp>
       <p:sp>
         <p:nvSpPr>
-          <p:cNvPr id="5" name="TextBox 4"/>
+          <p:cNvPr id="5" name="Rectangle 4"/>
+          <p:cNvSpPr/>
+          <p:nvPr/>
+        </p:nvSpPr>
+        <p:spPr>
+          <a:xfrm>
+            <a:off x="1619250" y="3314700"/>
+            <a:ext cx="8953500" cy="38100"/>
+          </a:xfrm>
+          <a:prstGeom prst="rect">
+            <a:avLst/>
+          </a:prstGeom>
+          <a:solidFill>
+            <a:srgbClr val="DDE5EE"/>
+          </a:solidFill>
+          <a:ln>
+            <a:noFill/>
+          </a:ln>
+          <a:effectLst/>
+        </p:spPr>
+        <p:style>
+          <a:lnRef idx="1">
+            <a:schemeClr val="accent1"/>
+          </a:lnRef>
+          <a:fillRef idx="3">
+            <a:schemeClr val="accent1"/>
+          </a:fillRef>
+          <a:effectRef idx="2">
+            <a:schemeClr val="accent1"/>
+          </a:effectRef>
+          <a:fontRef idx="minor">
+            <a:schemeClr val="lt1"/>
+          </a:fontRef>
+        </p:style>
+        <p:txBody>
+          <a:bodyPr rtlCol="0" anchor="ctr"/>
+          <a:lstStyle/>
+          <a:p>
+            <a:pPr algn="ctr"/>
+          </a:p>
+        </p:txBody>
+      </p:sp>
+      <p:sp>
+        <p:nvSpPr>
+          <p:cNvPr id="6" name="Rounded Rectangle 5"/>
+          <p:cNvSpPr/>
+          <p:nvPr/>
+        </p:nvSpPr>
+        <p:spPr>
+          <a:xfrm>
+            <a:off x="1514475" y="3228975"/>
+            <a:ext cx="209550" cy="209550"/>
+          </a:xfrm>
+          <a:prstGeom prst="roundRect">
+            <a:avLst>
+              <a:gd name="adj" fmla="val 8000"/>
+            </a:avLst>
+          </a:prstGeom>
+          <a:solidFill>
+            <a:srgbClr val="2563EB"/>
+          </a:solidFill>
+          <a:ln>
+            <a:noFill/>
+          </a:ln>
+          <a:effectLst/>
+        </p:spPr>
+        <p:style>
+          <a:lnRef idx="1">
+            <a:schemeClr val="accent1"/>
+          </a:lnRef>
+          <a:fillRef idx="3">
+            <a:schemeClr val="accent1"/>
+          </a:fillRef>
+          <a:effectRef idx="2">
+            <a:schemeClr val="accent1"/>
+          </a:effectRef>
+          <a:fontRef idx="minor">
+            <a:schemeClr val="lt1"/>
+          </a:fontRef>
+        </p:style>
+        <p:txBody>
+          <a:bodyPr rtlCol="0" anchor="ctr"/>
+          <a:lstStyle/>
+          <a:p>
+            <a:pPr algn="ctr"/>
+          </a:p>
+        </p:txBody>
+      </p:sp>
+      <p:sp>
+        <p:nvSpPr>
+          <p:cNvPr id="7" name="Rounded Rectangle 6"/>
+          <p:cNvSpPr/>
+          <p:nvPr/>
+        </p:nvSpPr>
+        <p:spPr>
+          <a:xfrm>
+            <a:off x="190500" y="1905000"/>
+            <a:ext cx="2857500" cy="1123950"/>
+          </a:xfrm>
+          <a:prstGeom prst="roundRect">
+            <a:avLst>
+              <a:gd name="adj" fmla="val 8000"/>
+            </a:avLst>
+          </a:prstGeom>
+          <a:solidFill>
+            <a:srgbClr val="F1F5F9"/>
+          </a:solidFill>
+          <a:ln>
+            <a:noFill/>
+          </a:ln>
+          <a:effectLst/>
+        </p:spPr>
+        <p:style>
+          <a:lnRef idx="1">
+            <a:schemeClr val="accent1"/>
+          </a:lnRef>
+          <a:fillRef idx="3">
+            <a:schemeClr val="accent1"/>
+          </a:fillRef>
+          <a:effectRef idx="2">
+            <a:schemeClr val="accent1"/>
+          </a:effectRef>
+          <a:fontRef idx="minor">
+            <a:schemeClr val="lt1"/>
+          </a:fontRef>
+        </p:style>
+        <p:txBody>
+          <a:bodyPr rtlCol="0" anchor="ctr"/>
+          <a:lstStyle/>
+          <a:p>
+            <a:pPr algn="ctr"/>
+          </a:p>
+        </p:txBody>
+      </p:sp>
+      <p:sp>
+        <p:nvSpPr>
+          <p:cNvPr id="8" name="Rectangle 7"/>
+          <p:cNvSpPr/>
+          <p:nvPr/>
+        </p:nvSpPr>
+        <p:spPr>
+          <a:xfrm>
+            <a:off x="190500" y="1905000"/>
+            <a:ext cx="2857500" cy="38100"/>
+          </a:xfrm>
+          <a:prstGeom prst="rect">
+            <a:avLst/>
+          </a:prstGeom>
+          <a:solidFill>
+            <a:srgbClr val="2563EB"/>
+          </a:solidFill>
+          <a:ln>
+            <a:noFill/>
+          </a:ln>
+          <a:effectLst/>
+        </p:spPr>
+        <p:style>
+          <a:lnRef idx="1">
+            <a:schemeClr val="accent1"/>
+          </a:lnRef>
+          <a:fillRef idx="3">
+            <a:schemeClr val="accent1"/>
+          </a:fillRef>
+          <a:effectRef idx="2">
+            <a:schemeClr val="accent1"/>
+          </a:effectRef>
+          <a:fontRef idx="minor">
+            <a:schemeClr val="lt1"/>
+          </a:fontRef>
+        </p:style>
+        <p:txBody>
+          <a:bodyPr rtlCol="0" anchor="ctr"/>
+          <a:lstStyle/>
+          <a:p>
+            <a:pPr algn="ctr"/>
+          </a:p>
+        </p:txBody>
+      </p:sp>
+      <p:sp>
+        <p:nvSpPr>
+          <p:cNvPr id="9" name="TextBox 8"/>
           <p:cNvSpPr txBox="1"/>
           <p:nvPr/>
         </p:nvSpPr>
         <p:spPr>
           <a:xfrm>
-            <a:off x="9334500" y="0"/>
-            <a:ext cx="2667000" cy="704850"/>
+            <a:off x="285750" y="2000250"/>
+            <a:ext cx="2667000" cy="285750"/>
+          </a:xfrm>
+          <a:prstGeom prst="rect">
+            <a:avLst/>
+          </a:prstGeom>
+          <a:noFill/>
+        </p:spPr>
+        <p:txBody>
+          <a:bodyPr wrap="square" anchor="ctr">
+            <a:spAutoFit/>
+          </a:bodyPr>
+          <a:lstStyle/>
+          <a:p>
+            <a:pPr algn="ctr">
+              <a:lnSpc>
+                <a:spcPct val="100000"/>
+              </a:lnSpc>
+            </a:pPr>
+            <a:r>
+              <a:rPr sz="1400" b="1">
+                <a:solidFill>
+                  <a:srgbClr val="2563EB"/>
+                </a:solidFill>
+                <a:latin typeface="PingFang SC"/>
+              </a:rPr>
+              <a:t>CI</a:t>
+            </a:r>
+          </a:p>
+        </p:txBody>
+      </p:sp>
+      <p:sp>
+        <p:nvSpPr>
+          <p:cNvPr id="10" name="TextBox 9"/>
+          <p:cNvSpPr txBox="1"/>
+          <p:nvPr/>
+        </p:nvSpPr>
+        <p:spPr>
+          <a:xfrm>
+            <a:off x="285750" y="2305050"/>
+            <a:ext cx="2667000" cy="666750"/>
+          </a:xfrm>
+          <a:prstGeom prst="rect">
+            <a:avLst/>
+          </a:prstGeom>
+          <a:noFill/>
+        </p:spPr>
+        <p:txBody>
+          <a:bodyPr wrap="square" anchor="ctr">
+            <a:spAutoFit/>
+          </a:bodyPr>
+          <a:lstStyle/>
+          <a:p>
+            <a:pPr algn="l">
+              <a:lnSpc>
+                <a:spcPct val="105000"/>
+              </a:lnSpc>
+            </a:pPr>
+            <a:r>
+              <a:rPr sz="1050" b="0">
+                <a:solidFill>
+                  <a:srgbClr val="475569"/>
+                </a:solidFill>
+                <a:latin typeface="PingFang SC"/>
+              </a:rPr>
+              <a:t>测试+覆盖率+lint</a:t>
+            </a:r>
+          </a:p>
+        </p:txBody>
+      </p:sp>
+      <p:sp>
+        <p:nvSpPr>
+          <p:cNvPr id="11" name="Rounded Rectangle 10"/>
+          <p:cNvSpPr/>
+          <p:nvPr/>
+        </p:nvSpPr>
+        <p:spPr>
+          <a:xfrm>
+            <a:off x="4498975" y="3228975"/>
+            <a:ext cx="209550" cy="209550"/>
+          </a:xfrm>
+          <a:prstGeom prst="roundRect">
+            <a:avLst>
+              <a:gd name="adj" fmla="val 8000"/>
+            </a:avLst>
+          </a:prstGeom>
+          <a:solidFill>
+            <a:srgbClr val="14B8A6"/>
+          </a:solidFill>
+          <a:ln>
+            <a:noFill/>
+          </a:ln>
+          <a:effectLst/>
+        </p:spPr>
+        <p:style>
+          <a:lnRef idx="1">
+            <a:schemeClr val="accent1"/>
+          </a:lnRef>
+          <a:fillRef idx="3">
+            <a:schemeClr val="accent1"/>
+          </a:fillRef>
+          <a:effectRef idx="2">
+            <a:schemeClr val="accent1"/>
+          </a:effectRef>
+          <a:fontRef idx="minor">
+            <a:schemeClr val="lt1"/>
+          </a:fontRef>
+        </p:style>
+        <p:txBody>
+          <a:bodyPr rtlCol="0" anchor="ctr"/>
+          <a:lstStyle/>
+          <a:p>
+            <a:pPr algn="ctr"/>
+          </a:p>
+        </p:txBody>
+      </p:sp>
+      <p:sp>
+        <p:nvSpPr>
+          <p:cNvPr id="12" name="Rounded Rectangle 11"/>
+          <p:cNvSpPr/>
+          <p:nvPr/>
+        </p:nvSpPr>
+        <p:spPr>
+          <a:xfrm>
+            <a:off x="3175000" y="3619500"/>
+            <a:ext cx="2857500" cy="1123950"/>
+          </a:xfrm>
+          <a:prstGeom prst="roundRect">
+            <a:avLst>
+              <a:gd name="adj" fmla="val 8000"/>
+            </a:avLst>
+          </a:prstGeom>
+          <a:solidFill>
+            <a:srgbClr val="F1F5F9"/>
+          </a:solidFill>
+          <a:ln>
+            <a:noFill/>
+          </a:ln>
+          <a:effectLst/>
+        </p:spPr>
+        <p:style>
+          <a:lnRef idx="1">
+            <a:schemeClr val="accent1"/>
+          </a:lnRef>
+          <a:fillRef idx="3">
+            <a:schemeClr val="accent1"/>
+          </a:fillRef>
+          <a:effectRef idx="2">
+            <a:schemeClr val="accent1"/>
+          </a:effectRef>
+          <a:fontRef idx="minor">
+            <a:schemeClr val="lt1"/>
+          </a:fontRef>
+        </p:style>
+        <p:txBody>
+          <a:bodyPr rtlCol="0" anchor="ctr"/>
+          <a:lstStyle/>
+          <a:p>
+            <a:pPr algn="ctr"/>
+          </a:p>
+        </p:txBody>
+      </p:sp>
+      <p:sp>
+        <p:nvSpPr>
+          <p:cNvPr id="13" name="Rectangle 12"/>
+          <p:cNvSpPr/>
+          <p:nvPr/>
+        </p:nvSpPr>
+        <p:spPr>
+          <a:xfrm>
+            <a:off x="3175000" y="3619500"/>
+            <a:ext cx="2857500" cy="38100"/>
+          </a:xfrm>
+          <a:prstGeom prst="rect">
+            <a:avLst/>
+          </a:prstGeom>
+          <a:solidFill>
+            <a:srgbClr val="14B8A6"/>
+          </a:solidFill>
+          <a:ln>
+            <a:noFill/>
+          </a:ln>
+          <a:effectLst/>
+        </p:spPr>
+        <p:style>
+          <a:lnRef idx="1">
+            <a:schemeClr val="accent1"/>
+          </a:lnRef>
+          <a:fillRef idx="3">
+            <a:schemeClr val="accent1"/>
+          </a:fillRef>
+          <a:effectRef idx="2">
+            <a:schemeClr val="accent1"/>
+          </a:effectRef>
+          <a:fontRef idx="minor">
+            <a:schemeClr val="lt1"/>
+          </a:fontRef>
+        </p:style>
+        <p:txBody>
+          <a:bodyPr rtlCol="0" anchor="ctr"/>
+          <a:lstStyle/>
+          <a:p>
+            <a:pPr algn="ctr"/>
+          </a:p>
+        </p:txBody>
+      </p:sp>
+      <p:sp>
+        <p:nvSpPr>
+          <p:cNvPr id="14" name="TextBox 13"/>
+          <p:cNvSpPr txBox="1"/>
+          <p:nvPr/>
+        </p:nvSpPr>
+        <p:spPr>
+          <a:xfrm>
+            <a:off x="3270250" y="3714750"/>
+            <a:ext cx="2667000" cy="285750"/>
+          </a:xfrm>
+          <a:prstGeom prst="rect">
+            <a:avLst/>
+          </a:prstGeom>
+          <a:noFill/>
+        </p:spPr>
+        <p:txBody>
+          <a:bodyPr wrap="square" anchor="ctr">
+            <a:spAutoFit/>
+          </a:bodyPr>
+          <a:lstStyle/>
+          <a:p>
+            <a:pPr algn="ctr">
+              <a:lnSpc>
+                <a:spcPct val="100000"/>
+              </a:lnSpc>
+            </a:pPr>
+            <a:r>
+              <a:rPr sz="1400" b="1">
+                <a:solidFill>
+                  <a:srgbClr val="14B8A6"/>
+                </a:solidFill>
+                <a:latin typeface="PingFang SC"/>
+              </a:rPr>
+              <a:t>评测</a:t>
+            </a:r>
+          </a:p>
+        </p:txBody>
+      </p:sp>
+      <p:sp>
+        <p:nvSpPr>
+          <p:cNvPr id="15" name="TextBox 14"/>
+          <p:cNvSpPr txBox="1"/>
+          <p:nvPr/>
+        </p:nvSpPr>
+        <p:spPr>
+          <a:xfrm>
+            <a:off x="3270250" y="4019550"/>
+            <a:ext cx="2667000" cy="666750"/>
+          </a:xfrm>
+          <a:prstGeom prst="rect">
+            <a:avLst/>
+          </a:prstGeom>
+          <a:noFill/>
+        </p:spPr>
+        <p:txBody>
+          <a:bodyPr wrap="square" anchor="ctr">
+            <a:spAutoFit/>
+          </a:bodyPr>
+          <a:lstStyle/>
+          <a:p>
+            <a:pPr algn="l">
+              <a:lnSpc>
+                <a:spcPct val="105000"/>
+              </a:lnSpc>
+            </a:pPr>
+            <a:r>
+              <a:rPr sz="1050" b="0">
+                <a:solidFill>
+                  <a:srgbClr val="475569"/>
+                </a:solidFill>
+                <a:latin typeface="PingFang SC"/>
+              </a:rPr>
+              <a:t>Golden 全量回归</a:t>
+            </a:r>
+          </a:p>
+        </p:txBody>
+      </p:sp>
+      <p:sp>
+        <p:nvSpPr>
+          <p:cNvPr id="16" name="Rounded Rectangle 15"/>
+          <p:cNvSpPr/>
+          <p:nvPr/>
+        </p:nvSpPr>
+        <p:spPr>
+          <a:xfrm>
+            <a:off x="7483475" y="3228975"/>
+            <a:ext cx="209550" cy="209550"/>
+          </a:xfrm>
+          <a:prstGeom prst="roundRect">
+            <a:avLst>
+              <a:gd name="adj" fmla="val 8000"/>
+            </a:avLst>
+          </a:prstGeom>
+          <a:solidFill>
+            <a:srgbClr val="8B5CF6"/>
+          </a:solidFill>
+          <a:ln>
+            <a:noFill/>
+          </a:ln>
+          <a:effectLst/>
+        </p:spPr>
+        <p:style>
+          <a:lnRef idx="1">
+            <a:schemeClr val="accent1"/>
+          </a:lnRef>
+          <a:fillRef idx="3">
+            <a:schemeClr val="accent1"/>
+          </a:fillRef>
+          <a:effectRef idx="2">
+            <a:schemeClr val="accent1"/>
+          </a:effectRef>
+          <a:fontRef idx="minor">
+            <a:schemeClr val="lt1"/>
+          </a:fontRef>
+        </p:style>
+        <p:txBody>
+          <a:bodyPr rtlCol="0" anchor="ctr"/>
+          <a:lstStyle/>
+          <a:p>
+            <a:pPr algn="ctr"/>
+          </a:p>
+        </p:txBody>
+      </p:sp>
+      <p:sp>
+        <p:nvSpPr>
+          <p:cNvPr id="17" name="Rounded Rectangle 16"/>
+          <p:cNvSpPr/>
+          <p:nvPr/>
+        </p:nvSpPr>
+        <p:spPr>
+          <a:xfrm>
+            <a:off x="6159500" y="1905000"/>
+            <a:ext cx="2857500" cy="1123950"/>
+          </a:xfrm>
+          <a:prstGeom prst="roundRect">
+            <a:avLst>
+              <a:gd name="adj" fmla="val 8000"/>
+            </a:avLst>
+          </a:prstGeom>
+          <a:solidFill>
+            <a:srgbClr val="F1F5F9"/>
+          </a:solidFill>
+          <a:ln>
+            <a:noFill/>
+          </a:ln>
+          <a:effectLst/>
+        </p:spPr>
+        <p:style>
+          <a:lnRef idx="1">
+            <a:schemeClr val="accent1"/>
+          </a:lnRef>
+          <a:fillRef idx="3">
+            <a:schemeClr val="accent1"/>
+          </a:fillRef>
+          <a:effectRef idx="2">
+            <a:schemeClr val="accent1"/>
+          </a:effectRef>
+          <a:fontRef idx="minor">
+            <a:schemeClr val="lt1"/>
+          </a:fontRef>
+        </p:style>
+        <p:txBody>
+          <a:bodyPr rtlCol="0" anchor="ctr"/>
+          <a:lstStyle/>
+          <a:p>
+            <a:pPr algn="ctr"/>
+          </a:p>
+        </p:txBody>
+      </p:sp>
+      <p:sp>
+        <p:nvSpPr>
+          <p:cNvPr id="18" name="Rectangle 17"/>
+          <p:cNvSpPr/>
+          <p:nvPr/>
+        </p:nvSpPr>
+        <p:spPr>
+          <a:xfrm>
+            <a:off x="6159500" y="1905000"/>
+            <a:ext cx="2857500" cy="38100"/>
+          </a:xfrm>
+          <a:prstGeom prst="rect">
+            <a:avLst/>
+          </a:prstGeom>
+          <a:solidFill>
+            <a:srgbClr val="8B5CF6"/>
+          </a:solidFill>
+          <a:ln>
+            <a:noFill/>
+          </a:ln>
+          <a:effectLst/>
+        </p:spPr>
+        <p:style>
+          <a:lnRef idx="1">
+            <a:schemeClr val="accent1"/>
+          </a:lnRef>
+          <a:fillRef idx="3">
+            <a:schemeClr val="accent1"/>
+          </a:fillRef>
+          <a:effectRef idx="2">
+            <a:schemeClr val="accent1"/>
+          </a:effectRef>
+          <a:fontRef idx="minor">
+            <a:schemeClr val="lt1"/>
+          </a:fontRef>
+        </p:style>
+        <p:txBody>
+          <a:bodyPr rtlCol="0" anchor="ctr"/>
+          <a:lstStyle/>
+          <a:p>
+            <a:pPr algn="ctr"/>
+          </a:p>
+        </p:txBody>
+      </p:sp>
+      <p:sp>
+        <p:nvSpPr>
+          <p:cNvPr id="19" name="TextBox 18"/>
+          <p:cNvSpPr txBox="1"/>
+          <p:nvPr/>
+        </p:nvSpPr>
+        <p:spPr>
+          <a:xfrm>
+            <a:off x="6254750" y="2000250"/>
+            <a:ext cx="2667000" cy="285750"/>
+          </a:xfrm>
+          <a:prstGeom prst="rect">
+            <a:avLst/>
+          </a:prstGeom>
+          <a:noFill/>
+        </p:spPr>
+        <p:txBody>
+          <a:bodyPr wrap="square" anchor="ctr">
+            <a:spAutoFit/>
+          </a:bodyPr>
+          <a:lstStyle/>
+          <a:p>
+            <a:pPr algn="ctr">
+              <a:lnSpc>
+                <a:spcPct val="100000"/>
+              </a:lnSpc>
+            </a:pPr>
+            <a:r>
+              <a:rPr sz="1400" b="1">
+                <a:solidFill>
+                  <a:srgbClr val="8B5CF6"/>
+                </a:solidFill>
+                <a:latin typeface="PingFang SC"/>
+              </a:rPr>
+              <a:t>灰度</a:t>
+            </a:r>
+          </a:p>
+        </p:txBody>
+      </p:sp>
+      <p:sp>
+        <p:nvSpPr>
+          <p:cNvPr id="20" name="TextBox 19"/>
+          <p:cNvSpPr txBox="1"/>
+          <p:nvPr/>
+        </p:nvSpPr>
+        <p:spPr>
+          <a:xfrm>
+            <a:off x="6254750" y="2305050"/>
+            <a:ext cx="2667000" cy="666750"/>
+          </a:xfrm>
+          <a:prstGeom prst="rect">
+            <a:avLst/>
+          </a:prstGeom>
+          <a:noFill/>
+        </p:spPr>
+        <p:txBody>
+          <a:bodyPr wrap="square" anchor="ctr">
+            <a:spAutoFit/>
+          </a:bodyPr>
+          <a:lstStyle/>
+          <a:p>
+            <a:pPr algn="l">
+              <a:lnSpc>
+                <a:spcPct val="105000"/>
+              </a:lnSpc>
+            </a:pPr>
+            <a:r>
+              <a:rPr sz="1050" b="0">
+                <a:solidFill>
+                  <a:srgbClr val="475569"/>
+                </a:solidFill>
+                <a:latin typeface="PingFang SC"/>
+              </a:rPr>
+              <a:t>10%→50%→100%</a:t>
+            </a:r>
+          </a:p>
+        </p:txBody>
+      </p:sp>
+      <p:sp>
+        <p:nvSpPr>
+          <p:cNvPr id="21" name="Rounded Rectangle 20"/>
+          <p:cNvSpPr/>
+          <p:nvPr/>
+        </p:nvSpPr>
+        <p:spPr>
+          <a:xfrm>
+            <a:off x="10467975" y="3228975"/>
+            <a:ext cx="209550" cy="209550"/>
+          </a:xfrm>
+          <a:prstGeom prst="roundRect">
+            <a:avLst>
+              <a:gd name="adj" fmla="val 8000"/>
+            </a:avLst>
+          </a:prstGeom>
+          <a:solidFill>
+            <a:srgbClr val="F59E0B"/>
+          </a:solidFill>
+          <a:ln>
+            <a:noFill/>
+          </a:ln>
+          <a:effectLst/>
+        </p:spPr>
+        <p:style>
+          <a:lnRef idx="1">
+            <a:schemeClr val="accent1"/>
+          </a:lnRef>
+          <a:fillRef idx="3">
+            <a:schemeClr val="accent1"/>
+          </a:fillRef>
+          <a:effectRef idx="2">
+            <a:schemeClr val="accent1"/>
+          </a:effectRef>
+          <a:fontRef idx="minor">
+            <a:schemeClr val="lt1"/>
+          </a:fontRef>
+        </p:style>
+        <p:txBody>
+          <a:bodyPr rtlCol="0" anchor="ctr"/>
+          <a:lstStyle/>
+          <a:p>
+            <a:pPr algn="ctr"/>
+          </a:p>
+        </p:txBody>
+      </p:sp>
+      <p:sp>
+        <p:nvSpPr>
+          <p:cNvPr id="22" name="Rounded Rectangle 21"/>
+          <p:cNvSpPr/>
+          <p:nvPr/>
+        </p:nvSpPr>
+        <p:spPr>
+          <a:xfrm>
+            <a:off x="9144000" y="3619500"/>
+            <a:ext cx="2857500" cy="1123950"/>
+          </a:xfrm>
+          <a:prstGeom prst="roundRect">
+            <a:avLst>
+              <a:gd name="adj" fmla="val 8000"/>
+            </a:avLst>
+          </a:prstGeom>
+          <a:solidFill>
+            <a:srgbClr val="F1F5F9"/>
+          </a:solidFill>
+          <a:ln>
+            <a:noFill/>
+          </a:ln>
+          <a:effectLst/>
+        </p:spPr>
+        <p:style>
+          <a:lnRef idx="1">
+            <a:schemeClr val="accent1"/>
+          </a:lnRef>
+          <a:fillRef idx="3">
+            <a:schemeClr val="accent1"/>
+          </a:fillRef>
+          <a:effectRef idx="2">
+            <a:schemeClr val="accent1"/>
+          </a:effectRef>
+          <a:fontRef idx="minor">
+            <a:schemeClr val="lt1"/>
+          </a:fontRef>
+        </p:style>
+        <p:txBody>
+          <a:bodyPr rtlCol="0" anchor="ctr"/>
+          <a:lstStyle/>
+          <a:p>
+            <a:pPr algn="ctr"/>
+          </a:p>
+        </p:txBody>
+      </p:sp>
+      <p:sp>
+        <p:nvSpPr>
+          <p:cNvPr id="23" name="Rectangle 22"/>
+          <p:cNvSpPr/>
+          <p:nvPr/>
+        </p:nvSpPr>
+        <p:spPr>
+          <a:xfrm>
+            <a:off x="9144000" y="3619500"/>
+            <a:ext cx="2857500" cy="38100"/>
+          </a:xfrm>
+          <a:prstGeom prst="rect">
+            <a:avLst/>
+          </a:prstGeom>
+          <a:solidFill>
+            <a:srgbClr val="F59E0B"/>
+          </a:solidFill>
+          <a:ln>
+            <a:noFill/>
+          </a:ln>
+          <a:effectLst/>
+        </p:spPr>
+        <p:style>
+          <a:lnRef idx="1">
+            <a:schemeClr val="accent1"/>
+          </a:lnRef>
+          <a:fillRef idx="3">
+            <a:schemeClr val="accent1"/>
+          </a:fillRef>
+          <a:effectRef idx="2">
+            <a:schemeClr val="accent1"/>
+          </a:effectRef>
+          <a:fontRef idx="minor">
+            <a:schemeClr val="lt1"/>
+          </a:fontRef>
+        </p:style>
+        <p:txBody>
+          <a:bodyPr rtlCol="0" anchor="ctr"/>
+          <a:lstStyle/>
+          <a:p>
+            <a:pPr algn="ctr"/>
+          </a:p>
+        </p:txBody>
+      </p:sp>
+      <p:sp>
+        <p:nvSpPr>
+          <p:cNvPr id="24" name="TextBox 23"/>
+          <p:cNvSpPr txBox="1"/>
+          <p:nvPr/>
+        </p:nvSpPr>
+        <p:spPr>
+          <a:xfrm>
+            <a:off x="9239250" y="3714750"/>
+            <a:ext cx="2667000" cy="285750"/>
+          </a:xfrm>
+          <a:prstGeom prst="rect">
+            <a:avLst/>
+          </a:prstGeom>
+          <a:noFill/>
+        </p:spPr>
+        <p:txBody>
+          <a:bodyPr wrap="square" anchor="ctr">
+            <a:spAutoFit/>
+          </a:bodyPr>
+          <a:lstStyle/>
+          <a:p>
+            <a:pPr algn="ctr">
+              <a:lnSpc>
+                <a:spcPct val="100000"/>
+              </a:lnSpc>
+            </a:pPr>
+            <a:r>
+              <a:rPr sz="1400" b="1">
+                <a:solidFill>
+                  <a:srgbClr val="F59E0B"/>
+                </a:solidFill>
+                <a:latin typeface="PingFang SC"/>
+              </a:rPr>
+              <a:t>观察</a:t>
+            </a:r>
+          </a:p>
+        </p:txBody>
+      </p:sp>
+      <p:sp>
+        <p:nvSpPr>
+          <p:cNvPr id="25" name="TextBox 24"/>
+          <p:cNvSpPr txBox="1"/>
+          <p:nvPr/>
+        </p:nvSpPr>
+        <p:spPr>
+          <a:xfrm>
+            <a:off x="9239250" y="4019550"/>
+            <a:ext cx="2667000" cy="666750"/>
+          </a:xfrm>
+          <a:prstGeom prst="rect">
+            <a:avLst/>
+          </a:prstGeom>
+          <a:noFill/>
+        </p:spPr>
+        <p:txBody>
+          <a:bodyPr wrap="square" anchor="ctr">
+            <a:spAutoFit/>
+          </a:bodyPr>
+          <a:lstStyle/>
+          <a:p>
+            <a:pPr algn="l">
+              <a:lnSpc>
+                <a:spcPct val="105000"/>
+              </a:lnSpc>
+            </a:pPr>
+            <a:r>
+              <a:rPr sz="1050" b="0">
+                <a:solidFill>
+                  <a:srgbClr val="475569"/>
+                </a:solidFill>
+                <a:latin typeface="PingFang SC"/>
+              </a:rPr>
+              <a:t>24h 指标窗口</a:t>
+            </a:r>
+          </a:p>
+        </p:txBody>
+      </p:sp>
+      <p:sp>
+        <p:nvSpPr>
+          <p:cNvPr id="26" name="TextBox 25"/>
+          <p:cNvSpPr txBox="1"/>
+          <p:nvPr/>
+        </p:nvSpPr>
+        <p:spPr>
+          <a:xfrm>
+            <a:off x="10287000" y="6534150"/>
+            <a:ext cx="1619250" cy="266700"/>
           </a:xfrm>
           <a:prstGeom prst="rect">
             <a:avLst/>
@@ -19735,945 +20596,6 @@
               </a:lnSpc>
             </a:pPr>
             <a:r>
-              <a:rPr sz="1100" b="0">
-                <a:solidFill>
-                  <a:srgbClr val="94A3B8"/>
-                </a:solidFill>
-                <a:latin typeface="PingFang SC"/>
-              </a:rPr>
-              <a:t>CI:测试+覆盖率+lint;评测:Golden 全量回归;灰度:10%→50%→100%;观察:24h 指标窗口|regressed 非空 → 阻断</a:t>
-            </a:r>
-          </a:p>
-        </p:txBody>
-      </p:sp>
-      <p:sp>
-        <p:nvSpPr>
-          <p:cNvPr id="6" name="Rectangle 5"/>
-          <p:cNvSpPr/>
-          <p:nvPr/>
-        </p:nvSpPr>
-        <p:spPr>
-          <a:xfrm>
-            <a:off x="1619250" y="3314700"/>
-            <a:ext cx="8953500" cy="38100"/>
-          </a:xfrm>
-          <a:prstGeom prst="rect">
-            <a:avLst/>
-          </a:prstGeom>
-          <a:solidFill>
-            <a:srgbClr val="DDE5EE"/>
-          </a:solidFill>
-          <a:ln>
-            <a:noFill/>
-          </a:ln>
-          <a:effectLst/>
-        </p:spPr>
-        <p:style>
-          <a:lnRef idx="1">
-            <a:schemeClr val="accent1"/>
-          </a:lnRef>
-          <a:fillRef idx="3">
-            <a:schemeClr val="accent1"/>
-          </a:fillRef>
-          <a:effectRef idx="2">
-            <a:schemeClr val="accent1"/>
-          </a:effectRef>
-          <a:fontRef idx="minor">
-            <a:schemeClr val="lt1"/>
-          </a:fontRef>
-        </p:style>
-        <p:txBody>
-          <a:bodyPr rtlCol="0" anchor="ctr"/>
-          <a:lstStyle/>
-          <a:p>
-            <a:pPr algn="ctr"/>
-          </a:p>
-        </p:txBody>
-      </p:sp>
-      <p:sp>
-        <p:nvSpPr>
-          <p:cNvPr id="7" name="Rounded Rectangle 6"/>
-          <p:cNvSpPr/>
-          <p:nvPr/>
-        </p:nvSpPr>
-        <p:spPr>
-          <a:xfrm>
-            <a:off x="1514475" y="3228975"/>
-            <a:ext cx="209550" cy="209550"/>
-          </a:xfrm>
-          <a:prstGeom prst="roundRect">
-            <a:avLst>
-              <a:gd name="adj" fmla="val 8000"/>
-            </a:avLst>
-          </a:prstGeom>
-          <a:solidFill>
-            <a:srgbClr val="2563EB"/>
-          </a:solidFill>
-          <a:ln>
-            <a:noFill/>
-          </a:ln>
-          <a:effectLst/>
-        </p:spPr>
-        <p:style>
-          <a:lnRef idx="1">
-            <a:schemeClr val="accent1"/>
-          </a:lnRef>
-          <a:fillRef idx="3">
-            <a:schemeClr val="accent1"/>
-          </a:fillRef>
-          <a:effectRef idx="2">
-            <a:schemeClr val="accent1"/>
-          </a:effectRef>
-          <a:fontRef idx="minor">
-            <a:schemeClr val="lt1"/>
-          </a:fontRef>
-        </p:style>
-        <p:txBody>
-          <a:bodyPr rtlCol="0" anchor="ctr"/>
-          <a:lstStyle/>
-          <a:p>
-            <a:pPr algn="ctr"/>
-          </a:p>
-        </p:txBody>
-      </p:sp>
-      <p:sp>
-        <p:nvSpPr>
-          <p:cNvPr id="8" name="Rounded Rectangle 7"/>
-          <p:cNvSpPr/>
-          <p:nvPr/>
-        </p:nvSpPr>
-        <p:spPr>
-          <a:xfrm>
-            <a:off x="190500" y="1905000"/>
-            <a:ext cx="2857500" cy="1123950"/>
-          </a:xfrm>
-          <a:prstGeom prst="roundRect">
-            <a:avLst>
-              <a:gd name="adj" fmla="val 8000"/>
-            </a:avLst>
-          </a:prstGeom>
-          <a:solidFill>
-            <a:srgbClr val="F1F5F9"/>
-          </a:solidFill>
-          <a:ln>
-            <a:noFill/>
-          </a:ln>
-          <a:effectLst/>
-        </p:spPr>
-        <p:style>
-          <a:lnRef idx="1">
-            <a:schemeClr val="accent1"/>
-          </a:lnRef>
-          <a:fillRef idx="3">
-            <a:schemeClr val="accent1"/>
-          </a:fillRef>
-          <a:effectRef idx="2">
-            <a:schemeClr val="accent1"/>
-          </a:effectRef>
-          <a:fontRef idx="minor">
-            <a:schemeClr val="lt1"/>
-          </a:fontRef>
-        </p:style>
-        <p:txBody>
-          <a:bodyPr rtlCol="0" anchor="ctr"/>
-          <a:lstStyle/>
-          <a:p>
-            <a:pPr algn="ctr"/>
-          </a:p>
-        </p:txBody>
-      </p:sp>
-      <p:sp>
-        <p:nvSpPr>
-          <p:cNvPr id="9" name="Rectangle 8"/>
-          <p:cNvSpPr/>
-          <p:nvPr/>
-        </p:nvSpPr>
-        <p:spPr>
-          <a:xfrm>
-            <a:off x="190500" y="1905000"/>
-            <a:ext cx="2857500" cy="38100"/>
-          </a:xfrm>
-          <a:prstGeom prst="rect">
-            <a:avLst/>
-          </a:prstGeom>
-          <a:solidFill>
-            <a:srgbClr val="2563EB"/>
-          </a:solidFill>
-          <a:ln>
-            <a:noFill/>
-          </a:ln>
-          <a:effectLst/>
-        </p:spPr>
-        <p:style>
-          <a:lnRef idx="1">
-            <a:schemeClr val="accent1"/>
-          </a:lnRef>
-          <a:fillRef idx="3">
-            <a:schemeClr val="accent1"/>
-          </a:fillRef>
-          <a:effectRef idx="2">
-            <a:schemeClr val="accent1"/>
-          </a:effectRef>
-          <a:fontRef idx="minor">
-            <a:schemeClr val="lt1"/>
-          </a:fontRef>
-        </p:style>
-        <p:txBody>
-          <a:bodyPr rtlCol="0" anchor="ctr"/>
-          <a:lstStyle/>
-          <a:p>
-            <a:pPr algn="ctr"/>
-          </a:p>
-        </p:txBody>
-      </p:sp>
-      <p:sp>
-        <p:nvSpPr>
-          <p:cNvPr id="10" name="TextBox 9"/>
-          <p:cNvSpPr txBox="1"/>
-          <p:nvPr/>
-        </p:nvSpPr>
-        <p:spPr>
-          <a:xfrm>
-            <a:off x="285750" y="2000250"/>
-            <a:ext cx="2667000" cy="285750"/>
-          </a:xfrm>
-          <a:prstGeom prst="rect">
-            <a:avLst/>
-          </a:prstGeom>
-          <a:noFill/>
-        </p:spPr>
-        <p:txBody>
-          <a:bodyPr wrap="square" anchor="ctr">
-            <a:spAutoFit/>
-          </a:bodyPr>
-          <a:lstStyle/>
-          <a:p>
-            <a:pPr algn="ctr">
-              <a:lnSpc>
-                <a:spcPct val="100000"/>
-              </a:lnSpc>
-            </a:pPr>
-            <a:r>
-              <a:rPr sz="1400" b="1">
-                <a:solidFill>
-                  <a:srgbClr val="2563EB"/>
-                </a:solidFill>
-                <a:latin typeface="PingFang SC"/>
-              </a:rPr>
-              <a:t>CI</a:t>
-            </a:r>
-          </a:p>
-        </p:txBody>
-      </p:sp>
-      <p:sp>
-        <p:nvSpPr>
-          <p:cNvPr id="11" name="TextBox 10"/>
-          <p:cNvSpPr txBox="1"/>
-          <p:nvPr/>
-        </p:nvSpPr>
-        <p:spPr>
-          <a:xfrm>
-            <a:off x="285750" y="2305050"/>
-            <a:ext cx="2667000" cy="666750"/>
-          </a:xfrm>
-          <a:prstGeom prst="rect">
-            <a:avLst/>
-          </a:prstGeom>
-          <a:noFill/>
-        </p:spPr>
-        <p:txBody>
-          <a:bodyPr wrap="square" anchor="ctr">
-            <a:spAutoFit/>
-          </a:bodyPr>
-          <a:lstStyle/>
-          <a:p>
-            <a:pPr algn="l">
-              <a:lnSpc>
-                <a:spcPct val="105000"/>
-              </a:lnSpc>
-            </a:pPr>
-            <a:r>
-              <a:rPr sz="1050" b="0">
-                <a:solidFill>
-                  <a:srgbClr val="475569"/>
-                </a:solidFill>
-                <a:latin typeface="PingFang SC"/>
-              </a:rPr>
-              <a:t>测试+覆盖率+lint</a:t>
-            </a:r>
-          </a:p>
-        </p:txBody>
-      </p:sp>
-      <p:sp>
-        <p:nvSpPr>
-          <p:cNvPr id="12" name="Rounded Rectangle 11"/>
-          <p:cNvSpPr/>
-          <p:nvPr/>
-        </p:nvSpPr>
-        <p:spPr>
-          <a:xfrm>
-            <a:off x="4498975" y="3228975"/>
-            <a:ext cx="209550" cy="209550"/>
-          </a:xfrm>
-          <a:prstGeom prst="roundRect">
-            <a:avLst>
-              <a:gd name="adj" fmla="val 8000"/>
-            </a:avLst>
-          </a:prstGeom>
-          <a:solidFill>
-            <a:srgbClr val="14B8A6"/>
-          </a:solidFill>
-          <a:ln>
-            <a:noFill/>
-          </a:ln>
-          <a:effectLst/>
-        </p:spPr>
-        <p:style>
-          <a:lnRef idx="1">
-            <a:schemeClr val="accent1"/>
-          </a:lnRef>
-          <a:fillRef idx="3">
-            <a:schemeClr val="accent1"/>
-          </a:fillRef>
-          <a:effectRef idx="2">
-            <a:schemeClr val="accent1"/>
-          </a:effectRef>
-          <a:fontRef idx="minor">
-            <a:schemeClr val="lt1"/>
-          </a:fontRef>
-        </p:style>
-        <p:txBody>
-          <a:bodyPr rtlCol="0" anchor="ctr"/>
-          <a:lstStyle/>
-          <a:p>
-            <a:pPr algn="ctr"/>
-          </a:p>
-        </p:txBody>
-      </p:sp>
-      <p:sp>
-        <p:nvSpPr>
-          <p:cNvPr id="13" name="Rounded Rectangle 12"/>
-          <p:cNvSpPr/>
-          <p:nvPr/>
-        </p:nvSpPr>
-        <p:spPr>
-          <a:xfrm>
-            <a:off x="3175000" y="3619500"/>
-            <a:ext cx="2857500" cy="1123950"/>
-          </a:xfrm>
-          <a:prstGeom prst="roundRect">
-            <a:avLst>
-              <a:gd name="adj" fmla="val 8000"/>
-            </a:avLst>
-          </a:prstGeom>
-          <a:solidFill>
-            <a:srgbClr val="F1F5F9"/>
-          </a:solidFill>
-          <a:ln>
-            <a:noFill/>
-          </a:ln>
-          <a:effectLst/>
-        </p:spPr>
-        <p:style>
-          <a:lnRef idx="1">
-            <a:schemeClr val="accent1"/>
-          </a:lnRef>
-          <a:fillRef idx="3">
-            <a:schemeClr val="accent1"/>
-          </a:fillRef>
-          <a:effectRef idx="2">
-            <a:schemeClr val="accent1"/>
-          </a:effectRef>
-          <a:fontRef idx="minor">
-            <a:schemeClr val="lt1"/>
-          </a:fontRef>
-        </p:style>
-        <p:txBody>
-          <a:bodyPr rtlCol="0" anchor="ctr"/>
-          <a:lstStyle/>
-          <a:p>
-            <a:pPr algn="ctr"/>
-          </a:p>
-        </p:txBody>
-      </p:sp>
-      <p:sp>
-        <p:nvSpPr>
-          <p:cNvPr id="14" name="Rectangle 13"/>
-          <p:cNvSpPr/>
-          <p:nvPr/>
-        </p:nvSpPr>
-        <p:spPr>
-          <a:xfrm>
-            <a:off x="3175000" y="3619500"/>
-            <a:ext cx="2857500" cy="38100"/>
-          </a:xfrm>
-          <a:prstGeom prst="rect">
-            <a:avLst/>
-          </a:prstGeom>
-          <a:solidFill>
-            <a:srgbClr val="14B8A6"/>
-          </a:solidFill>
-          <a:ln>
-            <a:noFill/>
-          </a:ln>
-          <a:effectLst/>
-        </p:spPr>
-        <p:style>
-          <a:lnRef idx="1">
-            <a:schemeClr val="accent1"/>
-          </a:lnRef>
-          <a:fillRef idx="3">
-            <a:schemeClr val="accent1"/>
-          </a:fillRef>
-          <a:effectRef idx="2">
-            <a:schemeClr val="accent1"/>
-          </a:effectRef>
-          <a:fontRef idx="minor">
-            <a:schemeClr val="lt1"/>
-          </a:fontRef>
-        </p:style>
-        <p:txBody>
-          <a:bodyPr rtlCol="0" anchor="ctr"/>
-          <a:lstStyle/>
-          <a:p>
-            <a:pPr algn="ctr"/>
-          </a:p>
-        </p:txBody>
-      </p:sp>
-      <p:sp>
-        <p:nvSpPr>
-          <p:cNvPr id="15" name="TextBox 14"/>
-          <p:cNvSpPr txBox="1"/>
-          <p:nvPr/>
-        </p:nvSpPr>
-        <p:spPr>
-          <a:xfrm>
-            <a:off x="3270250" y="3714750"/>
-            <a:ext cx="2667000" cy="285750"/>
-          </a:xfrm>
-          <a:prstGeom prst="rect">
-            <a:avLst/>
-          </a:prstGeom>
-          <a:noFill/>
-        </p:spPr>
-        <p:txBody>
-          <a:bodyPr wrap="square" anchor="ctr">
-            <a:spAutoFit/>
-          </a:bodyPr>
-          <a:lstStyle/>
-          <a:p>
-            <a:pPr algn="ctr">
-              <a:lnSpc>
-                <a:spcPct val="100000"/>
-              </a:lnSpc>
-            </a:pPr>
-            <a:r>
-              <a:rPr sz="1400" b="1">
-                <a:solidFill>
-                  <a:srgbClr val="14B8A6"/>
-                </a:solidFill>
-                <a:latin typeface="PingFang SC"/>
-              </a:rPr>
-              <a:t>评测</a:t>
-            </a:r>
-          </a:p>
-        </p:txBody>
-      </p:sp>
-      <p:sp>
-        <p:nvSpPr>
-          <p:cNvPr id="16" name="TextBox 15"/>
-          <p:cNvSpPr txBox="1"/>
-          <p:nvPr/>
-        </p:nvSpPr>
-        <p:spPr>
-          <a:xfrm>
-            <a:off x="3270250" y="4019550"/>
-            <a:ext cx="2667000" cy="666750"/>
-          </a:xfrm>
-          <a:prstGeom prst="rect">
-            <a:avLst/>
-          </a:prstGeom>
-          <a:noFill/>
-        </p:spPr>
-        <p:txBody>
-          <a:bodyPr wrap="square" anchor="ctr">
-            <a:spAutoFit/>
-          </a:bodyPr>
-          <a:lstStyle/>
-          <a:p>
-            <a:pPr algn="l">
-              <a:lnSpc>
-                <a:spcPct val="105000"/>
-              </a:lnSpc>
-            </a:pPr>
-            <a:r>
-              <a:rPr sz="1050" b="0">
-                <a:solidFill>
-                  <a:srgbClr val="475569"/>
-                </a:solidFill>
-                <a:latin typeface="PingFang SC"/>
-              </a:rPr>
-              <a:t>Golden 全量回归</a:t>
-            </a:r>
-          </a:p>
-        </p:txBody>
-      </p:sp>
-      <p:sp>
-        <p:nvSpPr>
-          <p:cNvPr id="17" name="Rounded Rectangle 16"/>
-          <p:cNvSpPr/>
-          <p:nvPr/>
-        </p:nvSpPr>
-        <p:spPr>
-          <a:xfrm>
-            <a:off x="7483475" y="3228975"/>
-            <a:ext cx="209550" cy="209550"/>
-          </a:xfrm>
-          <a:prstGeom prst="roundRect">
-            <a:avLst>
-              <a:gd name="adj" fmla="val 8000"/>
-            </a:avLst>
-          </a:prstGeom>
-          <a:solidFill>
-            <a:srgbClr val="8B5CF6"/>
-          </a:solidFill>
-          <a:ln>
-            <a:noFill/>
-          </a:ln>
-          <a:effectLst/>
-        </p:spPr>
-        <p:style>
-          <a:lnRef idx="1">
-            <a:schemeClr val="accent1"/>
-          </a:lnRef>
-          <a:fillRef idx="3">
-            <a:schemeClr val="accent1"/>
-          </a:fillRef>
-          <a:effectRef idx="2">
-            <a:schemeClr val="accent1"/>
-          </a:effectRef>
-          <a:fontRef idx="minor">
-            <a:schemeClr val="lt1"/>
-          </a:fontRef>
-        </p:style>
-        <p:txBody>
-          <a:bodyPr rtlCol="0" anchor="ctr"/>
-          <a:lstStyle/>
-          <a:p>
-            <a:pPr algn="ctr"/>
-          </a:p>
-        </p:txBody>
-      </p:sp>
-      <p:sp>
-        <p:nvSpPr>
-          <p:cNvPr id="18" name="Rounded Rectangle 17"/>
-          <p:cNvSpPr/>
-          <p:nvPr/>
-        </p:nvSpPr>
-        <p:spPr>
-          <a:xfrm>
-            <a:off x="6159500" y="1905000"/>
-            <a:ext cx="2857500" cy="1123950"/>
-          </a:xfrm>
-          <a:prstGeom prst="roundRect">
-            <a:avLst>
-              <a:gd name="adj" fmla="val 8000"/>
-            </a:avLst>
-          </a:prstGeom>
-          <a:solidFill>
-            <a:srgbClr val="F1F5F9"/>
-          </a:solidFill>
-          <a:ln>
-            <a:noFill/>
-          </a:ln>
-          <a:effectLst/>
-        </p:spPr>
-        <p:style>
-          <a:lnRef idx="1">
-            <a:schemeClr val="accent1"/>
-          </a:lnRef>
-          <a:fillRef idx="3">
-            <a:schemeClr val="accent1"/>
-          </a:fillRef>
-          <a:effectRef idx="2">
-            <a:schemeClr val="accent1"/>
-          </a:effectRef>
-          <a:fontRef idx="minor">
-            <a:schemeClr val="lt1"/>
-          </a:fontRef>
-        </p:style>
-        <p:txBody>
-          <a:bodyPr rtlCol="0" anchor="ctr"/>
-          <a:lstStyle/>
-          <a:p>
-            <a:pPr algn="ctr"/>
-          </a:p>
-        </p:txBody>
-      </p:sp>
-      <p:sp>
-        <p:nvSpPr>
-          <p:cNvPr id="19" name="Rectangle 18"/>
-          <p:cNvSpPr/>
-          <p:nvPr/>
-        </p:nvSpPr>
-        <p:spPr>
-          <a:xfrm>
-            <a:off x="6159500" y="1905000"/>
-            <a:ext cx="2857500" cy="38100"/>
-          </a:xfrm>
-          <a:prstGeom prst="rect">
-            <a:avLst/>
-          </a:prstGeom>
-          <a:solidFill>
-            <a:srgbClr val="8B5CF6"/>
-          </a:solidFill>
-          <a:ln>
-            <a:noFill/>
-          </a:ln>
-          <a:effectLst/>
-        </p:spPr>
-        <p:style>
-          <a:lnRef idx="1">
-            <a:schemeClr val="accent1"/>
-          </a:lnRef>
-          <a:fillRef idx="3">
-            <a:schemeClr val="accent1"/>
-          </a:fillRef>
-          <a:effectRef idx="2">
-            <a:schemeClr val="accent1"/>
-          </a:effectRef>
-          <a:fontRef idx="minor">
-            <a:schemeClr val="lt1"/>
-          </a:fontRef>
-        </p:style>
-        <p:txBody>
-          <a:bodyPr rtlCol="0" anchor="ctr"/>
-          <a:lstStyle/>
-          <a:p>
-            <a:pPr algn="ctr"/>
-          </a:p>
-        </p:txBody>
-      </p:sp>
-      <p:sp>
-        <p:nvSpPr>
-          <p:cNvPr id="20" name="TextBox 19"/>
-          <p:cNvSpPr txBox="1"/>
-          <p:nvPr/>
-        </p:nvSpPr>
-        <p:spPr>
-          <a:xfrm>
-            <a:off x="6254750" y="2000250"/>
-            <a:ext cx="2667000" cy="285750"/>
-          </a:xfrm>
-          <a:prstGeom prst="rect">
-            <a:avLst/>
-          </a:prstGeom>
-          <a:noFill/>
-        </p:spPr>
-        <p:txBody>
-          <a:bodyPr wrap="square" anchor="ctr">
-            <a:spAutoFit/>
-          </a:bodyPr>
-          <a:lstStyle/>
-          <a:p>
-            <a:pPr algn="ctr">
-              <a:lnSpc>
-                <a:spcPct val="100000"/>
-              </a:lnSpc>
-            </a:pPr>
-            <a:r>
-              <a:rPr sz="1400" b="1">
-                <a:solidFill>
-                  <a:srgbClr val="8B5CF6"/>
-                </a:solidFill>
-                <a:latin typeface="PingFang SC"/>
-              </a:rPr>
-              <a:t>灰度</a:t>
-            </a:r>
-          </a:p>
-        </p:txBody>
-      </p:sp>
-      <p:sp>
-        <p:nvSpPr>
-          <p:cNvPr id="21" name="TextBox 20"/>
-          <p:cNvSpPr txBox="1"/>
-          <p:nvPr/>
-        </p:nvSpPr>
-        <p:spPr>
-          <a:xfrm>
-            <a:off x="6254750" y="2305050"/>
-            <a:ext cx="2667000" cy="666750"/>
-          </a:xfrm>
-          <a:prstGeom prst="rect">
-            <a:avLst/>
-          </a:prstGeom>
-          <a:noFill/>
-        </p:spPr>
-        <p:txBody>
-          <a:bodyPr wrap="square" anchor="ctr">
-            <a:spAutoFit/>
-          </a:bodyPr>
-          <a:lstStyle/>
-          <a:p>
-            <a:pPr algn="l">
-              <a:lnSpc>
-                <a:spcPct val="105000"/>
-              </a:lnSpc>
-            </a:pPr>
-            <a:r>
-              <a:rPr sz="1050" b="0">
-                <a:solidFill>
-                  <a:srgbClr val="475569"/>
-                </a:solidFill>
-                <a:latin typeface="PingFang SC"/>
-              </a:rPr>
-              <a:t>10%→50%→100%</a:t>
-            </a:r>
-          </a:p>
-        </p:txBody>
-      </p:sp>
-      <p:sp>
-        <p:nvSpPr>
-          <p:cNvPr id="22" name="Rounded Rectangle 21"/>
-          <p:cNvSpPr/>
-          <p:nvPr/>
-        </p:nvSpPr>
-        <p:spPr>
-          <a:xfrm>
-            <a:off x="10467975" y="3228975"/>
-            <a:ext cx="209550" cy="209550"/>
-          </a:xfrm>
-          <a:prstGeom prst="roundRect">
-            <a:avLst>
-              <a:gd name="adj" fmla="val 8000"/>
-            </a:avLst>
-          </a:prstGeom>
-          <a:solidFill>
-            <a:srgbClr val="F59E0B"/>
-          </a:solidFill>
-          <a:ln>
-            <a:noFill/>
-          </a:ln>
-          <a:effectLst/>
-        </p:spPr>
-        <p:style>
-          <a:lnRef idx="1">
-            <a:schemeClr val="accent1"/>
-          </a:lnRef>
-          <a:fillRef idx="3">
-            <a:schemeClr val="accent1"/>
-          </a:fillRef>
-          <a:effectRef idx="2">
-            <a:schemeClr val="accent1"/>
-          </a:effectRef>
-          <a:fontRef idx="minor">
-            <a:schemeClr val="lt1"/>
-          </a:fontRef>
-        </p:style>
-        <p:txBody>
-          <a:bodyPr rtlCol="0" anchor="ctr"/>
-          <a:lstStyle/>
-          <a:p>
-            <a:pPr algn="ctr"/>
-          </a:p>
-        </p:txBody>
-      </p:sp>
-      <p:sp>
-        <p:nvSpPr>
-          <p:cNvPr id="23" name="Rounded Rectangle 22"/>
-          <p:cNvSpPr/>
-          <p:nvPr/>
-        </p:nvSpPr>
-        <p:spPr>
-          <a:xfrm>
-            <a:off x="9144000" y="3619500"/>
-            <a:ext cx="2857500" cy="1123950"/>
-          </a:xfrm>
-          <a:prstGeom prst="roundRect">
-            <a:avLst>
-              <a:gd name="adj" fmla="val 8000"/>
-            </a:avLst>
-          </a:prstGeom>
-          <a:solidFill>
-            <a:srgbClr val="F1F5F9"/>
-          </a:solidFill>
-          <a:ln>
-            <a:noFill/>
-          </a:ln>
-          <a:effectLst/>
-        </p:spPr>
-        <p:style>
-          <a:lnRef idx="1">
-            <a:schemeClr val="accent1"/>
-          </a:lnRef>
-          <a:fillRef idx="3">
-            <a:schemeClr val="accent1"/>
-          </a:fillRef>
-          <a:effectRef idx="2">
-            <a:schemeClr val="accent1"/>
-          </a:effectRef>
-          <a:fontRef idx="minor">
-            <a:schemeClr val="lt1"/>
-          </a:fontRef>
-        </p:style>
-        <p:txBody>
-          <a:bodyPr rtlCol="0" anchor="ctr"/>
-          <a:lstStyle/>
-          <a:p>
-            <a:pPr algn="ctr"/>
-          </a:p>
-        </p:txBody>
-      </p:sp>
-      <p:sp>
-        <p:nvSpPr>
-          <p:cNvPr id="24" name="Rectangle 23"/>
-          <p:cNvSpPr/>
-          <p:nvPr/>
-        </p:nvSpPr>
-        <p:spPr>
-          <a:xfrm>
-            <a:off x="9144000" y="3619500"/>
-            <a:ext cx="2857500" cy="38100"/>
-          </a:xfrm>
-          <a:prstGeom prst="rect">
-            <a:avLst/>
-          </a:prstGeom>
-          <a:solidFill>
-            <a:srgbClr val="F59E0B"/>
-          </a:solidFill>
-          <a:ln>
-            <a:noFill/>
-          </a:ln>
-          <a:effectLst/>
-        </p:spPr>
-        <p:style>
-          <a:lnRef idx="1">
-            <a:schemeClr val="accent1"/>
-          </a:lnRef>
-          <a:fillRef idx="3">
-            <a:schemeClr val="accent1"/>
-          </a:fillRef>
-          <a:effectRef idx="2">
-            <a:schemeClr val="accent1"/>
-          </a:effectRef>
-          <a:fontRef idx="minor">
-            <a:schemeClr val="lt1"/>
-          </a:fontRef>
-        </p:style>
-        <p:txBody>
-          <a:bodyPr rtlCol="0" anchor="ctr"/>
-          <a:lstStyle/>
-          <a:p>
-            <a:pPr algn="ctr"/>
-          </a:p>
-        </p:txBody>
-      </p:sp>
-      <p:sp>
-        <p:nvSpPr>
-          <p:cNvPr id="25" name="TextBox 24"/>
-          <p:cNvSpPr txBox="1"/>
-          <p:nvPr/>
-        </p:nvSpPr>
-        <p:spPr>
-          <a:xfrm>
-            <a:off x="9239250" y="3714750"/>
-            <a:ext cx="2667000" cy="285750"/>
-          </a:xfrm>
-          <a:prstGeom prst="rect">
-            <a:avLst/>
-          </a:prstGeom>
-          <a:noFill/>
-        </p:spPr>
-        <p:txBody>
-          <a:bodyPr wrap="square" anchor="ctr">
-            <a:spAutoFit/>
-          </a:bodyPr>
-          <a:lstStyle/>
-          <a:p>
-            <a:pPr algn="ctr">
-              <a:lnSpc>
-                <a:spcPct val="100000"/>
-              </a:lnSpc>
-            </a:pPr>
-            <a:r>
-              <a:rPr sz="1400" b="1">
-                <a:solidFill>
-                  <a:srgbClr val="F59E0B"/>
-                </a:solidFill>
-                <a:latin typeface="PingFang SC"/>
-              </a:rPr>
-              <a:t>观察</a:t>
-            </a:r>
-          </a:p>
-        </p:txBody>
-      </p:sp>
-      <p:sp>
-        <p:nvSpPr>
-          <p:cNvPr id="26" name="TextBox 25"/>
-          <p:cNvSpPr txBox="1"/>
-          <p:nvPr/>
-        </p:nvSpPr>
-        <p:spPr>
-          <a:xfrm>
-            <a:off x="9239250" y="4019550"/>
-            <a:ext cx="2667000" cy="666750"/>
-          </a:xfrm>
-          <a:prstGeom prst="rect">
-            <a:avLst/>
-          </a:prstGeom>
-          <a:noFill/>
-        </p:spPr>
-        <p:txBody>
-          <a:bodyPr wrap="square" anchor="ctr">
-            <a:spAutoFit/>
-          </a:bodyPr>
-          <a:lstStyle/>
-          <a:p>
-            <a:pPr algn="l">
-              <a:lnSpc>
-                <a:spcPct val="105000"/>
-              </a:lnSpc>
-            </a:pPr>
-            <a:r>
-              <a:rPr sz="1050" b="0">
-                <a:solidFill>
-                  <a:srgbClr val="475569"/>
-                </a:solidFill>
-                <a:latin typeface="PingFang SC"/>
-              </a:rPr>
-              <a:t>24h 指标窗口|regressed 非空 → 阻断</a:t>
-            </a:r>
-          </a:p>
-        </p:txBody>
-      </p:sp>
-      <p:sp>
-        <p:nvSpPr>
-          <p:cNvPr id="27" name="TextBox 26"/>
-          <p:cNvSpPr txBox="1"/>
-          <p:nvPr/>
-        </p:nvSpPr>
-        <p:spPr>
-          <a:xfrm>
-            <a:off x="10287000" y="6534150"/>
-            <a:ext cx="1619250" cy="266700"/>
-          </a:xfrm>
-          <a:prstGeom prst="rect">
-            <a:avLst/>
-          </a:prstGeom>
-          <a:noFill/>
-        </p:spPr>
-        <p:txBody>
-          <a:bodyPr wrap="square" anchor="ctr">
-            <a:spAutoFit/>
-          </a:bodyPr>
-          <a:lstStyle/>
-          <a:p>
-            <a:pPr algn="r">
-              <a:lnSpc>
-                <a:spcPct val="100000"/>
-              </a:lnSpc>
-            </a:pPr>
-            <a:r>
               <a:rPr sz="900" b="0">
                 <a:solidFill>
                   <a:srgbClr val="94A3B8"/>
@@ -20687,7 +20609,7 @@
       </p:sp>
       <p:sp>
         <p:nvSpPr>
-          <p:cNvPr id="28" name="TextBox 27"/>
+          <p:cNvPr id="27" name="TextBox 26"/>
           <p:cNvSpPr txBox="1"/>
           <p:nvPr/>
         </p:nvSpPr>
@@ -22082,14 +22004,1128 @@
       </p:sp>
       <p:sp>
         <p:nvSpPr>
-          <p:cNvPr id="5" name="TextBox 4"/>
+          <p:cNvPr id="5" name="Rectangle 4"/>
+          <p:cNvSpPr/>
+          <p:nvPr/>
+        </p:nvSpPr>
+        <p:spPr>
+          <a:xfrm>
+            <a:off x="1619250" y="3314700"/>
+            <a:ext cx="8953500" cy="38100"/>
+          </a:xfrm>
+          <a:prstGeom prst="rect">
+            <a:avLst/>
+          </a:prstGeom>
+          <a:solidFill>
+            <a:srgbClr val="DDE5EE"/>
+          </a:solidFill>
+          <a:ln>
+            <a:noFill/>
+          </a:ln>
+          <a:effectLst/>
+        </p:spPr>
+        <p:style>
+          <a:lnRef idx="1">
+            <a:schemeClr val="accent1"/>
+          </a:lnRef>
+          <a:fillRef idx="3">
+            <a:schemeClr val="accent1"/>
+          </a:fillRef>
+          <a:effectRef idx="2">
+            <a:schemeClr val="accent1"/>
+          </a:effectRef>
+          <a:fontRef idx="minor">
+            <a:schemeClr val="lt1"/>
+          </a:fontRef>
+        </p:style>
+        <p:txBody>
+          <a:bodyPr rtlCol="0" anchor="ctr"/>
+          <a:lstStyle/>
+          <a:p>
+            <a:pPr algn="ctr"/>
+          </a:p>
+        </p:txBody>
+      </p:sp>
+      <p:sp>
+        <p:nvSpPr>
+          <p:cNvPr id="6" name="Rounded Rectangle 5"/>
+          <p:cNvSpPr/>
+          <p:nvPr/>
+        </p:nvSpPr>
+        <p:spPr>
+          <a:xfrm>
+            <a:off x="1514475" y="3228975"/>
+            <a:ext cx="209550" cy="209550"/>
+          </a:xfrm>
+          <a:prstGeom prst="roundRect">
+            <a:avLst>
+              <a:gd name="adj" fmla="val 8000"/>
+            </a:avLst>
+          </a:prstGeom>
+          <a:solidFill>
+            <a:srgbClr val="2563EB"/>
+          </a:solidFill>
+          <a:ln>
+            <a:noFill/>
+          </a:ln>
+          <a:effectLst/>
+        </p:spPr>
+        <p:style>
+          <a:lnRef idx="1">
+            <a:schemeClr val="accent1"/>
+          </a:lnRef>
+          <a:fillRef idx="3">
+            <a:schemeClr val="accent1"/>
+          </a:fillRef>
+          <a:effectRef idx="2">
+            <a:schemeClr val="accent1"/>
+          </a:effectRef>
+          <a:fontRef idx="minor">
+            <a:schemeClr val="lt1"/>
+          </a:fontRef>
+        </p:style>
+        <p:txBody>
+          <a:bodyPr rtlCol="0" anchor="ctr"/>
+          <a:lstStyle/>
+          <a:p>
+            <a:pPr algn="ctr"/>
+          </a:p>
+        </p:txBody>
+      </p:sp>
+      <p:sp>
+        <p:nvSpPr>
+          <p:cNvPr id="7" name="Rounded Rectangle 6"/>
+          <p:cNvSpPr/>
+          <p:nvPr/>
+        </p:nvSpPr>
+        <p:spPr>
+          <a:xfrm>
+            <a:off x="190500" y="1905000"/>
+            <a:ext cx="2857500" cy="1123950"/>
+          </a:xfrm>
+          <a:prstGeom prst="roundRect">
+            <a:avLst>
+              <a:gd name="adj" fmla="val 8000"/>
+            </a:avLst>
+          </a:prstGeom>
+          <a:solidFill>
+            <a:srgbClr val="F1F5F9"/>
+          </a:solidFill>
+          <a:ln>
+            <a:noFill/>
+          </a:ln>
+          <a:effectLst/>
+        </p:spPr>
+        <p:style>
+          <a:lnRef idx="1">
+            <a:schemeClr val="accent1"/>
+          </a:lnRef>
+          <a:fillRef idx="3">
+            <a:schemeClr val="accent1"/>
+          </a:fillRef>
+          <a:effectRef idx="2">
+            <a:schemeClr val="accent1"/>
+          </a:effectRef>
+          <a:fontRef idx="minor">
+            <a:schemeClr val="lt1"/>
+          </a:fontRef>
+        </p:style>
+        <p:txBody>
+          <a:bodyPr rtlCol="0" anchor="ctr"/>
+          <a:lstStyle/>
+          <a:p>
+            <a:pPr algn="ctr"/>
+          </a:p>
+        </p:txBody>
+      </p:sp>
+      <p:sp>
+        <p:nvSpPr>
+          <p:cNvPr id="8" name="Rectangle 7"/>
+          <p:cNvSpPr/>
+          <p:nvPr/>
+        </p:nvSpPr>
+        <p:spPr>
+          <a:xfrm>
+            <a:off x="190500" y="1905000"/>
+            <a:ext cx="2857500" cy="38100"/>
+          </a:xfrm>
+          <a:prstGeom prst="rect">
+            <a:avLst/>
+          </a:prstGeom>
+          <a:solidFill>
+            <a:srgbClr val="2563EB"/>
+          </a:solidFill>
+          <a:ln>
+            <a:noFill/>
+          </a:ln>
+          <a:effectLst/>
+        </p:spPr>
+        <p:style>
+          <a:lnRef idx="1">
+            <a:schemeClr val="accent1"/>
+          </a:lnRef>
+          <a:fillRef idx="3">
+            <a:schemeClr val="accent1"/>
+          </a:fillRef>
+          <a:effectRef idx="2">
+            <a:schemeClr val="accent1"/>
+          </a:effectRef>
+          <a:fontRef idx="minor">
+            <a:schemeClr val="lt1"/>
+          </a:fontRef>
+        </p:style>
+        <p:txBody>
+          <a:bodyPr rtlCol="0" anchor="ctr"/>
+          <a:lstStyle/>
+          <a:p>
+            <a:pPr algn="ctr"/>
+          </a:p>
+        </p:txBody>
+      </p:sp>
+      <p:sp>
+        <p:nvSpPr>
+          <p:cNvPr id="9" name="TextBox 8"/>
           <p:cNvSpPr txBox="1"/>
           <p:nvPr/>
         </p:nvSpPr>
         <p:spPr>
           <a:xfrm>
-            <a:off x="9334500" y="0"/>
-            <a:ext cx="2667000" cy="704850"/>
+            <a:off x="285750" y="2000250"/>
+            <a:ext cx="2667000" cy="285750"/>
+          </a:xfrm>
+          <a:prstGeom prst="rect">
+            <a:avLst/>
+          </a:prstGeom>
+          <a:noFill/>
+        </p:spPr>
+        <p:txBody>
+          <a:bodyPr wrap="square" anchor="ctr">
+            <a:spAutoFit/>
+          </a:bodyPr>
+          <a:lstStyle/>
+          <a:p>
+            <a:pPr algn="ctr">
+              <a:lnSpc>
+                <a:spcPct val="100000"/>
+              </a:lnSpc>
+            </a:pPr>
+            <a:r>
+              <a:rPr sz="1400" b="1">
+                <a:solidFill>
+                  <a:srgbClr val="2563EB"/>
+                </a:solidFill>
+                <a:latin typeface="PingFang SC"/>
+              </a:rPr>
+              <a:t>改动</a:t>
+            </a:r>
+          </a:p>
+        </p:txBody>
+      </p:sp>
+      <p:sp>
+        <p:nvSpPr>
+          <p:cNvPr id="10" name="TextBox 9"/>
+          <p:cNvSpPr txBox="1"/>
+          <p:nvPr/>
+        </p:nvSpPr>
+        <p:spPr>
+          <a:xfrm>
+            <a:off x="285750" y="2305050"/>
+            <a:ext cx="2667000" cy="666750"/>
+          </a:xfrm>
+          <a:prstGeom prst="rect">
+            <a:avLst/>
+          </a:prstGeom>
+          <a:noFill/>
+        </p:spPr>
+        <p:txBody>
+          <a:bodyPr wrap="square" anchor="ctr">
+            <a:spAutoFit/>
+          </a:bodyPr>
+          <a:lstStyle/>
+          <a:p>
+            <a:pPr algn="l">
+              <a:lnSpc>
+                <a:spcPct val="105000"/>
+              </a:lnSpc>
+            </a:pPr>
+            <a:r>
+              <a:rPr sz="1050" b="0">
+                <a:solidFill>
+                  <a:srgbClr val="475569"/>
+                </a:solidFill>
+                <a:latin typeface="PingFang SC"/>
+              </a:rPr>
+              <a:t>PR+变更说明</a:t>
+            </a:r>
+          </a:p>
+        </p:txBody>
+      </p:sp>
+      <p:sp>
+        <p:nvSpPr>
+          <p:cNvPr id="11" name="Rounded Rectangle 10"/>
+          <p:cNvSpPr/>
+          <p:nvPr/>
+        </p:nvSpPr>
+        <p:spPr>
+          <a:xfrm>
+            <a:off x="3752850" y="3228975"/>
+            <a:ext cx="209550" cy="209550"/>
+          </a:xfrm>
+          <a:prstGeom prst="roundRect">
+            <a:avLst>
+              <a:gd name="adj" fmla="val 8000"/>
+            </a:avLst>
+          </a:prstGeom>
+          <a:solidFill>
+            <a:srgbClr val="14B8A6"/>
+          </a:solidFill>
+          <a:ln>
+            <a:noFill/>
+          </a:ln>
+          <a:effectLst/>
+        </p:spPr>
+        <p:style>
+          <a:lnRef idx="1">
+            <a:schemeClr val="accent1"/>
+          </a:lnRef>
+          <a:fillRef idx="3">
+            <a:schemeClr val="accent1"/>
+          </a:fillRef>
+          <a:effectRef idx="2">
+            <a:schemeClr val="accent1"/>
+          </a:effectRef>
+          <a:fontRef idx="minor">
+            <a:schemeClr val="lt1"/>
+          </a:fontRef>
+        </p:style>
+        <p:txBody>
+          <a:bodyPr rtlCol="0" anchor="ctr"/>
+          <a:lstStyle/>
+          <a:p>
+            <a:pPr algn="ctr"/>
+          </a:p>
+        </p:txBody>
+      </p:sp>
+      <p:sp>
+        <p:nvSpPr>
+          <p:cNvPr id="12" name="Rounded Rectangle 11"/>
+          <p:cNvSpPr/>
+          <p:nvPr/>
+        </p:nvSpPr>
+        <p:spPr>
+          <a:xfrm>
+            <a:off x="2428875" y="3619500"/>
+            <a:ext cx="2857500" cy="1123950"/>
+          </a:xfrm>
+          <a:prstGeom prst="roundRect">
+            <a:avLst>
+              <a:gd name="adj" fmla="val 8000"/>
+            </a:avLst>
+          </a:prstGeom>
+          <a:solidFill>
+            <a:srgbClr val="F1F5F9"/>
+          </a:solidFill>
+          <a:ln>
+            <a:noFill/>
+          </a:ln>
+          <a:effectLst/>
+        </p:spPr>
+        <p:style>
+          <a:lnRef idx="1">
+            <a:schemeClr val="accent1"/>
+          </a:lnRef>
+          <a:fillRef idx="3">
+            <a:schemeClr val="accent1"/>
+          </a:fillRef>
+          <a:effectRef idx="2">
+            <a:schemeClr val="accent1"/>
+          </a:effectRef>
+          <a:fontRef idx="minor">
+            <a:schemeClr val="lt1"/>
+          </a:fontRef>
+        </p:style>
+        <p:txBody>
+          <a:bodyPr rtlCol="0" anchor="ctr"/>
+          <a:lstStyle/>
+          <a:p>
+            <a:pPr algn="ctr"/>
+          </a:p>
+        </p:txBody>
+      </p:sp>
+      <p:sp>
+        <p:nvSpPr>
+          <p:cNvPr id="13" name="Rectangle 12"/>
+          <p:cNvSpPr/>
+          <p:nvPr/>
+        </p:nvSpPr>
+        <p:spPr>
+          <a:xfrm>
+            <a:off x="2428875" y="3619500"/>
+            <a:ext cx="2857500" cy="38100"/>
+          </a:xfrm>
+          <a:prstGeom prst="rect">
+            <a:avLst/>
+          </a:prstGeom>
+          <a:solidFill>
+            <a:srgbClr val="14B8A6"/>
+          </a:solidFill>
+          <a:ln>
+            <a:noFill/>
+          </a:ln>
+          <a:effectLst/>
+        </p:spPr>
+        <p:style>
+          <a:lnRef idx="1">
+            <a:schemeClr val="accent1"/>
+          </a:lnRef>
+          <a:fillRef idx="3">
+            <a:schemeClr val="accent1"/>
+          </a:fillRef>
+          <a:effectRef idx="2">
+            <a:schemeClr val="accent1"/>
+          </a:effectRef>
+          <a:fontRef idx="minor">
+            <a:schemeClr val="lt1"/>
+          </a:fontRef>
+        </p:style>
+        <p:txBody>
+          <a:bodyPr rtlCol="0" anchor="ctr"/>
+          <a:lstStyle/>
+          <a:p>
+            <a:pPr algn="ctr"/>
+          </a:p>
+        </p:txBody>
+      </p:sp>
+      <p:sp>
+        <p:nvSpPr>
+          <p:cNvPr id="14" name="TextBox 13"/>
+          <p:cNvSpPr txBox="1"/>
+          <p:nvPr/>
+        </p:nvSpPr>
+        <p:spPr>
+          <a:xfrm>
+            <a:off x="2524125" y="3714750"/>
+            <a:ext cx="2667000" cy="285750"/>
+          </a:xfrm>
+          <a:prstGeom prst="rect">
+            <a:avLst/>
+          </a:prstGeom>
+          <a:noFill/>
+        </p:spPr>
+        <p:txBody>
+          <a:bodyPr wrap="square" anchor="ctr">
+            <a:spAutoFit/>
+          </a:bodyPr>
+          <a:lstStyle/>
+          <a:p>
+            <a:pPr algn="ctr">
+              <a:lnSpc>
+                <a:spcPct val="100000"/>
+              </a:lnSpc>
+            </a:pPr>
+            <a:r>
+              <a:rPr sz="1400" b="1">
+                <a:solidFill>
+                  <a:srgbClr val="14B8A6"/>
+                </a:solidFill>
+                <a:latin typeface="PingFang SC"/>
+              </a:rPr>
+              <a:t>评测</a:t>
+            </a:r>
+          </a:p>
+        </p:txBody>
+      </p:sp>
+      <p:sp>
+        <p:nvSpPr>
+          <p:cNvPr id="15" name="TextBox 14"/>
+          <p:cNvSpPr txBox="1"/>
+          <p:nvPr/>
+        </p:nvSpPr>
+        <p:spPr>
+          <a:xfrm>
+            <a:off x="2524125" y="4019550"/>
+            <a:ext cx="2667000" cy="666750"/>
+          </a:xfrm>
+          <a:prstGeom prst="rect">
+            <a:avLst/>
+          </a:prstGeom>
+          <a:noFill/>
+        </p:spPr>
+        <p:txBody>
+          <a:bodyPr wrap="square" anchor="ctr">
+            <a:spAutoFit/>
+          </a:bodyPr>
+          <a:lstStyle/>
+          <a:p>
+            <a:pPr algn="l">
+              <a:lnSpc>
+                <a:spcPct val="105000"/>
+              </a:lnSpc>
+            </a:pPr>
+            <a:r>
+              <a:rPr sz="1050" b="0">
+                <a:solidFill>
+                  <a:srgbClr val="475569"/>
+                </a:solidFill>
+                <a:latin typeface="PingFang SC"/>
+              </a:rPr>
+              <a:t>Golden 全量回归</a:t>
+            </a:r>
+          </a:p>
+        </p:txBody>
+      </p:sp>
+      <p:sp>
+        <p:nvSpPr>
+          <p:cNvPr id="16" name="Rounded Rectangle 15"/>
+          <p:cNvSpPr/>
+          <p:nvPr/>
+        </p:nvSpPr>
+        <p:spPr>
+          <a:xfrm>
+            <a:off x="5991225" y="3228975"/>
+            <a:ext cx="209550" cy="209550"/>
+          </a:xfrm>
+          <a:prstGeom prst="roundRect">
+            <a:avLst>
+              <a:gd name="adj" fmla="val 8000"/>
+            </a:avLst>
+          </a:prstGeom>
+          <a:solidFill>
+            <a:srgbClr val="8B5CF6"/>
+          </a:solidFill>
+          <a:ln>
+            <a:noFill/>
+          </a:ln>
+          <a:effectLst/>
+        </p:spPr>
+        <p:style>
+          <a:lnRef idx="1">
+            <a:schemeClr val="accent1"/>
+          </a:lnRef>
+          <a:fillRef idx="3">
+            <a:schemeClr val="accent1"/>
+          </a:fillRef>
+          <a:effectRef idx="2">
+            <a:schemeClr val="accent1"/>
+          </a:effectRef>
+          <a:fontRef idx="minor">
+            <a:schemeClr val="lt1"/>
+          </a:fontRef>
+        </p:style>
+        <p:txBody>
+          <a:bodyPr rtlCol="0" anchor="ctr"/>
+          <a:lstStyle/>
+          <a:p>
+            <a:pPr algn="ctr"/>
+          </a:p>
+        </p:txBody>
+      </p:sp>
+      <p:sp>
+        <p:nvSpPr>
+          <p:cNvPr id="17" name="Rounded Rectangle 16"/>
+          <p:cNvSpPr/>
+          <p:nvPr/>
+        </p:nvSpPr>
+        <p:spPr>
+          <a:xfrm>
+            <a:off x="4667250" y="1905000"/>
+            <a:ext cx="2857500" cy="1123950"/>
+          </a:xfrm>
+          <a:prstGeom prst="roundRect">
+            <a:avLst>
+              <a:gd name="adj" fmla="val 8000"/>
+            </a:avLst>
+          </a:prstGeom>
+          <a:solidFill>
+            <a:srgbClr val="F1F5F9"/>
+          </a:solidFill>
+          <a:ln>
+            <a:noFill/>
+          </a:ln>
+          <a:effectLst/>
+        </p:spPr>
+        <p:style>
+          <a:lnRef idx="1">
+            <a:schemeClr val="accent1"/>
+          </a:lnRef>
+          <a:fillRef idx="3">
+            <a:schemeClr val="accent1"/>
+          </a:fillRef>
+          <a:effectRef idx="2">
+            <a:schemeClr val="accent1"/>
+          </a:effectRef>
+          <a:fontRef idx="minor">
+            <a:schemeClr val="lt1"/>
+          </a:fontRef>
+        </p:style>
+        <p:txBody>
+          <a:bodyPr rtlCol="0" anchor="ctr"/>
+          <a:lstStyle/>
+          <a:p>
+            <a:pPr algn="ctr"/>
+          </a:p>
+        </p:txBody>
+      </p:sp>
+      <p:sp>
+        <p:nvSpPr>
+          <p:cNvPr id="18" name="Rectangle 17"/>
+          <p:cNvSpPr/>
+          <p:nvPr/>
+        </p:nvSpPr>
+        <p:spPr>
+          <a:xfrm>
+            <a:off x="4667250" y="1905000"/>
+            <a:ext cx="2857500" cy="38100"/>
+          </a:xfrm>
+          <a:prstGeom prst="rect">
+            <a:avLst/>
+          </a:prstGeom>
+          <a:solidFill>
+            <a:srgbClr val="8B5CF6"/>
+          </a:solidFill>
+          <a:ln>
+            <a:noFill/>
+          </a:ln>
+          <a:effectLst/>
+        </p:spPr>
+        <p:style>
+          <a:lnRef idx="1">
+            <a:schemeClr val="accent1"/>
+          </a:lnRef>
+          <a:fillRef idx="3">
+            <a:schemeClr val="accent1"/>
+          </a:fillRef>
+          <a:effectRef idx="2">
+            <a:schemeClr val="accent1"/>
+          </a:effectRef>
+          <a:fontRef idx="minor">
+            <a:schemeClr val="lt1"/>
+          </a:fontRef>
+        </p:style>
+        <p:txBody>
+          <a:bodyPr rtlCol="0" anchor="ctr"/>
+          <a:lstStyle/>
+          <a:p>
+            <a:pPr algn="ctr"/>
+          </a:p>
+        </p:txBody>
+      </p:sp>
+      <p:sp>
+        <p:nvSpPr>
+          <p:cNvPr id="19" name="TextBox 18"/>
+          <p:cNvSpPr txBox="1"/>
+          <p:nvPr/>
+        </p:nvSpPr>
+        <p:spPr>
+          <a:xfrm>
+            <a:off x="4762500" y="2000250"/>
+            <a:ext cx="2667000" cy="285750"/>
+          </a:xfrm>
+          <a:prstGeom prst="rect">
+            <a:avLst/>
+          </a:prstGeom>
+          <a:noFill/>
+        </p:spPr>
+        <p:txBody>
+          <a:bodyPr wrap="square" anchor="ctr">
+            <a:spAutoFit/>
+          </a:bodyPr>
+          <a:lstStyle/>
+          <a:p>
+            <a:pPr algn="ctr">
+              <a:lnSpc>
+                <a:spcPct val="100000"/>
+              </a:lnSpc>
+            </a:pPr>
+            <a:r>
+              <a:rPr sz="1400" b="1">
+                <a:solidFill>
+                  <a:srgbClr val="8B5CF6"/>
+                </a:solidFill>
+                <a:latin typeface="PingFang SC"/>
+              </a:rPr>
+              <a:t>灰度</a:t>
+            </a:r>
+          </a:p>
+        </p:txBody>
+      </p:sp>
+      <p:sp>
+        <p:nvSpPr>
+          <p:cNvPr id="20" name="TextBox 19"/>
+          <p:cNvSpPr txBox="1"/>
+          <p:nvPr/>
+        </p:nvSpPr>
+        <p:spPr>
+          <a:xfrm>
+            <a:off x="4762500" y="2305050"/>
+            <a:ext cx="2667000" cy="666750"/>
+          </a:xfrm>
+          <a:prstGeom prst="rect">
+            <a:avLst/>
+          </a:prstGeom>
+          <a:noFill/>
+        </p:spPr>
+        <p:txBody>
+          <a:bodyPr wrap="square" anchor="ctr">
+            <a:spAutoFit/>
+          </a:bodyPr>
+          <a:lstStyle/>
+          <a:p>
+            <a:pPr algn="l">
+              <a:lnSpc>
+                <a:spcPct val="105000"/>
+              </a:lnSpc>
+            </a:pPr>
+            <a:r>
+              <a:rPr sz="1050" b="0">
+                <a:solidFill>
+                  <a:srgbClr val="475569"/>
+                </a:solidFill>
+                <a:latin typeface="PingFang SC"/>
+              </a:rPr>
+              <a:t>Flag 10% 观察 24h</a:t>
+            </a:r>
+          </a:p>
+        </p:txBody>
+      </p:sp>
+      <p:sp>
+        <p:nvSpPr>
+          <p:cNvPr id="21" name="Rounded Rectangle 20"/>
+          <p:cNvSpPr/>
+          <p:nvPr/>
+        </p:nvSpPr>
+        <p:spPr>
+          <a:xfrm>
+            <a:off x="8229600" y="3228975"/>
+            <a:ext cx="209550" cy="209550"/>
+          </a:xfrm>
+          <a:prstGeom prst="roundRect">
+            <a:avLst>
+              <a:gd name="adj" fmla="val 8000"/>
+            </a:avLst>
+          </a:prstGeom>
+          <a:solidFill>
+            <a:srgbClr val="F59E0B"/>
+          </a:solidFill>
+          <a:ln>
+            <a:noFill/>
+          </a:ln>
+          <a:effectLst/>
+        </p:spPr>
+        <p:style>
+          <a:lnRef idx="1">
+            <a:schemeClr val="accent1"/>
+          </a:lnRef>
+          <a:fillRef idx="3">
+            <a:schemeClr val="accent1"/>
+          </a:fillRef>
+          <a:effectRef idx="2">
+            <a:schemeClr val="accent1"/>
+          </a:effectRef>
+          <a:fontRef idx="minor">
+            <a:schemeClr val="lt1"/>
+          </a:fontRef>
+        </p:style>
+        <p:txBody>
+          <a:bodyPr rtlCol="0" anchor="ctr"/>
+          <a:lstStyle/>
+          <a:p>
+            <a:pPr algn="ctr"/>
+          </a:p>
+        </p:txBody>
+      </p:sp>
+      <p:sp>
+        <p:nvSpPr>
+          <p:cNvPr id="22" name="Rounded Rectangle 21"/>
+          <p:cNvSpPr/>
+          <p:nvPr/>
+        </p:nvSpPr>
+        <p:spPr>
+          <a:xfrm>
+            <a:off x="6905625" y="3619500"/>
+            <a:ext cx="2857500" cy="1123950"/>
+          </a:xfrm>
+          <a:prstGeom prst="roundRect">
+            <a:avLst>
+              <a:gd name="adj" fmla="val 8000"/>
+            </a:avLst>
+          </a:prstGeom>
+          <a:solidFill>
+            <a:srgbClr val="F1F5F9"/>
+          </a:solidFill>
+          <a:ln>
+            <a:noFill/>
+          </a:ln>
+          <a:effectLst/>
+        </p:spPr>
+        <p:style>
+          <a:lnRef idx="1">
+            <a:schemeClr val="accent1"/>
+          </a:lnRef>
+          <a:fillRef idx="3">
+            <a:schemeClr val="accent1"/>
+          </a:fillRef>
+          <a:effectRef idx="2">
+            <a:schemeClr val="accent1"/>
+          </a:effectRef>
+          <a:fontRef idx="minor">
+            <a:schemeClr val="lt1"/>
+          </a:fontRef>
+        </p:style>
+        <p:txBody>
+          <a:bodyPr rtlCol="0" anchor="ctr"/>
+          <a:lstStyle/>
+          <a:p>
+            <a:pPr algn="ctr"/>
+          </a:p>
+        </p:txBody>
+      </p:sp>
+      <p:sp>
+        <p:nvSpPr>
+          <p:cNvPr id="23" name="Rectangle 22"/>
+          <p:cNvSpPr/>
+          <p:nvPr/>
+        </p:nvSpPr>
+        <p:spPr>
+          <a:xfrm>
+            <a:off x="6905625" y="3619500"/>
+            <a:ext cx="2857500" cy="38100"/>
+          </a:xfrm>
+          <a:prstGeom prst="rect">
+            <a:avLst/>
+          </a:prstGeom>
+          <a:solidFill>
+            <a:srgbClr val="F59E0B"/>
+          </a:solidFill>
+          <a:ln>
+            <a:noFill/>
+          </a:ln>
+          <a:effectLst/>
+        </p:spPr>
+        <p:style>
+          <a:lnRef idx="1">
+            <a:schemeClr val="accent1"/>
+          </a:lnRef>
+          <a:fillRef idx="3">
+            <a:schemeClr val="accent1"/>
+          </a:fillRef>
+          <a:effectRef idx="2">
+            <a:schemeClr val="accent1"/>
+          </a:effectRef>
+          <a:fontRef idx="minor">
+            <a:schemeClr val="lt1"/>
+          </a:fontRef>
+        </p:style>
+        <p:txBody>
+          <a:bodyPr rtlCol="0" anchor="ctr"/>
+          <a:lstStyle/>
+          <a:p>
+            <a:pPr algn="ctr"/>
+          </a:p>
+        </p:txBody>
+      </p:sp>
+      <p:sp>
+        <p:nvSpPr>
+          <p:cNvPr id="24" name="TextBox 23"/>
+          <p:cNvSpPr txBox="1"/>
+          <p:nvPr/>
+        </p:nvSpPr>
+        <p:spPr>
+          <a:xfrm>
+            <a:off x="7000875" y="3714750"/>
+            <a:ext cx="2667000" cy="285750"/>
+          </a:xfrm>
+          <a:prstGeom prst="rect">
+            <a:avLst/>
+          </a:prstGeom>
+          <a:noFill/>
+        </p:spPr>
+        <p:txBody>
+          <a:bodyPr wrap="square" anchor="ctr">
+            <a:spAutoFit/>
+          </a:bodyPr>
+          <a:lstStyle/>
+          <a:p>
+            <a:pPr algn="ctr">
+              <a:lnSpc>
+                <a:spcPct val="100000"/>
+              </a:lnSpc>
+            </a:pPr>
+            <a:r>
+              <a:rPr sz="1400" b="1">
+                <a:solidFill>
+                  <a:srgbClr val="F59E0B"/>
+                </a:solidFill>
+                <a:latin typeface="PingFang SC"/>
+              </a:rPr>
+              <a:t>放量</a:t>
+            </a:r>
+          </a:p>
+        </p:txBody>
+      </p:sp>
+      <p:sp>
+        <p:nvSpPr>
+          <p:cNvPr id="25" name="TextBox 24"/>
+          <p:cNvSpPr txBox="1"/>
+          <p:nvPr/>
+        </p:nvSpPr>
+        <p:spPr>
+          <a:xfrm>
+            <a:off x="7000875" y="4019550"/>
+            <a:ext cx="2667000" cy="666750"/>
+          </a:xfrm>
+          <a:prstGeom prst="rect">
+            <a:avLst/>
+          </a:prstGeom>
+          <a:noFill/>
+        </p:spPr>
+        <p:txBody>
+          <a:bodyPr wrap="square" anchor="ctr">
+            <a:spAutoFit/>
+          </a:bodyPr>
+          <a:lstStyle/>
+          <a:p>
+            <a:pPr algn="l">
+              <a:lnSpc>
+                <a:spcPct val="105000"/>
+              </a:lnSpc>
+            </a:pPr>
+            <a:r>
+              <a:rPr sz="1050" b="0">
+                <a:solidFill>
+                  <a:srgbClr val="475569"/>
+                </a:solidFill>
+                <a:latin typeface="PingFang SC"/>
+              </a:rPr>
+              <a:t>50%→100%</a:t>
+            </a:r>
+          </a:p>
+        </p:txBody>
+      </p:sp>
+      <p:sp>
+        <p:nvSpPr>
+          <p:cNvPr id="26" name="Rounded Rectangle 25"/>
+          <p:cNvSpPr/>
+          <p:nvPr/>
+        </p:nvSpPr>
+        <p:spPr>
+          <a:xfrm>
+            <a:off x="10467975" y="3228975"/>
+            <a:ext cx="209550" cy="209550"/>
+          </a:xfrm>
+          <a:prstGeom prst="roundRect">
+            <a:avLst>
+              <a:gd name="adj" fmla="val 8000"/>
+            </a:avLst>
+          </a:prstGeom>
+          <a:solidFill>
+            <a:srgbClr val="34D399"/>
+          </a:solidFill>
+          <a:ln>
+            <a:noFill/>
+          </a:ln>
+          <a:effectLst/>
+        </p:spPr>
+        <p:style>
+          <a:lnRef idx="1">
+            <a:schemeClr val="accent1"/>
+          </a:lnRef>
+          <a:fillRef idx="3">
+            <a:schemeClr val="accent1"/>
+          </a:fillRef>
+          <a:effectRef idx="2">
+            <a:schemeClr val="accent1"/>
+          </a:effectRef>
+          <a:fontRef idx="minor">
+            <a:schemeClr val="lt1"/>
+          </a:fontRef>
+        </p:style>
+        <p:txBody>
+          <a:bodyPr rtlCol="0" anchor="ctr"/>
+          <a:lstStyle/>
+          <a:p>
+            <a:pPr algn="ctr"/>
+          </a:p>
+        </p:txBody>
+      </p:sp>
+      <p:sp>
+        <p:nvSpPr>
+          <p:cNvPr id="27" name="Rounded Rectangle 26"/>
+          <p:cNvSpPr/>
+          <p:nvPr/>
+        </p:nvSpPr>
+        <p:spPr>
+          <a:xfrm>
+            <a:off x="9144000" y="1905000"/>
+            <a:ext cx="2857500" cy="1123950"/>
+          </a:xfrm>
+          <a:prstGeom prst="roundRect">
+            <a:avLst>
+              <a:gd name="adj" fmla="val 8000"/>
+            </a:avLst>
+          </a:prstGeom>
+          <a:solidFill>
+            <a:srgbClr val="F1F5F9"/>
+          </a:solidFill>
+          <a:ln>
+            <a:noFill/>
+          </a:ln>
+          <a:effectLst/>
+        </p:spPr>
+        <p:style>
+          <a:lnRef idx="1">
+            <a:schemeClr val="accent1"/>
+          </a:lnRef>
+          <a:fillRef idx="3">
+            <a:schemeClr val="accent1"/>
+          </a:fillRef>
+          <a:effectRef idx="2">
+            <a:schemeClr val="accent1"/>
+          </a:effectRef>
+          <a:fontRef idx="minor">
+            <a:schemeClr val="lt1"/>
+          </a:fontRef>
+        </p:style>
+        <p:txBody>
+          <a:bodyPr rtlCol="0" anchor="ctr"/>
+          <a:lstStyle/>
+          <a:p>
+            <a:pPr algn="ctr"/>
+          </a:p>
+        </p:txBody>
+      </p:sp>
+      <p:sp>
+        <p:nvSpPr>
+          <p:cNvPr id="28" name="Rectangle 27"/>
+          <p:cNvSpPr/>
+          <p:nvPr/>
+        </p:nvSpPr>
+        <p:spPr>
+          <a:xfrm>
+            <a:off x="9144000" y="1905000"/>
+            <a:ext cx="2857500" cy="38100"/>
+          </a:xfrm>
+          <a:prstGeom prst="rect">
+            <a:avLst/>
+          </a:prstGeom>
+          <a:solidFill>
+            <a:srgbClr val="34D399"/>
+          </a:solidFill>
+          <a:ln>
+            <a:noFill/>
+          </a:ln>
+          <a:effectLst/>
+        </p:spPr>
+        <p:style>
+          <a:lnRef idx="1">
+            <a:schemeClr val="accent1"/>
+          </a:lnRef>
+          <a:fillRef idx="3">
+            <a:schemeClr val="accent1"/>
+          </a:fillRef>
+          <a:effectRef idx="2">
+            <a:schemeClr val="accent1"/>
+          </a:effectRef>
+          <a:fontRef idx="minor">
+            <a:schemeClr val="lt1"/>
+          </a:fontRef>
+        </p:style>
+        <p:txBody>
+          <a:bodyPr rtlCol="0" anchor="ctr"/>
+          <a:lstStyle/>
+          <a:p>
+            <a:pPr algn="ctr"/>
+          </a:p>
+        </p:txBody>
+      </p:sp>
+      <p:sp>
+        <p:nvSpPr>
+          <p:cNvPr id="29" name="TextBox 28"/>
+          <p:cNvSpPr txBox="1"/>
+          <p:nvPr/>
+        </p:nvSpPr>
+        <p:spPr>
+          <a:xfrm>
+            <a:off x="9239250" y="2000250"/>
+            <a:ext cx="2667000" cy="285750"/>
+          </a:xfrm>
+          <a:prstGeom prst="rect">
+            <a:avLst/>
+          </a:prstGeom>
+          <a:noFill/>
+        </p:spPr>
+        <p:txBody>
+          <a:bodyPr wrap="square" anchor="ctr">
+            <a:spAutoFit/>
+          </a:bodyPr>
+          <a:lstStyle/>
+          <a:p>
+            <a:pPr algn="ctr">
+              <a:lnSpc>
+                <a:spcPct val="100000"/>
+              </a:lnSpc>
+            </a:pPr>
+            <a:r>
+              <a:rPr sz="1400" b="1">
+                <a:solidFill>
+                  <a:srgbClr val="34D399"/>
+                </a:solidFill>
+                <a:latin typeface="PingFang SC"/>
+              </a:rPr>
+              <a:t>回滚</a:t>
+            </a:r>
+          </a:p>
+        </p:txBody>
+      </p:sp>
+      <p:sp>
+        <p:nvSpPr>
+          <p:cNvPr id="30" name="TextBox 29"/>
+          <p:cNvSpPr txBox="1"/>
+          <p:nvPr/>
+        </p:nvSpPr>
+        <p:spPr>
+          <a:xfrm>
+            <a:off x="9239250" y="2305050"/>
+            <a:ext cx="2667000" cy="666750"/>
+          </a:xfrm>
+          <a:prstGeom prst="rect">
+            <a:avLst/>
+          </a:prstGeom>
+          <a:noFill/>
+        </p:spPr>
+        <p:txBody>
+          <a:bodyPr wrap="square" anchor="ctr">
+            <a:spAutoFit/>
+          </a:bodyPr>
+          <a:lstStyle/>
+          <a:p>
+            <a:pPr algn="l">
+              <a:lnSpc>
+                <a:spcPct val="105000"/>
+              </a:lnSpc>
+            </a:pPr>
+            <a:r>
+              <a:rPr sz="1050" b="0">
+                <a:solidFill>
+                  <a:srgbClr val="475569"/>
+                </a:solidFill>
+                <a:latin typeface="PingFang SC"/>
+              </a:rPr>
+              <a:t>指标异常一键</a:t>
+            </a:r>
+          </a:p>
+        </p:txBody>
+      </p:sp>
+      <p:sp>
+        <p:nvSpPr>
+          <p:cNvPr id="31" name="TextBox 30"/>
+          <p:cNvSpPr txBox="1"/>
+          <p:nvPr/>
+        </p:nvSpPr>
+        <p:spPr>
+          <a:xfrm>
+            <a:off x="10287000" y="6534150"/>
+            <a:ext cx="1619250" cy="266700"/>
           </a:xfrm>
           <a:prstGeom prst="rect">
             <a:avLst/>
@@ -22108,1159 +23144,6 @@
               </a:lnSpc>
             </a:pPr>
             <a:r>
-              <a:rPr sz="1100" b="0">
-                <a:solidFill>
-                  <a:srgbClr val="94A3B8"/>
-                </a:solidFill>
-                <a:latin typeface="PingFang SC"/>
-              </a:rPr>
-              <a:t>改动:PR+变更说明;评测:Golden 全量回归;灰度:Flag 10% 观察 24h;放量:50%→100%;回滚:指标异常一键|regressed 非空→阻断</a:t>
-            </a:r>
-          </a:p>
-        </p:txBody>
-      </p:sp>
-      <p:sp>
-        <p:nvSpPr>
-          <p:cNvPr id="6" name="Rectangle 5"/>
-          <p:cNvSpPr/>
-          <p:nvPr/>
-        </p:nvSpPr>
-        <p:spPr>
-          <a:xfrm>
-            <a:off x="1619250" y="3314700"/>
-            <a:ext cx="8953500" cy="38100"/>
-          </a:xfrm>
-          <a:prstGeom prst="rect">
-            <a:avLst/>
-          </a:prstGeom>
-          <a:solidFill>
-            <a:srgbClr val="DDE5EE"/>
-          </a:solidFill>
-          <a:ln>
-            <a:noFill/>
-          </a:ln>
-          <a:effectLst/>
-        </p:spPr>
-        <p:style>
-          <a:lnRef idx="1">
-            <a:schemeClr val="accent1"/>
-          </a:lnRef>
-          <a:fillRef idx="3">
-            <a:schemeClr val="accent1"/>
-          </a:fillRef>
-          <a:effectRef idx="2">
-            <a:schemeClr val="accent1"/>
-          </a:effectRef>
-          <a:fontRef idx="minor">
-            <a:schemeClr val="lt1"/>
-          </a:fontRef>
-        </p:style>
-        <p:txBody>
-          <a:bodyPr rtlCol="0" anchor="ctr"/>
-          <a:lstStyle/>
-          <a:p>
-            <a:pPr algn="ctr"/>
-          </a:p>
-        </p:txBody>
-      </p:sp>
-      <p:sp>
-        <p:nvSpPr>
-          <p:cNvPr id="7" name="Rounded Rectangle 6"/>
-          <p:cNvSpPr/>
-          <p:nvPr/>
-        </p:nvSpPr>
-        <p:spPr>
-          <a:xfrm>
-            <a:off x="1514475" y="3228975"/>
-            <a:ext cx="209550" cy="209550"/>
-          </a:xfrm>
-          <a:prstGeom prst="roundRect">
-            <a:avLst>
-              <a:gd name="adj" fmla="val 8000"/>
-            </a:avLst>
-          </a:prstGeom>
-          <a:solidFill>
-            <a:srgbClr val="2563EB"/>
-          </a:solidFill>
-          <a:ln>
-            <a:noFill/>
-          </a:ln>
-          <a:effectLst/>
-        </p:spPr>
-        <p:style>
-          <a:lnRef idx="1">
-            <a:schemeClr val="accent1"/>
-          </a:lnRef>
-          <a:fillRef idx="3">
-            <a:schemeClr val="accent1"/>
-          </a:fillRef>
-          <a:effectRef idx="2">
-            <a:schemeClr val="accent1"/>
-          </a:effectRef>
-          <a:fontRef idx="minor">
-            <a:schemeClr val="lt1"/>
-          </a:fontRef>
-        </p:style>
-        <p:txBody>
-          <a:bodyPr rtlCol="0" anchor="ctr"/>
-          <a:lstStyle/>
-          <a:p>
-            <a:pPr algn="ctr"/>
-          </a:p>
-        </p:txBody>
-      </p:sp>
-      <p:sp>
-        <p:nvSpPr>
-          <p:cNvPr id="8" name="Rounded Rectangle 7"/>
-          <p:cNvSpPr/>
-          <p:nvPr/>
-        </p:nvSpPr>
-        <p:spPr>
-          <a:xfrm>
-            <a:off x="190500" y="1905000"/>
-            <a:ext cx="2857500" cy="1123950"/>
-          </a:xfrm>
-          <a:prstGeom prst="roundRect">
-            <a:avLst>
-              <a:gd name="adj" fmla="val 8000"/>
-            </a:avLst>
-          </a:prstGeom>
-          <a:solidFill>
-            <a:srgbClr val="F1F5F9"/>
-          </a:solidFill>
-          <a:ln>
-            <a:noFill/>
-          </a:ln>
-          <a:effectLst/>
-        </p:spPr>
-        <p:style>
-          <a:lnRef idx="1">
-            <a:schemeClr val="accent1"/>
-          </a:lnRef>
-          <a:fillRef idx="3">
-            <a:schemeClr val="accent1"/>
-          </a:fillRef>
-          <a:effectRef idx="2">
-            <a:schemeClr val="accent1"/>
-          </a:effectRef>
-          <a:fontRef idx="minor">
-            <a:schemeClr val="lt1"/>
-          </a:fontRef>
-        </p:style>
-        <p:txBody>
-          <a:bodyPr rtlCol="0" anchor="ctr"/>
-          <a:lstStyle/>
-          <a:p>
-            <a:pPr algn="ctr"/>
-          </a:p>
-        </p:txBody>
-      </p:sp>
-      <p:sp>
-        <p:nvSpPr>
-          <p:cNvPr id="9" name="Rectangle 8"/>
-          <p:cNvSpPr/>
-          <p:nvPr/>
-        </p:nvSpPr>
-        <p:spPr>
-          <a:xfrm>
-            <a:off x="190500" y="1905000"/>
-            <a:ext cx="2857500" cy="38100"/>
-          </a:xfrm>
-          <a:prstGeom prst="rect">
-            <a:avLst/>
-          </a:prstGeom>
-          <a:solidFill>
-            <a:srgbClr val="2563EB"/>
-          </a:solidFill>
-          <a:ln>
-            <a:noFill/>
-          </a:ln>
-          <a:effectLst/>
-        </p:spPr>
-        <p:style>
-          <a:lnRef idx="1">
-            <a:schemeClr val="accent1"/>
-          </a:lnRef>
-          <a:fillRef idx="3">
-            <a:schemeClr val="accent1"/>
-          </a:fillRef>
-          <a:effectRef idx="2">
-            <a:schemeClr val="accent1"/>
-          </a:effectRef>
-          <a:fontRef idx="minor">
-            <a:schemeClr val="lt1"/>
-          </a:fontRef>
-        </p:style>
-        <p:txBody>
-          <a:bodyPr rtlCol="0" anchor="ctr"/>
-          <a:lstStyle/>
-          <a:p>
-            <a:pPr algn="ctr"/>
-          </a:p>
-        </p:txBody>
-      </p:sp>
-      <p:sp>
-        <p:nvSpPr>
-          <p:cNvPr id="10" name="TextBox 9"/>
-          <p:cNvSpPr txBox="1"/>
-          <p:nvPr/>
-        </p:nvSpPr>
-        <p:spPr>
-          <a:xfrm>
-            <a:off x="285750" y="2000250"/>
-            <a:ext cx="2667000" cy="285750"/>
-          </a:xfrm>
-          <a:prstGeom prst="rect">
-            <a:avLst/>
-          </a:prstGeom>
-          <a:noFill/>
-        </p:spPr>
-        <p:txBody>
-          <a:bodyPr wrap="square" anchor="ctr">
-            <a:spAutoFit/>
-          </a:bodyPr>
-          <a:lstStyle/>
-          <a:p>
-            <a:pPr algn="ctr">
-              <a:lnSpc>
-                <a:spcPct val="100000"/>
-              </a:lnSpc>
-            </a:pPr>
-            <a:r>
-              <a:rPr sz="1400" b="1">
-                <a:solidFill>
-                  <a:srgbClr val="2563EB"/>
-                </a:solidFill>
-                <a:latin typeface="PingFang SC"/>
-              </a:rPr>
-              <a:t>改动</a:t>
-            </a:r>
-          </a:p>
-        </p:txBody>
-      </p:sp>
-      <p:sp>
-        <p:nvSpPr>
-          <p:cNvPr id="11" name="TextBox 10"/>
-          <p:cNvSpPr txBox="1"/>
-          <p:nvPr/>
-        </p:nvSpPr>
-        <p:spPr>
-          <a:xfrm>
-            <a:off x="285750" y="2305050"/>
-            <a:ext cx="2667000" cy="666750"/>
-          </a:xfrm>
-          <a:prstGeom prst="rect">
-            <a:avLst/>
-          </a:prstGeom>
-          <a:noFill/>
-        </p:spPr>
-        <p:txBody>
-          <a:bodyPr wrap="square" anchor="ctr">
-            <a:spAutoFit/>
-          </a:bodyPr>
-          <a:lstStyle/>
-          <a:p>
-            <a:pPr algn="l">
-              <a:lnSpc>
-                <a:spcPct val="105000"/>
-              </a:lnSpc>
-            </a:pPr>
-            <a:r>
-              <a:rPr sz="1050" b="0">
-                <a:solidFill>
-                  <a:srgbClr val="475569"/>
-                </a:solidFill>
-                <a:latin typeface="PingFang SC"/>
-              </a:rPr>
-              <a:t>PR+变更说明</a:t>
-            </a:r>
-          </a:p>
-        </p:txBody>
-      </p:sp>
-      <p:sp>
-        <p:nvSpPr>
-          <p:cNvPr id="12" name="Rounded Rectangle 11"/>
-          <p:cNvSpPr/>
-          <p:nvPr/>
-        </p:nvSpPr>
-        <p:spPr>
-          <a:xfrm>
-            <a:off x="3752850" y="3228975"/>
-            <a:ext cx="209550" cy="209550"/>
-          </a:xfrm>
-          <a:prstGeom prst="roundRect">
-            <a:avLst>
-              <a:gd name="adj" fmla="val 8000"/>
-            </a:avLst>
-          </a:prstGeom>
-          <a:solidFill>
-            <a:srgbClr val="14B8A6"/>
-          </a:solidFill>
-          <a:ln>
-            <a:noFill/>
-          </a:ln>
-          <a:effectLst/>
-        </p:spPr>
-        <p:style>
-          <a:lnRef idx="1">
-            <a:schemeClr val="accent1"/>
-          </a:lnRef>
-          <a:fillRef idx="3">
-            <a:schemeClr val="accent1"/>
-          </a:fillRef>
-          <a:effectRef idx="2">
-            <a:schemeClr val="accent1"/>
-          </a:effectRef>
-          <a:fontRef idx="minor">
-            <a:schemeClr val="lt1"/>
-          </a:fontRef>
-        </p:style>
-        <p:txBody>
-          <a:bodyPr rtlCol="0" anchor="ctr"/>
-          <a:lstStyle/>
-          <a:p>
-            <a:pPr algn="ctr"/>
-          </a:p>
-        </p:txBody>
-      </p:sp>
-      <p:sp>
-        <p:nvSpPr>
-          <p:cNvPr id="13" name="Rounded Rectangle 12"/>
-          <p:cNvSpPr/>
-          <p:nvPr/>
-        </p:nvSpPr>
-        <p:spPr>
-          <a:xfrm>
-            <a:off x="2428875" y="3619500"/>
-            <a:ext cx="2857500" cy="1123950"/>
-          </a:xfrm>
-          <a:prstGeom prst="roundRect">
-            <a:avLst>
-              <a:gd name="adj" fmla="val 8000"/>
-            </a:avLst>
-          </a:prstGeom>
-          <a:solidFill>
-            <a:srgbClr val="F1F5F9"/>
-          </a:solidFill>
-          <a:ln>
-            <a:noFill/>
-          </a:ln>
-          <a:effectLst/>
-        </p:spPr>
-        <p:style>
-          <a:lnRef idx="1">
-            <a:schemeClr val="accent1"/>
-          </a:lnRef>
-          <a:fillRef idx="3">
-            <a:schemeClr val="accent1"/>
-          </a:fillRef>
-          <a:effectRef idx="2">
-            <a:schemeClr val="accent1"/>
-          </a:effectRef>
-          <a:fontRef idx="minor">
-            <a:schemeClr val="lt1"/>
-          </a:fontRef>
-        </p:style>
-        <p:txBody>
-          <a:bodyPr rtlCol="0" anchor="ctr"/>
-          <a:lstStyle/>
-          <a:p>
-            <a:pPr algn="ctr"/>
-          </a:p>
-        </p:txBody>
-      </p:sp>
-      <p:sp>
-        <p:nvSpPr>
-          <p:cNvPr id="14" name="Rectangle 13"/>
-          <p:cNvSpPr/>
-          <p:nvPr/>
-        </p:nvSpPr>
-        <p:spPr>
-          <a:xfrm>
-            <a:off x="2428875" y="3619500"/>
-            <a:ext cx="2857500" cy="38100"/>
-          </a:xfrm>
-          <a:prstGeom prst="rect">
-            <a:avLst/>
-          </a:prstGeom>
-          <a:solidFill>
-            <a:srgbClr val="14B8A6"/>
-          </a:solidFill>
-          <a:ln>
-            <a:noFill/>
-          </a:ln>
-          <a:effectLst/>
-        </p:spPr>
-        <p:style>
-          <a:lnRef idx="1">
-            <a:schemeClr val="accent1"/>
-          </a:lnRef>
-          <a:fillRef idx="3">
-            <a:schemeClr val="accent1"/>
-          </a:fillRef>
-          <a:effectRef idx="2">
-            <a:schemeClr val="accent1"/>
-          </a:effectRef>
-          <a:fontRef idx="minor">
-            <a:schemeClr val="lt1"/>
-          </a:fontRef>
-        </p:style>
-        <p:txBody>
-          <a:bodyPr rtlCol="0" anchor="ctr"/>
-          <a:lstStyle/>
-          <a:p>
-            <a:pPr algn="ctr"/>
-          </a:p>
-        </p:txBody>
-      </p:sp>
-      <p:sp>
-        <p:nvSpPr>
-          <p:cNvPr id="15" name="TextBox 14"/>
-          <p:cNvSpPr txBox="1"/>
-          <p:nvPr/>
-        </p:nvSpPr>
-        <p:spPr>
-          <a:xfrm>
-            <a:off x="2524125" y="3714750"/>
-            <a:ext cx="2667000" cy="285750"/>
-          </a:xfrm>
-          <a:prstGeom prst="rect">
-            <a:avLst/>
-          </a:prstGeom>
-          <a:noFill/>
-        </p:spPr>
-        <p:txBody>
-          <a:bodyPr wrap="square" anchor="ctr">
-            <a:spAutoFit/>
-          </a:bodyPr>
-          <a:lstStyle/>
-          <a:p>
-            <a:pPr algn="ctr">
-              <a:lnSpc>
-                <a:spcPct val="100000"/>
-              </a:lnSpc>
-            </a:pPr>
-            <a:r>
-              <a:rPr sz="1400" b="1">
-                <a:solidFill>
-                  <a:srgbClr val="14B8A6"/>
-                </a:solidFill>
-                <a:latin typeface="PingFang SC"/>
-              </a:rPr>
-              <a:t>评测</a:t>
-            </a:r>
-          </a:p>
-        </p:txBody>
-      </p:sp>
-      <p:sp>
-        <p:nvSpPr>
-          <p:cNvPr id="16" name="TextBox 15"/>
-          <p:cNvSpPr txBox="1"/>
-          <p:nvPr/>
-        </p:nvSpPr>
-        <p:spPr>
-          <a:xfrm>
-            <a:off x="2524125" y="4019550"/>
-            <a:ext cx="2667000" cy="666750"/>
-          </a:xfrm>
-          <a:prstGeom prst="rect">
-            <a:avLst/>
-          </a:prstGeom>
-          <a:noFill/>
-        </p:spPr>
-        <p:txBody>
-          <a:bodyPr wrap="square" anchor="ctr">
-            <a:spAutoFit/>
-          </a:bodyPr>
-          <a:lstStyle/>
-          <a:p>
-            <a:pPr algn="l">
-              <a:lnSpc>
-                <a:spcPct val="105000"/>
-              </a:lnSpc>
-            </a:pPr>
-            <a:r>
-              <a:rPr sz="1050" b="0">
-                <a:solidFill>
-                  <a:srgbClr val="475569"/>
-                </a:solidFill>
-                <a:latin typeface="PingFang SC"/>
-              </a:rPr>
-              <a:t>Golden 全量回归</a:t>
-            </a:r>
-          </a:p>
-        </p:txBody>
-      </p:sp>
-      <p:sp>
-        <p:nvSpPr>
-          <p:cNvPr id="17" name="Rounded Rectangle 16"/>
-          <p:cNvSpPr/>
-          <p:nvPr/>
-        </p:nvSpPr>
-        <p:spPr>
-          <a:xfrm>
-            <a:off x="5991225" y="3228975"/>
-            <a:ext cx="209550" cy="209550"/>
-          </a:xfrm>
-          <a:prstGeom prst="roundRect">
-            <a:avLst>
-              <a:gd name="adj" fmla="val 8000"/>
-            </a:avLst>
-          </a:prstGeom>
-          <a:solidFill>
-            <a:srgbClr val="8B5CF6"/>
-          </a:solidFill>
-          <a:ln>
-            <a:noFill/>
-          </a:ln>
-          <a:effectLst/>
-        </p:spPr>
-        <p:style>
-          <a:lnRef idx="1">
-            <a:schemeClr val="accent1"/>
-          </a:lnRef>
-          <a:fillRef idx="3">
-            <a:schemeClr val="accent1"/>
-          </a:fillRef>
-          <a:effectRef idx="2">
-            <a:schemeClr val="accent1"/>
-          </a:effectRef>
-          <a:fontRef idx="minor">
-            <a:schemeClr val="lt1"/>
-          </a:fontRef>
-        </p:style>
-        <p:txBody>
-          <a:bodyPr rtlCol="0" anchor="ctr"/>
-          <a:lstStyle/>
-          <a:p>
-            <a:pPr algn="ctr"/>
-          </a:p>
-        </p:txBody>
-      </p:sp>
-      <p:sp>
-        <p:nvSpPr>
-          <p:cNvPr id="18" name="Rounded Rectangle 17"/>
-          <p:cNvSpPr/>
-          <p:nvPr/>
-        </p:nvSpPr>
-        <p:spPr>
-          <a:xfrm>
-            <a:off x="4667250" y="1905000"/>
-            <a:ext cx="2857500" cy="1123950"/>
-          </a:xfrm>
-          <a:prstGeom prst="roundRect">
-            <a:avLst>
-              <a:gd name="adj" fmla="val 8000"/>
-            </a:avLst>
-          </a:prstGeom>
-          <a:solidFill>
-            <a:srgbClr val="F1F5F9"/>
-          </a:solidFill>
-          <a:ln>
-            <a:noFill/>
-          </a:ln>
-          <a:effectLst/>
-        </p:spPr>
-        <p:style>
-          <a:lnRef idx="1">
-            <a:schemeClr val="accent1"/>
-          </a:lnRef>
-          <a:fillRef idx="3">
-            <a:schemeClr val="accent1"/>
-          </a:fillRef>
-          <a:effectRef idx="2">
-            <a:schemeClr val="accent1"/>
-          </a:effectRef>
-          <a:fontRef idx="minor">
-            <a:schemeClr val="lt1"/>
-          </a:fontRef>
-        </p:style>
-        <p:txBody>
-          <a:bodyPr rtlCol="0" anchor="ctr"/>
-          <a:lstStyle/>
-          <a:p>
-            <a:pPr algn="ctr"/>
-          </a:p>
-        </p:txBody>
-      </p:sp>
-      <p:sp>
-        <p:nvSpPr>
-          <p:cNvPr id="19" name="Rectangle 18"/>
-          <p:cNvSpPr/>
-          <p:nvPr/>
-        </p:nvSpPr>
-        <p:spPr>
-          <a:xfrm>
-            <a:off x="4667250" y="1905000"/>
-            <a:ext cx="2857500" cy="38100"/>
-          </a:xfrm>
-          <a:prstGeom prst="rect">
-            <a:avLst/>
-          </a:prstGeom>
-          <a:solidFill>
-            <a:srgbClr val="8B5CF6"/>
-          </a:solidFill>
-          <a:ln>
-            <a:noFill/>
-          </a:ln>
-          <a:effectLst/>
-        </p:spPr>
-        <p:style>
-          <a:lnRef idx="1">
-            <a:schemeClr val="accent1"/>
-          </a:lnRef>
-          <a:fillRef idx="3">
-            <a:schemeClr val="accent1"/>
-          </a:fillRef>
-          <a:effectRef idx="2">
-            <a:schemeClr val="accent1"/>
-          </a:effectRef>
-          <a:fontRef idx="minor">
-            <a:schemeClr val="lt1"/>
-          </a:fontRef>
-        </p:style>
-        <p:txBody>
-          <a:bodyPr rtlCol="0" anchor="ctr"/>
-          <a:lstStyle/>
-          <a:p>
-            <a:pPr algn="ctr"/>
-          </a:p>
-        </p:txBody>
-      </p:sp>
-      <p:sp>
-        <p:nvSpPr>
-          <p:cNvPr id="20" name="TextBox 19"/>
-          <p:cNvSpPr txBox="1"/>
-          <p:nvPr/>
-        </p:nvSpPr>
-        <p:spPr>
-          <a:xfrm>
-            <a:off x="4762500" y="2000250"/>
-            <a:ext cx="2667000" cy="285750"/>
-          </a:xfrm>
-          <a:prstGeom prst="rect">
-            <a:avLst/>
-          </a:prstGeom>
-          <a:noFill/>
-        </p:spPr>
-        <p:txBody>
-          <a:bodyPr wrap="square" anchor="ctr">
-            <a:spAutoFit/>
-          </a:bodyPr>
-          <a:lstStyle/>
-          <a:p>
-            <a:pPr algn="ctr">
-              <a:lnSpc>
-                <a:spcPct val="100000"/>
-              </a:lnSpc>
-            </a:pPr>
-            <a:r>
-              <a:rPr sz="1400" b="1">
-                <a:solidFill>
-                  <a:srgbClr val="8B5CF6"/>
-                </a:solidFill>
-                <a:latin typeface="PingFang SC"/>
-              </a:rPr>
-              <a:t>灰度</a:t>
-            </a:r>
-          </a:p>
-        </p:txBody>
-      </p:sp>
-      <p:sp>
-        <p:nvSpPr>
-          <p:cNvPr id="21" name="TextBox 20"/>
-          <p:cNvSpPr txBox="1"/>
-          <p:nvPr/>
-        </p:nvSpPr>
-        <p:spPr>
-          <a:xfrm>
-            <a:off x="4762500" y="2305050"/>
-            <a:ext cx="2667000" cy="666750"/>
-          </a:xfrm>
-          <a:prstGeom prst="rect">
-            <a:avLst/>
-          </a:prstGeom>
-          <a:noFill/>
-        </p:spPr>
-        <p:txBody>
-          <a:bodyPr wrap="square" anchor="ctr">
-            <a:spAutoFit/>
-          </a:bodyPr>
-          <a:lstStyle/>
-          <a:p>
-            <a:pPr algn="l">
-              <a:lnSpc>
-                <a:spcPct val="105000"/>
-              </a:lnSpc>
-            </a:pPr>
-            <a:r>
-              <a:rPr sz="1050" b="0">
-                <a:solidFill>
-                  <a:srgbClr val="475569"/>
-                </a:solidFill>
-                <a:latin typeface="PingFang SC"/>
-              </a:rPr>
-              <a:t>Flag 10% 观察 24h</a:t>
-            </a:r>
-          </a:p>
-        </p:txBody>
-      </p:sp>
-      <p:sp>
-        <p:nvSpPr>
-          <p:cNvPr id="22" name="Rounded Rectangle 21"/>
-          <p:cNvSpPr/>
-          <p:nvPr/>
-        </p:nvSpPr>
-        <p:spPr>
-          <a:xfrm>
-            <a:off x="8229600" y="3228975"/>
-            <a:ext cx="209550" cy="209550"/>
-          </a:xfrm>
-          <a:prstGeom prst="roundRect">
-            <a:avLst>
-              <a:gd name="adj" fmla="val 8000"/>
-            </a:avLst>
-          </a:prstGeom>
-          <a:solidFill>
-            <a:srgbClr val="F59E0B"/>
-          </a:solidFill>
-          <a:ln>
-            <a:noFill/>
-          </a:ln>
-          <a:effectLst/>
-        </p:spPr>
-        <p:style>
-          <a:lnRef idx="1">
-            <a:schemeClr val="accent1"/>
-          </a:lnRef>
-          <a:fillRef idx="3">
-            <a:schemeClr val="accent1"/>
-          </a:fillRef>
-          <a:effectRef idx="2">
-            <a:schemeClr val="accent1"/>
-          </a:effectRef>
-          <a:fontRef idx="minor">
-            <a:schemeClr val="lt1"/>
-          </a:fontRef>
-        </p:style>
-        <p:txBody>
-          <a:bodyPr rtlCol="0" anchor="ctr"/>
-          <a:lstStyle/>
-          <a:p>
-            <a:pPr algn="ctr"/>
-          </a:p>
-        </p:txBody>
-      </p:sp>
-      <p:sp>
-        <p:nvSpPr>
-          <p:cNvPr id="23" name="Rounded Rectangle 22"/>
-          <p:cNvSpPr/>
-          <p:nvPr/>
-        </p:nvSpPr>
-        <p:spPr>
-          <a:xfrm>
-            <a:off x="6905625" y="3619500"/>
-            <a:ext cx="2857500" cy="1123950"/>
-          </a:xfrm>
-          <a:prstGeom prst="roundRect">
-            <a:avLst>
-              <a:gd name="adj" fmla="val 8000"/>
-            </a:avLst>
-          </a:prstGeom>
-          <a:solidFill>
-            <a:srgbClr val="F1F5F9"/>
-          </a:solidFill>
-          <a:ln>
-            <a:noFill/>
-          </a:ln>
-          <a:effectLst/>
-        </p:spPr>
-        <p:style>
-          <a:lnRef idx="1">
-            <a:schemeClr val="accent1"/>
-          </a:lnRef>
-          <a:fillRef idx="3">
-            <a:schemeClr val="accent1"/>
-          </a:fillRef>
-          <a:effectRef idx="2">
-            <a:schemeClr val="accent1"/>
-          </a:effectRef>
-          <a:fontRef idx="minor">
-            <a:schemeClr val="lt1"/>
-          </a:fontRef>
-        </p:style>
-        <p:txBody>
-          <a:bodyPr rtlCol="0" anchor="ctr"/>
-          <a:lstStyle/>
-          <a:p>
-            <a:pPr algn="ctr"/>
-          </a:p>
-        </p:txBody>
-      </p:sp>
-      <p:sp>
-        <p:nvSpPr>
-          <p:cNvPr id="24" name="Rectangle 23"/>
-          <p:cNvSpPr/>
-          <p:nvPr/>
-        </p:nvSpPr>
-        <p:spPr>
-          <a:xfrm>
-            <a:off x="6905625" y="3619500"/>
-            <a:ext cx="2857500" cy="38100"/>
-          </a:xfrm>
-          <a:prstGeom prst="rect">
-            <a:avLst/>
-          </a:prstGeom>
-          <a:solidFill>
-            <a:srgbClr val="F59E0B"/>
-          </a:solidFill>
-          <a:ln>
-            <a:noFill/>
-          </a:ln>
-          <a:effectLst/>
-        </p:spPr>
-        <p:style>
-          <a:lnRef idx="1">
-            <a:schemeClr val="accent1"/>
-          </a:lnRef>
-          <a:fillRef idx="3">
-            <a:schemeClr val="accent1"/>
-          </a:fillRef>
-          <a:effectRef idx="2">
-            <a:schemeClr val="accent1"/>
-          </a:effectRef>
-          <a:fontRef idx="minor">
-            <a:schemeClr val="lt1"/>
-          </a:fontRef>
-        </p:style>
-        <p:txBody>
-          <a:bodyPr rtlCol="0" anchor="ctr"/>
-          <a:lstStyle/>
-          <a:p>
-            <a:pPr algn="ctr"/>
-          </a:p>
-        </p:txBody>
-      </p:sp>
-      <p:sp>
-        <p:nvSpPr>
-          <p:cNvPr id="25" name="TextBox 24"/>
-          <p:cNvSpPr txBox="1"/>
-          <p:nvPr/>
-        </p:nvSpPr>
-        <p:spPr>
-          <a:xfrm>
-            <a:off x="7000875" y="3714750"/>
-            <a:ext cx="2667000" cy="285750"/>
-          </a:xfrm>
-          <a:prstGeom prst="rect">
-            <a:avLst/>
-          </a:prstGeom>
-          <a:noFill/>
-        </p:spPr>
-        <p:txBody>
-          <a:bodyPr wrap="square" anchor="ctr">
-            <a:spAutoFit/>
-          </a:bodyPr>
-          <a:lstStyle/>
-          <a:p>
-            <a:pPr algn="ctr">
-              <a:lnSpc>
-                <a:spcPct val="100000"/>
-              </a:lnSpc>
-            </a:pPr>
-            <a:r>
-              <a:rPr sz="1400" b="1">
-                <a:solidFill>
-                  <a:srgbClr val="F59E0B"/>
-                </a:solidFill>
-                <a:latin typeface="PingFang SC"/>
-              </a:rPr>
-              <a:t>放量</a:t>
-            </a:r>
-          </a:p>
-        </p:txBody>
-      </p:sp>
-      <p:sp>
-        <p:nvSpPr>
-          <p:cNvPr id="26" name="TextBox 25"/>
-          <p:cNvSpPr txBox="1"/>
-          <p:nvPr/>
-        </p:nvSpPr>
-        <p:spPr>
-          <a:xfrm>
-            <a:off x="7000875" y="4019550"/>
-            <a:ext cx="2667000" cy="666750"/>
-          </a:xfrm>
-          <a:prstGeom prst="rect">
-            <a:avLst/>
-          </a:prstGeom>
-          <a:noFill/>
-        </p:spPr>
-        <p:txBody>
-          <a:bodyPr wrap="square" anchor="ctr">
-            <a:spAutoFit/>
-          </a:bodyPr>
-          <a:lstStyle/>
-          <a:p>
-            <a:pPr algn="l">
-              <a:lnSpc>
-                <a:spcPct val="105000"/>
-              </a:lnSpc>
-            </a:pPr>
-            <a:r>
-              <a:rPr sz="1050" b="0">
-                <a:solidFill>
-                  <a:srgbClr val="475569"/>
-                </a:solidFill>
-                <a:latin typeface="PingFang SC"/>
-              </a:rPr>
-              <a:t>50%→100%</a:t>
-            </a:r>
-          </a:p>
-        </p:txBody>
-      </p:sp>
-      <p:sp>
-        <p:nvSpPr>
-          <p:cNvPr id="27" name="Rounded Rectangle 26"/>
-          <p:cNvSpPr/>
-          <p:nvPr/>
-        </p:nvSpPr>
-        <p:spPr>
-          <a:xfrm>
-            <a:off x="10467975" y="3228975"/>
-            <a:ext cx="209550" cy="209550"/>
-          </a:xfrm>
-          <a:prstGeom prst="roundRect">
-            <a:avLst>
-              <a:gd name="adj" fmla="val 8000"/>
-            </a:avLst>
-          </a:prstGeom>
-          <a:solidFill>
-            <a:srgbClr val="34D399"/>
-          </a:solidFill>
-          <a:ln>
-            <a:noFill/>
-          </a:ln>
-          <a:effectLst/>
-        </p:spPr>
-        <p:style>
-          <a:lnRef idx="1">
-            <a:schemeClr val="accent1"/>
-          </a:lnRef>
-          <a:fillRef idx="3">
-            <a:schemeClr val="accent1"/>
-          </a:fillRef>
-          <a:effectRef idx="2">
-            <a:schemeClr val="accent1"/>
-          </a:effectRef>
-          <a:fontRef idx="minor">
-            <a:schemeClr val="lt1"/>
-          </a:fontRef>
-        </p:style>
-        <p:txBody>
-          <a:bodyPr rtlCol="0" anchor="ctr"/>
-          <a:lstStyle/>
-          <a:p>
-            <a:pPr algn="ctr"/>
-          </a:p>
-        </p:txBody>
-      </p:sp>
-      <p:sp>
-        <p:nvSpPr>
-          <p:cNvPr id="28" name="Rounded Rectangle 27"/>
-          <p:cNvSpPr/>
-          <p:nvPr/>
-        </p:nvSpPr>
-        <p:spPr>
-          <a:xfrm>
-            <a:off x="9144000" y="1905000"/>
-            <a:ext cx="2857500" cy="1123950"/>
-          </a:xfrm>
-          <a:prstGeom prst="roundRect">
-            <a:avLst>
-              <a:gd name="adj" fmla="val 8000"/>
-            </a:avLst>
-          </a:prstGeom>
-          <a:solidFill>
-            <a:srgbClr val="F1F5F9"/>
-          </a:solidFill>
-          <a:ln>
-            <a:noFill/>
-          </a:ln>
-          <a:effectLst/>
-        </p:spPr>
-        <p:style>
-          <a:lnRef idx="1">
-            <a:schemeClr val="accent1"/>
-          </a:lnRef>
-          <a:fillRef idx="3">
-            <a:schemeClr val="accent1"/>
-          </a:fillRef>
-          <a:effectRef idx="2">
-            <a:schemeClr val="accent1"/>
-          </a:effectRef>
-          <a:fontRef idx="minor">
-            <a:schemeClr val="lt1"/>
-          </a:fontRef>
-        </p:style>
-        <p:txBody>
-          <a:bodyPr rtlCol="0" anchor="ctr"/>
-          <a:lstStyle/>
-          <a:p>
-            <a:pPr algn="ctr"/>
-          </a:p>
-        </p:txBody>
-      </p:sp>
-      <p:sp>
-        <p:nvSpPr>
-          <p:cNvPr id="29" name="Rectangle 28"/>
-          <p:cNvSpPr/>
-          <p:nvPr/>
-        </p:nvSpPr>
-        <p:spPr>
-          <a:xfrm>
-            <a:off x="9144000" y="1905000"/>
-            <a:ext cx="2857500" cy="38100"/>
-          </a:xfrm>
-          <a:prstGeom prst="rect">
-            <a:avLst/>
-          </a:prstGeom>
-          <a:solidFill>
-            <a:srgbClr val="34D399"/>
-          </a:solidFill>
-          <a:ln>
-            <a:noFill/>
-          </a:ln>
-          <a:effectLst/>
-        </p:spPr>
-        <p:style>
-          <a:lnRef idx="1">
-            <a:schemeClr val="accent1"/>
-          </a:lnRef>
-          <a:fillRef idx="3">
-            <a:schemeClr val="accent1"/>
-          </a:fillRef>
-          <a:effectRef idx="2">
-            <a:schemeClr val="accent1"/>
-          </a:effectRef>
-          <a:fontRef idx="minor">
-            <a:schemeClr val="lt1"/>
-          </a:fontRef>
-        </p:style>
-        <p:txBody>
-          <a:bodyPr rtlCol="0" anchor="ctr"/>
-          <a:lstStyle/>
-          <a:p>
-            <a:pPr algn="ctr"/>
-          </a:p>
-        </p:txBody>
-      </p:sp>
-      <p:sp>
-        <p:nvSpPr>
-          <p:cNvPr id="30" name="TextBox 29"/>
-          <p:cNvSpPr txBox="1"/>
-          <p:nvPr/>
-        </p:nvSpPr>
-        <p:spPr>
-          <a:xfrm>
-            <a:off x="9239250" y="2000250"/>
-            <a:ext cx="2667000" cy="285750"/>
-          </a:xfrm>
-          <a:prstGeom prst="rect">
-            <a:avLst/>
-          </a:prstGeom>
-          <a:noFill/>
-        </p:spPr>
-        <p:txBody>
-          <a:bodyPr wrap="square" anchor="ctr">
-            <a:spAutoFit/>
-          </a:bodyPr>
-          <a:lstStyle/>
-          <a:p>
-            <a:pPr algn="ctr">
-              <a:lnSpc>
-                <a:spcPct val="100000"/>
-              </a:lnSpc>
-            </a:pPr>
-            <a:r>
-              <a:rPr sz="1400" b="1">
-                <a:solidFill>
-                  <a:srgbClr val="34D399"/>
-                </a:solidFill>
-                <a:latin typeface="PingFang SC"/>
-              </a:rPr>
-              <a:t>回滚</a:t>
-            </a:r>
-          </a:p>
-        </p:txBody>
-      </p:sp>
-      <p:sp>
-        <p:nvSpPr>
-          <p:cNvPr id="31" name="TextBox 30"/>
-          <p:cNvSpPr txBox="1"/>
-          <p:nvPr/>
-        </p:nvSpPr>
-        <p:spPr>
-          <a:xfrm>
-            <a:off x="9239250" y="2305050"/>
-            <a:ext cx="2667000" cy="666750"/>
-          </a:xfrm>
-          <a:prstGeom prst="rect">
-            <a:avLst/>
-          </a:prstGeom>
-          <a:noFill/>
-        </p:spPr>
-        <p:txBody>
-          <a:bodyPr wrap="square" anchor="ctr">
-            <a:spAutoFit/>
-          </a:bodyPr>
-          <a:lstStyle/>
-          <a:p>
-            <a:pPr algn="l">
-              <a:lnSpc>
-                <a:spcPct val="105000"/>
-              </a:lnSpc>
-            </a:pPr>
-            <a:r>
-              <a:rPr sz="1050" b="0">
-                <a:solidFill>
-                  <a:srgbClr val="475569"/>
-                </a:solidFill>
-                <a:latin typeface="PingFang SC"/>
-              </a:rPr>
-              <a:t>指标异常一键|regressed 非空→阻断</a:t>
-            </a:r>
-          </a:p>
-        </p:txBody>
-      </p:sp>
-      <p:sp>
-        <p:nvSpPr>
-          <p:cNvPr id="32" name="TextBox 31"/>
-          <p:cNvSpPr txBox="1"/>
-          <p:nvPr/>
-        </p:nvSpPr>
-        <p:spPr>
-          <a:xfrm>
-            <a:off x="10287000" y="6534150"/>
-            <a:ext cx="1619250" cy="266700"/>
-          </a:xfrm>
-          <a:prstGeom prst="rect">
-            <a:avLst/>
-          </a:prstGeom>
-          <a:noFill/>
-        </p:spPr>
-        <p:txBody>
-          <a:bodyPr wrap="square" anchor="ctr">
-            <a:spAutoFit/>
-          </a:bodyPr>
-          <a:lstStyle/>
-          <a:p>
-            <a:pPr algn="r">
-              <a:lnSpc>
-                <a:spcPct val="100000"/>
-              </a:lnSpc>
-            </a:pPr>
-            <a:r>
               <a:rPr sz="900" b="0">
                 <a:solidFill>
                   <a:srgbClr val="94A3B8"/>
@@ -23274,7 +23157,7 @@
       </p:sp>
       <p:sp>
         <p:nvSpPr>
-          <p:cNvPr id="33" name="TextBox 32"/>
+          <p:cNvPr id="32" name="TextBox 31"/>
           <p:cNvSpPr txBox="1"/>
           <p:nvPr/>
         </p:nvSpPr>
